--- a/static/teaching/Lecture03WorkLeisure.pptx
+++ b/static/teaching/Lecture03WorkLeisure.pptx
@@ -17,40 +17,40 @@
     <p:sldId id="689" r:id="rId5"/>
     <p:sldId id="690" r:id="rId6"/>
     <p:sldId id="691" r:id="rId7"/>
-    <p:sldId id="692" r:id="rId8"/>
-    <p:sldId id="707" r:id="rId9"/>
-    <p:sldId id="705" r:id="rId10"/>
-    <p:sldId id="694" r:id="rId11"/>
-    <p:sldId id="695" r:id="rId12"/>
-    <p:sldId id="696" r:id="rId13"/>
-    <p:sldId id="708" r:id="rId14"/>
-    <p:sldId id="709" r:id="rId15"/>
-    <p:sldId id="711" r:id="rId16"/>
-    <p:sldId id="732" r:id="rId17"/>
-    <p:sldId id="677" r:id="rId18"/>
-    <p:sldId id="678" r:id="rId19"/>
-    <p:sldId id="761" r:id="rId20"/>
-    <p:sldId id="783" r:id="rId21"/>
-    <p:sldId id="784" r:id="rId22"/>
-    <p:sldId id="653" r:id="rId23"/>
-    <p:sldId id="654" r:id="rId24"/>
-    <p:sldId id="733" r:id="rId25"/>
-    <p:sldId id="649" r:id="rId26"/>
-    <p:sldId id="650" r:id="rId27"/>
-    <p:sldId id="606" r:id="rId28"/>
-    <p:sldId id="734" r:id="rId29"/>
-    <p:sldId id="608" r:id="rId30"/>
-    <p:sldId id="735" r:id="rId31"/>
-    <p:sldId id="736" r:id="rId32"/>
-    <p:sldId id="712" r:id="rId33"/>
-    <p:sldId id="613" r:id="rId34"/>
-    <p:sldId id="713" r:id="rId35"/>
-    <p:sldId id="762" r:id="rId36"/>
-    <p:sldId id="615" r:id="rId37"/>
-    <p:sldId id="763" r:id="rId38"/>
-    <p:sldId id="764" r:id="rId39"/>
-    <p:sldId id="765" r:id="rId40"/>
-    <p:sldId id="766" r:id="rId41"/>
+    <p:sldId id="782" r:id="rId8"/>
+    <p:sldId id="692" r:id="rId9"/>
+    <p:sldId id="707" r:id="rId10"/>
+    <p:sldId id="705" r:id="rId11"/>
+    <p:sldId id="694" r:id="rId12"/>
+    <p:sldId id="695" r:id="rId13"/>
+    <p:sldId id="696" r:id="rId14"/>
+    <p:sldId id="708" r:id="rId15"/>
+    <p:sldId id="709" r:id="rId16"/>
+    <p:sldId id="711" r:id="rId17"/>
+    <p:sldId id="732" r:id="rId18"/>
+    <p:sldId id="677" r:id="rId19"/>
+    <p:sldId id="678" r:id="rId20"/>
+    <p:sldId id="761" r:id="rId21"/>
+    <p:sldId id="653" r:id="rId22"/>
+    <p:sldId id="654" r:id="rId23"/>
+    <p:sldId id="733" r:id="rId24"/>
+    <p:sldId id="649" r:id="rId25"/>
+    <p:sldId id="650" r:id="rId26"/>
+    <p:sldId id="606" r:id="rId27"/>
+    <p:sldId id="734" r:id="rId28"/>
+    <p:sldId id="608" r:id="rId29"/>
+    <p:sldId id="735" r:id="rId30"/>
+    <p:sldId id="736" r:id="rId31"/>
+    <p:sldId id="712" r:id="rId32"/>
+    <p:sldId id="613" r:id="rId33"/>
+    <p:sldId id="713" r:id="rId34"/>
+    <p:sldId id="762" r:id="rId35"/>
+    <p:sldId id="615" r:id="rId36"/>
+    <p:sldId id="763" r:id="rId37"/>
+    <p:sldId id="764" r:id="rId38"/>
+    <p:sldId id="765" r:id="rId39"/>
+    <p:sldId id="766" r:id="rId40"/>
+    <p:sldId id="785" r:id="rId41"/>
     <p:sldId id="767" r:id="rId42"/>
     <p:sldId id="698" r:id="rId43"/>
     <p:sldId id="699" r:id="rId44"/>
@@ -295,7 +295,7 @@
             <a:fld id="{18D8B74A-6E5E-468A-80B2-9B24B7069840}" type="datetimeFigureOut">
               <a:rPr lang="en-US" smtClean="0"/>
               <a:pPr/>
-              <a:t>10/10/2025</a:t>
+              <a:t>9/17/2026</a:t>
             </a:fld>
             <a:endParaRPr lang="en-US"/>
           </a:p>
@@ -462,7 +462,7 @@
             <a:fld id="{1702256C-C956-4C53-A3C5-499E3491123A}" type="datetimeFigureOut">
               <a:rPr lang="en-US" smtClean="0"/>
               <a:pPr/>
-              <a:t>10/10/2025</a:t>
+              <a:t>9/17/2026</a:t>
             </a:fld>
             <a:endParaRPr lang="en-US" dirty="0"/>
           </a:p>
@@ -1589,7 +1589,7 @@
             <a:fld id="{38C81B81-F266-43F7-BBFF-24E9DF9873A7}" type="slidenum">
               <a:rPr lang="en-US" smtClean="0"/>
               <a:pPr/>
-              <a:t>7</a:t>
+              <a:t>8</a:t>
             </a:fld>
             <a:endParaRPr lang="en-US" dirty="0"/>
           </a:p>
@@ -1681,7 +1681,7 @@
             <a:fld id="{38C81B81-F266-43F7-BBFF-24E9DF9873A7}" type="slidenum">
               <a:rPr lang="en-US" smtClean="0"/>
               <a:pPr/>
-              <a:t>10</a:t>
+              <a:t>11</a:t>
             </a:fld>
             <a:endParaRPr lang="en-US" dirty="0"/>
           </a:p>
@@ -1773,7 +1773,7 @@
             <a:fld id="{38C81B81-F266-43F7-BBFF-24E9DF9873A7}" type="slidenum">
               <a:rPr lang="en-US" smtClean="0"/>
               <a:pPr/>
-              <a:t>11</a:t>
+              <a:t>12</a:t>
             </a:fld>
             <a:endParaRPr lang="en-US" dirty="0"/>
           </a:p>
@@ -1860,7 +1860,7 @@
             <a:fld id="{38C81B81-F266-43F7-BBFF-24E9DF9873A7}" type="slidenum">
               <a:rPr lang="en-US" smtClean="0"/>
               <a:pPr/>
-              <a:t>22</a:t>
+              <a:t>21</a:t>
             </a:fld>
             <a:endParaRPr lang="en-US" dirty="0"/>
           </a:p>
@@ -1947,7 +1947,7 @@
             <a:fld id="{38C81B81-F266-43F7-BBFF-24E9DF9873A7}" type="slidenum">
               <a:rPr lang="en-US" smtClean="0"/>
               <a:pPr/>
-              <a:t>23</a:t>
+              <a:t>22</a:t>
             </a:fld>
             <a:endParaRPr lang="en-US" dirty="0"/>
           </a:p>
@@ -2034,7 +2034,7 @@
             <a:fld id="{38C81B81-F266-43F7-BBFF-24E9DF9873A7}" type="slidenum">
               <a:rPr lang="en-US" smtClean="0"/>
               <a:pPr/>
-              <a:t>25</a:t>
+              <a:t>24</a:t>
             </a:fld>
             <a:endParaRPr lang="en-US" dirty="0"/>
           </a:p>
@@ -2121,7 +2121,7 @@
             <a:fld id="{38C81B81-F266-43F7-BBFF-24E9DF9873A7}" type="slidenum">
               <a:rPr lang="en-US" smtClean="0"/>
               <a:pPr/>
-              <a:t>27</a:t>
+              <a:t>26</a:t>
             </a:fld>
             <a:endParaRPr lang="en-US" dirty="0"/>
           </a:p>
@@ -2208,7 +2208,7 @@
             <a:fld id="{38C81B81-F266-43F7-BBFF-24E9DF9873A7}" type="slidenum">
               <a:rPr lang="en-US" smtClean="0"/>
               <a:pPr/>
-              <a:t>33</a:t>
+              <a:t>32</a:t>
             </a:fld>
             <a:endParaRPr lang="en-US" dirty="0"/>
           </a:p>
@@ -2407,7 +2407,7 @@
             <a:fld id="{FA116613-D117-4B26-8716-A79E5DF21F9D}" type="datetime1">
               <a:rPr lang="en-US" smtClean="0"/>
               <a:pPr/>
-              <a:t>10/10/2025</a:t>
+              <a:t>9/17/2026</a:t>
             </a:fld>
             <a:endParaRPr lang="en-US" dirty="0"/>
           </a:p>
@@ -2572,7 +2572,7 @@
             <a:fld id="{28592B18-7484-4826-ACD0-DBE1F7E0A9E7}" type="datetime1">
               <a:rPr lang="en-US" smtClean="0"/>
               <a:pPr/>
-              <a:t>10/10/2025</a:t>
+              <a:t>9/17/2026</a:t>
             </a:fld>
             <a:endParaRPr lang="en-US" dirty="0"/>
           </a:p>
@@ -2747,7 +2747,7 @@
             <a:fld id="{EDCD63A4-F03F-451C-A7A7-135C5E49F01A}" type="datetime1">
               <a:rPr lang="en-US" smtClean="0"/>
               <a:pPr/>
-              <a:t>10/10/2025</a:t>
+              <a:t>9/17/2026</a:t>
             </a:fld>
             <a:endParaRPr lang="en-US" dirty="0"/>
           </a:p>
@@ -2912,7 +2912,7 @@
             <a:fld id="{25DE2B59-D736-4086-94C8-80A1D7DE9550}" type="datetime1">
               <a:rPr lang="en-US" smtClean="0"/>
               <a:pPr/>
-              <a:t>10/10/2025</a:t>
+              <a:t>9/17/2026</a:t>
             </a:fld>
             <a:endParaRPr lang="en-US" dirty="0"/>
           </a:p>
@@ -3154,7 +3154,7 @@
             <a:fld id="{45ABF689-6857-46E2-BACD-C2204C0370F2}" type="datetime1">
               <a:rPr lang="en-US" smtClean="0"/>
               <a:pPr/>
-              <a:t>10/10/2025</a:t>
+              <a:t>9/17/2026</a:t>
             </a:fld>
             <a:endParaRPr lang="en-US" dirty="0"/>
           </a:p>
@@ -3436,7 +3436,7 @@
             <a:fld id="{BCE8C386-5CA8-418B-B72C-00E8278FF0A1}" type="datetime1">
               <a:rPr lang="en-US" smtClean="0"/>
               <a:pPr/>
-              <a:t>10/10/2025</a:t>
+              <a:t>9/17/2026</a:t>
             </a:fld>
             <a:endParaRPr lang="en-US" dirty="0"/>
           </a:p>
@@ -3852,7 +3852,7 @@
             <a:fld id="{47A8236F-5AB6-4687-9A54-EFB78614D5F0}" type="datetime1">
               <a:rPr lang="en-US" smtClean="0"/>
               <a:pPr/>
-              <a:t>10/10/2025</a:t>
+              <a:t>9/17/2026</a:t>
             </a:fld>
             <a:endParaRPr lang="en-US" dirty="0"/>
           </a:p>
@@ -3966,7 +3966,7 @@
             <a:fld id="{509184B9-FBF0-4E35-99CE-76417C9E91A7}" type="datetime1">
               <a:rPr lang="en-US" smtClean="0"/>
               <a:pPr/>
-              <a:t>10/10/2025</a:t>
+              <a:t>9/17/2026</a:t>
             </a:fld>
             <a:endParaRPr lang="en-US" dirty="0"/>
           </a:p>
@@ -4058,7 +4058,7 @@
             <a:fld id="{DA191169-DA89-40FD-8F16-B8F5E2062F2F}" type="datetime1">
               <a:rPr lang="en-US" smtClean="0"/>
               <a:pPr/>
-              <a:t>10/10/2025</a:t>
+              <a:t>9/17/2026</a:t>
             </a:fld>
             <a:endParaRPr lang="en-US" dirty="0"/>
           </a:p>
@@ -4330,7 +4330,7 @@
             <a:fld id="{F050637C-FFC0-40FE-8E96-0A2E712387D9}" type="datetime1">
               <a:rPr lang="en-US" smtClean="0"/>
               <a:pPr/>
-              <a:t>10/10/2025</a:t>
+              <a:t>9/17/2026</a:t>
             </a:fld>
             <a:endParaRPr lang="en-US" dirty="0"/>
           </a:p>
@@ -4579,7 +4579,7 @@
             <a:fld id="{2BBA6762-23A5-4C17-A786-A464CEB04628}" type="datetime1">
               <a:rPr lang="en-US" smtClean="0"/>
               <a:pPr/>
-              <a:t>10/10/2025</a:t>
+              <a:t>9/17/2026</a:t>
             </a:fld>
             <a:endParaRPr lang="en-US" dirty="0"/>
           </a:p>
@@ -4787,7 +4787,7 @@
             <a:fld id="{B5FF5EF4-C28D-489C-BE85-C8807AA9012C}" type="datetime1">
               <a:rPr lang="en-US" smtClean="0"/>
               <a:pPr/>
-              <a:t>10/10/2025</a:t>
+              <a:t>9/17/2026</a:t>
             </a:fld>
             <a:endParaRPr lang="en-US" dirty="0"/>
           </a:p>
@@ -5320,6 +5320,501 @@
           <a:p>
             <a:r>
               <a:rPr lang="en-US" dirty="0"/>
+              <a:t>Household Budget Constraint</a:t>
+            </a:r>
+          </a:p>
+        </p:txBody>
+      </p:sp>
+      <mc:AlternateContent xmlns:mc="http://schemas.openxmlformats.org/markup-compatibility/2006" xmlns:a14="http://schemas.microsoft.com/office/drawing/2010/main">
+        <mc:Choice Requires="a14">
+          <p:sp>
+            <p:nvSpPr>
+              <p:cNvPr id="3" name="Content Placeholder 2"/>
+              <p:cNvSpPr>
+                <a:spLocks noGrp="1"/>
+              </p:cNvSpPr>
+              <p:nvPr>
+                <p:ph idx="1"/>
+              </p:nvPr>
+            </p:nvSpPr>
+            <p:spPr>
+              <a:xfrm>
+                <a:off x="609600" y="1600201"/>
+                <a:ext cx="10972800" cy="5121275"/>
+              </a:xfrm>
+            </p:spPr>
+            <p:txBody>
+              <a:bodyPr>
+                <a:normAutofit/>
+              </a:bodyPr>
+              <a:lstStyle/>
+              <a:p>
+                <a:r>
+                  <a:rPr lang="en-US" dirty="0"/>
+                  <a:t>Households maximize utility subject to a </a:t>
+                </a:r>
+                <a:r>
+                  <a:rPr lang="en-US" dirty="0">
+                    <a:solidFill>
+                      <a:schemeClr val="accent2"/>
+                    </a:solidFill>
+                  </a:rPr>
+                  <a:t>budget constraint</a:t>
+                </a:r>
+              </a:p>
+              <a:p>
+                <a:r>
+                  <a:rPr lang="en-US" dirty="0"/>
+                  <a:t>Budget constraint:</a:t>
+                </a:r>
+              </a:p>
+              <a:p>
+                <a:pPr marL="0" indent="0">
+                  <a:buNone/>
+                </a:pPr>
+                <a14:m>
+                  <m:oMathPara xmlns:m="http://schemas.openxmlformats.org/officeDocument/2006/math">
+                    <m:oMath>
+                      <m:r>
+                        <a:rPr lang="en-US" i="1">
+                          <a:latin typeface="Cambria Math" panose="02040503050406030204" pitchFamily="18" charset="0"/>
+                        </a:rPr>
+                        <m:t>𝐶</m:t>
+                      </m:r>
+                      <m:r>
+                        <a:rPr lang="en-US" i="1">
+                          <a:latin typeface="Cambria Math" panose="02040503050406030204" pitchFamily="18" charset="0"/>
+                        </a:rPr>
+                        <m:t>=</m:t>
+                      </m:r>
+                      <m:r>
+                        <a:rPr lang="en-US" i="1">
+                          <a:latin typeface="Cambria Math" panose="02040503050406030204" pitchFamily="18" charset="0"/>
+                        </a:rPr>
+                        <m:t>𝑤𝐻</m:t>
+                      </m:r>
+                      <m:r>
+                        <a:rPr lang="en-US" i="1">
+                          <a:latin typeface="Cambria Math" panose="02040503050406030204" pitchFamily="18" charset="0"/>
+                        </a:rPr>
+                        <m:t>+</m:t>
+                      </m:r>
+                      <m:r>
+                        <a:rPr lang="en-US" i="1">
+                          <a:latin typeface="Cambria Math" panose="02040503050406030204" pitchFamily="18" charset="0"/>
+                        </a:rPr>
+                        <m:t>𝑇</m:t>
+                      </m:r>
+                    </m:oMath>
+                  </m:oMathPara>
+                </a14:m>
+                <a:endParaRPr lang="en-US" dirty="0"/>
+              </a:p>
+              <a:p>
+                <a:r>
+                  <a:rPr lang="en-US" dirty="0"/>
+                  <a:t>Left-hand side: Sources of spending</a:t>
+                </a:r>
+              </a:p>
+              <a:p>
+                <a:pPr lvl="1"/>
+                <a:r>
+                  <a:rPr lang="en-US" dirty="0"/>
+                  <a:t>Consumption: </a:t>
+                </a:r>
+                <a14:m>
+                  <m:oMath xmlns:m="http://schemas.openxmlformats.org/officeDocument/2006/math">
+                    <m:r>
+                      <a:rPr lang="en-US" b="0" i="1" smtClean="0">
+                        <a:latin typeface="Cambria Math" panose="02040503050406030204" pitchFamily="18" charset="0"/>
+                      </a:rPr>
+                      <m:t>𝐶</m:t>
+                    </m:r>
+                  </m:oMath>
+                </a14:m>
+                <a:endParaRPr lang="en-US" dirty="0"/>
+              </a:p>
+              <a:p>
+                <a:r>
+                  <a:rPr lang="en-US" dirty="0"/>
+                  <a:t>Right-hand side: Sources of income</a:t>
+                </a:r>
+              </a:p>
+              <a:p>
+                <a:pPr lvl="1"/>
+                <a:r>
+                  <a:rPr lang="en-US" dirty="0"/>
+                  <a:t>Labor income: </a:t>
+                </a:r>
+                <a14:m>
+                  <m:oMath xmlns:m="http://schemas.openxmlformats.org/officeDocument/2006/math">
+                    <m:r>
+                      <a:rPr lang="en-US" i="1">
+                        <a:latin typeface="Cambria Math" panose="02040503050406030204" pitchFamily="18" charset="0"/>
+                      </a:rPr>
+                      <m:t>𝑤𝐻</m:t>
+                    </m:r>
+                  </m:oMath>
+                </a14:m>
+                <a:r>
+                  <a:rPr lang="en-US" dirty="0"/>
+                  <a:t> </a:t>
+                </a:r>
+              </a:p>
+              <a:p>
+                <a:pPr lvl="1"/>
+                <a:r>
+                  <a:rPr lang="en-US" dirty="0"/>
+                  <a:t>Other income: </a:t>
+                </a:r>
+                <a14:m>
+                  <m:oMath xmlns:m="http://schemas.openxmlformats.org/officeDocument/2006/math">
+                    <m:r>
+                      <a:rPr lang="en-US" b="0" i="1" smtClean="0">
+                        <a:latin typeface="Cambria Math" panose="02040503050406030204" pitchFamily="18" charset="0"/>
+                      </a:rPr>
+                      <m:t>𝑇</m:t>
+                    </m:r>
+                  </m:oMath>
+                </a14:m>
+                <a:r>
+                  <a:rPr lang="en-US" dirty="0"/>
+                  <a:t> (gov. transfers, lottery winnings, etc.)</a:t>
+                </a:r>
+              </a:p>
+            </p:txBody>
+          </p:sp>
+        </mc:Choice>
+        <mc:Fallback xmlns="">
+          <p:sp>
+            <p:nvSpPr>
+              <p:cNvPr id="3" name="Content Placeholder 2"/>
+              <p:cNvSpPr>
+                <a:spLocks noGrp="1" noRot="1" noChangeAspect="1" noMove="1" noResize="1" noEditPoints="1" noAdjustHandles="1" noChangeArrowheads="1" noChangeShapeType="1" noTextEdit="1"/>
+              </p:cNvSpPr>
+              <p:nvPr>
+                <p:ph idx="1"/>
+              </p:nvPr>
+            </p:nvSpPr>
+            <p:spPr>
+              <a:xfrm>
+                <a:off x="609600" y="1600201"/>
+                <a:ext cx="10972800" cy="5121275"/>
+              </a:xfrm>
+              <a:blipFill>
+                <a:blip r:embed="rId2"/>
+                <a:stretch>
+                  <a:fillRect l="-1278" t="-1548"/>
+                </a:stretch>
+              </a:blipFill>
+            </p:spPr>
+            <p:txBody>
+              <a:bodyPr/>
+              <a:lstStyle/>
+              <a:p>
+                <a:r>
+                  <a:rPr lang="en-US">
+                    <a:noFill/>
+                  </a:rPr>
+                  <a:t> </a:t>
+                </a:r>
+              </a:p>
+            </p:txBody>
+          </p:sp>
+        </mc:Fallback>
+      </mc:AlternateContent>
+      <p:sp>
+        <p:nvSpPr>
+          <p:cNvPr id="4" name="Slide Number Placeholder 3"/>
+          <p:cNvSpPr>
+            <a:spLocks noGrp="1"/>
+          </p:cNvSpPr>
+          <p:nvPr>
+            <p:ph type="sldNum" sz="quarter" idx="12"/>
+          </p:nvPr>
+        </p:nvSpPr>
+        <p:spPr/>
+        <p:txBody>
+          <a:bodyPr/>
+          <a:lstStyle/>
+          <a:p>
+            <a:fld id="{85442DEE-2235-41B4-99BD-234203159492}" type="slidenum">
+              <a:rPr lang="en-US" smtClean="0"/>
+              <a:pPr/>
+              <a:t>10</a:t>
+            </a:fld>
+            <a:endParaRPr lang="en-US" dirty="0"/>
+          </a:p>
+        </p:txBody>
+      </p:sp>
+    </p:spTree>
+    <p:extLst>
+      <p:ext uri="{BB962C8B-B14F-4D97-AF65-F5344CB8AC3E}">
+        <p14:creationId xmlns:p14="http://schemas.microsoft.com/office/powerpoint/2010/main" val="3439374275"/>
+      </p:ext>
+    </p:extLst>
+  </p:cSld>
+  <p:clrMapOvr>
+    <a:masterClrMapping/>
+  </p:clrMapOvr>
+  <p:timing>
+    <p:tnLst>
+      <p:par>
+        <p:cTn id="1" dur="indefinite" restart="never" nodeType="tmRoot">
+          <p:childTnLst>
+            <p:seq concurrent="1" nextAc="seek">
+              <p:cTn id="2" dur="indefinite" nodeType="mainSeq">
+                <p:childTnLst>
+                  <p:par>
+                    <p:cTn id="3" fill="hold">
+                      <p:stCondLst>
+                        <p:cond delay="indefinite"/>
+                      </p:stCondLst>
+                      <p:childTnLst>
+                        <p:par>
+                          <p:cTn id="4" fill="hold">
+                            <p:stCondLst>
+                              <p:cond delay="0"/>
+                            </p:stCondLst>
+                            <p:childTnLst>
+                              <p:par>
+                                <p:cTn id="5" presetID="1" presetClass="entr" presetSubtype="0" fill="hold" nodeType="clickEffect">
+                                  <p:stCondLst>
+                                    <p:cond delay="0"/>
+                                  </p:stCondLst>
+                                  <p:childTnLst>
+                                    <p:set>
+                                      <p:cBhvr>
+                                        <p:cTn id="6" dur="1" fill="hold">
+                                          <p:stCondLst>
+                                            <p:cond delay="0"/>
+                                          </p:stCondLst>
+                                        </p:cTn>
+                                        <p:tgtEl>
+                                          <p:spTgt spid="3">
+                                            <p:txEl>
+                                              <p:pRg st="3" end="3"/>
+                                            </p:txEl>
+                                          </p:spTgt>
+                                        </p:tgtEl>
+                                        <p:attrNameLst>
+                                          <p:attrName>style.visibility</p:attrName>
+                                        </p:attrNameLst>
+                                      </p:cBhvr>
+                                      <p:to>
+                                        <p:strVal val="visible"/>
+                                      </p:to>
+                                    </p:set>
+                                  </p:childTnLst>
+                                </p:cTn>
+                              </p:par>
+                              <p:par>
+                                <p:cTn id="7" presetID="1" presetClass="entr" presetSubtype="0" fill="hold" nodeType="withEffect">
+                                  <p:stCondLst>
+                                    <p:cond delay="0"/>
+                                  </p:stCondLst>
+                                  <p:childTnLst>
+                                    <p:set>
+                                      <p:cBhvr>
+                                        <p:cTn id="8" dur="1" fill="hold">
+                                          <p:stCondLst>
+                                            <p:cond delay="0"/>
+                                          </p:stCondLst>
+                                        </p:cTn>
+                                        <p:tgtEl>
+                                          <p:spTgt spid="3">
+                                            <p:txEl>
+                                              <p:pRg st="4" end="4"/>
+                                            </p:txEl>
+                                          </p:spTgt>
+                                        </p:tgtEl>
+                                        <p:attrNameLst>
+                                          <p:attrName>style.visibility</p:attrName>
+                                        </p:attrNameLst>
+                                      </p:cBhvr>
+                                      <p:to>
+                                        <p:strVal val="visible"/>
+                                      </p:to>
+                                    </p:set>
+                                  </p:childTnLst>
+                                </p:cTn>
+                              </p:par>
+                            </p:childTnLst>
+                          </p:cTn>
+                        </p:par>
+                      </p:childTnLst>
+                    </p:cTn>
+                  </p:par>
+                  <p:par>
+                    <p:cTn id="9" fill="hold">
+                      <p:stCondLst>
+                        <p:cond delay="indefinite"/>
+                      </p:stCondLst>
+                      <p:childTnLst>
+                        <p:par>
+                          <p:cTn id="10" fill="hold">
+                            <p:stCondLst>
+                              <p:cond delay="0"/>
+                            </p:stCondLst>
+                            <p:childTnLst>
+                              <p:par>
+                                <p:cTn id="11" presetID="1" presetClass="entr" presetSubtype="0" fill="hold" nodeType="clickEffect">
+                                  <p:stCondLst>
+                                    <p:cond delay="0"/>
+                                  </p:stCondLst>
+                                  <p:childTnLst>
+                                    <p:set>
+                                      <p:cBhvr>
+                                        <p:cTn id="12" dur="1" fill="hold">
+                                          <p:stCondLst>
+                                            <p:cond delay="0"/>
+                                          </p:stCondLst>
+                                        </p:cTn>
+                                        <p:tgtEl>
+                                          <p:spTgt spid="3">
+                                            <p:txEl>
+                                              <p:pRg st="5" end="5"/>
+                                            </p:txEl>
+                                          </p:spTgt>
+                                        </p:tgtEl>
+                                        <p:attrNameLst>
+                                          <p:attrName>style.visibility</p:attrName>
+                                        </p:attrNameLst>
+                                      </p:cBhvr>
+                                      <p:to>
+                                        <p:strVal val="visible"/>
+                                      </p:to>
+                                    </p:set>
+                                  </p:childTnLst>
+                                </p:cTn>
+                              </p:par>
+                              <p:par>
+                                <p:cTn id="13" presetID="1" presetClass="entr" presetSubtype="0" fill="hold" nodeType="withEffect">
+                                  <p:stCondLst>
+                                    <p:cond delay="0"/>
+                                  </p:stCondLst>
+                                  <p:childTnLst>
+                                    <p:set>
+                                      <p:cBhvr>
+                                        <p:cTn id="14" dur="1" fill="hold">
+                                          <p:stCondLst>
+                                            <p:cond delay="0"/>
+                                          </p:stCondLst>
+                                        </p:cTn>
+                                        <p:tgtEl>
+                                          <p:spTgt spid="3">
+                                            <p:txEl>
+                                              <p:pRg st="6" end="6"/>
+                                            </p:txEl>
+                                          </p:spTgt>
+                                        </p:tgtEl>
+                                        <p:attrNameLst>
+                                          <p:attrName>style.visibility</p:attrName>
+                                        </p:attrNameLst>
+                                      </p:cBhvr>
+                                      <p:to>
+                                        <p:strVal val="visible"/>
+                                      </p:to>
+                                    </p:set>
+                                  </p:childTnLst>
+                                </p:cTn>
+                              </p:par>
+                              <p:par>
+                                <p:cTn id="15" presetID="1" presetClass="entr" presetSubtype="0" fill="hold" nodeType="withEffect">
+                                  <p:stCondLst>
+                                    <p:cond delay="0"/>
+                                  </p:stCondLst>
+                                  <p:childTnLst>
+                                    <p:set>
+                                      <p:cBhvr>
+                                        <p:cTn id="16" dur="1" fill="hold">
+                                          <p:stCondLst>
+                                            <p:cond delay="0"/>
+                                          </p:stCondLst>
+                                        </p:cTn>
+                                        <p:tgtEl>
+                                          <p:spTgt spid="3">
+                                            <p:txEl>
+                                              <p:pRg st="7" end="7"/>
+                                            </p:txEl>
+                                          </p:spTgt>
+                                        </p:tgtEl>
+                                        <p:attrNameLst>
+                                          <p:attrName>style.visibility</p:attrName>
+                                        </p:attrNameLst>
+                                      </p:cBhvr>
+                                      <p:to>
+                                        <p:strVal val="visible"/>
+                                      </p:to>
+                                    </p:set>
+                                  </p:childTnLst>
+                                </p:cTn>
+                              </p:par>
+                            </p:childTnLst>
+                          </p:cTn>
+                        </p:par>
+                      </p:childTnLst>
+                    </p:cTn>
+                  </p:par>
+                </p:childTnLst>
+              </p:cTn>
+              <p:prevCondLst>
+                <p:cond evt="onPrev" delay="0">
+                  <p:tgtEl>
+                    <p:sldTgt/>
+                  </p:tgtEl>
+                </p:cond>
+              </p:prevCondLst>
+              <p:nextCondLst>
+                <p:cond evt="onNext" delay="0">
+                  <p:tgtEl>
+                    <p:sldTgt/>
+                  </p:tgtEl>
+                </p:cond>
+              </p:nextCondLst>
+            </p:seq>
+          </p:childTnLst>
+        </p:cTn>
+      </p:par>
+    </p:tnLst>
+  </p:timing>
+</p:sld>
+</file>
+
+<file path=ppt/slides/slide11.xml><?xml version="1.0" encoding="utf-8"?>
+<p:sld xmlns:a="http://schemas.openxmlformats.org/drawingml/2006/main" xmlns:r="http://schemas.openxmlformats.org/officeDocument/2006/relationships" xmlns:p="http://schemas.openxmlformats.org/presentationml/2006/main">
+  <p:cSld>
+    <p:spTree>
+      <p:nvGrpSpPr>
+        <p:cNvPr id="1" name=""/>
+        <p:cNvGrpSpPr/>
+        <p:nvPr/>
+      </p:nvGrpSpPr>
+      <p:grpSpPr>
+        <a:xfrm>
+          <a:off x="0" y="0"/>
+          <a:ext cx="0" cy="0"/>
+          <a:chOff x="0" y="0"/>
+          <a:chExt cx="0" cy="0"/>
+        </a:xfrm>
+      </p:grpSpPr>
+      <p:sp>
+        <p:nvSpPr>
+          <p:cNvPr id="2" name="Title 1"/>
+          <p:cNvSpPr>
+            <a:spLocks noGrp="1"/>
+          </p:cNvSpPr>
+          <p:nvPr>
+            <p:ph type="title"/>
+          </p:nvPr>
+        </p:nvSpPr>
+        <p:spPr/>
+        <p:txBody>
+          <a:bodyPr/>
+          <a:lstStyle/>
+          <a:p>
+            <a:r>
+              <a:rPr lang="en-US" dirty="0"/>
               <a:t>Household’s Problem</a:t>
             </a:r>
           </a:p>
@@ -5376,10 +5871,7 @@
                 </a:pPr>
                 <a14:m>
                   <m:oMathPara xmlns:m="http://schemas.openxmlformats.org/officeDocument/2006/math">
-                    <m:oMathParaPr>
-                      <m:jc m:val="centerGroup"/>
-                    </m:oMathParaPr>
-                    <m:oMath xmlns:m="http://schemas.openxmlformats.org/officeDocument/2006/math">
+                    <m:oMath>
                       <m:r>
                         <a:rPr lang="en-US" b="0" i="1" smtClean="0">
                           <a:latin typeface="Cambria Math" panose="02040503050406030204" pitchFamily="18" charset="0"/>
@@ -5450,10 +5942,7 @@
                 </a:pPr>
                 <a14:m>
                   <m:oMathPara xmlns:m="http://schemas.openxmlformats.org/officeDocument/2006/math">
-                    <m:oMathParaPr>
-                      <m:jc m:val="centerGroup"/>
-                    </m:oMathParaPr>
-                    <m:oMath xmlns:m="http://schemas.openxmlformats.org/officeDocument/2006/math">
+                    <m:oMath>
                       <m:r>
                         <a:rPr lang="en-US" b="0" i="1" smtClean="0">
                           <a:latin typeface="Cambria Math" panose="02040503050406030204" pitchFamily="18" charset="0"/>
@@ -5548,7 +6037,7 @@
             <a:fld id="{85442DEE-2235-41B4-99BD-234203159492}" type="slidenum">
               <a:rPr lang="en-US" smtClean="0"/>
               <a:pPr/>
-              <a:t>10</a:t>
+              <a:t>11</a:t>
             </a:fld>
             <a:endParaRPr lang="en-US" dirty="0"/>
           </a:p>
@@ -5567,7 +6056,7 @@
 </p:sld>
 </file>
 
-<file path=ppt/slides/slide11.xml><?xml version="1.0" encoding="utf-8"?>
+<file path=ppt/slides/slide12.xml><?xml version="1.0" encoding="utf-8"?>
 <p:sld xmlns:a="http://schemas.openxmlformats.org/drawingml/2006/main" xmlns:r="http://schemas.openxmlformats.org/officeDocument/2006/relationships" xmlns:p="http://schemas.openxmlformats.org/presentationml/2006/main">
   <p:cSld>
     <p:spTree>
@@ -5647,10 +6136,7 @@
                 </a:pPr>
                 <a14:m>
                   <m:oMathPara xmlns:m="http://schemas.openxmlformats.org/officeDocument/2006/math">
-                    <m:oMathParaPr>
-                      <m:jc m:val="centerGroup"/>
-                    </m:oMathParaPr>
-                    <m:oMath xmlns:m="http://schemas.openxmlformats.org/officeDocument/2006/math">
+                    <m:oMath>
                       <m:r>
                         <a:rPr lang="en-US" b="0" i="1" smtClean="0">
                           <a:latin typeface="Cambria Math" panose="02040503050406030204" pitchFamily="18" charset="0"/>
@@ -5751,10 +6237,7 @@
                 </a:pPr>
                 <a14:m>
                   <m:oMathPara xmlns:m="http://schemas.openxmlformats.org/officeDocument/2006/math">
-                    <m:oMathParaPr>
-                      <m:jc m:val="centerGroup"/>
-                    </m:oMathParaPr>
-                    <m:oMath xmlns:m="http://schemas.openxmlformats.org/officeDocument/2006/math">
+                    <m:oMath>
                       <m:r>
                         <a:rPr lang="en-US" b="0" i="1" smtClean="0">
                           <a:latin typeface="Cambria Math" panose="02040503050406030204" pitchFamily="18" charset="0"/>
@@ -5921,10 +6404,7 @@
                 </a:pPr>
                 <a14:m>
                   <m:oMathPara xmlns:m="http://schemas.openxmlformats.org/officeDocument/2006/math">
-                    <m:oMathParaPr>
-                      <m:jc m:val="centerGroup"/>
-                    </m:oMathParaPr>
-                    <m:oMath xmlns:m="http://schemas.openxmlformats.org/officeDocument/2006/math">
+                    <m:oMath>
                       <m:r>
                         <a:rPr lang="en-US" b="0" i="1" smtClean="0">
                           <a:latin typeface="Cambria Math" panose="02040503050406030204" pitchFamily="18" charset="0"/>
@@ -6048,10 +6528,7 @@
                 </a:pPr>
                 <a14:m>
                   <m:oMathPara xmlns:m="http://schemas.openxmlformats.org/officeDocument/2006/math">
-                    <m:oMathParaPr>
-                      <m:jc m:val="centerGroup"/>
-                    </m:oMathParaPr>
-                    <m:oMath xmlns:m="http://schemas.openxmlformats.org/officeDocument/2006/math">
+                    <m:oMath>
                       <m:r>
                         <a:rPr lang="en-US" i="1">
                           <a:latin typeface="Cambria Math" panose="02040503050406030204" pitchFamily="18" charset="0"/>
@@ -6219,7 +6696,7 @@
             <a:fld id="{85442DEE-2235-41B4-99BD-234203159492}" type="slidenum">
               <a:rPr lang="en-US" smtClean="0"/>
               <a:pPr/>
-              <a:t>11</a:t>
+              <a:t>12</a:t>
             </a:fld>
             <a:endParaRPr lang="en-US" dirty="0"/>
           </a:p>
@@ -6508,7 +6985,7 @@
 </p:sld>
 </file>
 
-<file path=ppt/slides/slide12.xml><?xml version="1.0" encoding="utf-8"?>
+<file path=ppt/slides/slide13.xml><?xml version="1.0" encoding="utf-8"?>
 <p:sld xmlns:a="http://schemas.openxmlformats.org/drawingml/2006/main" xmlns:r="http://schemas.openxmlformats.org/officeDocument/2006/relationships" xmlns:p="http://schemas.openxmlformats.org/presentationml/2006/main">
   <p:cSld>
     <p:spTree>
@@ -6578,10 +7055,7 @@
                 </a:pPr>
                 <a14:m>
                   <m:oMathPara xmlns:m="http://schemas.openxmlformats.org/officeDocument/2006/math">
-                    <m:oMathParaPr>
-                      <m:jc m:val="centerGroup"/>
-                    </m:oMathParaPr>
-                    <m:oMath xmlns:m="http://schemas.openxmlformats.org/officeDocument/2006/math">
+                    <m:oMath>
                       <m:r>
                         <a:rPr lang="en-US" i="1" smtClean="0">
                           <a:latin typeface="Cambria Math" panose="02040503050406030204" pitchFamily="18" charset="0"/>
@@ -6795,7 +7269,7 @@
             <a:fld id="{85442DEE-2235-41B4-99BD-234203159492}" type="slidenum">
               <a:rPr lang="en-US" smtClean="0"/>
               <a:pPr/>
-              <a:t>12</a:t>
+              <a:t>13</a:t>
             </a:fld>
             <a:endParaRPr lang="en-US" dirty="0"/>
           </a:p>
@@ -6955,7 +7429,7 @@
 </p:sld>
 </file>
 
-<file path=ppt/slides/slide13.xml><?xml version="1.0" encoding="utf-8"?>
+<file path=ppt/slides/slide14.xml><?xml version="1.0" encoding="utf-8"?>
 <p:sld xmlns:a="http://schemas.openxmlformats.org/drawingml/2006/main" xmlns:r="http://schemas.openxmlformats.org/officeDocument/2006/relationships" xmlns:p="http://schemas.openxmlformats.org/presentationml/2006/main">
   <p:cSld>
     <p:spTree>
@@ -7227,7 +7701,7 @@
                       <m:sSupPr>
                         <m:ctrlPr>
                           <a:rPr lang="en-US" i="1">
-                            <a:latin typeface="Cambria Math" panose="02040503050406030204" pitchFamily="18" charset="0"/>
+                            <a:latin typeface="Cambria Math"/>
                             <a:ea typeface="Cambria Math"/>
                           </a:rPr>
                         </m:ctrlPr>
@@ -7288,7 +7762,7 @@
                       <m:sSupPr>
                         <m:ctrlPr>
                           <a:rPr lang="en-US" i="1">
-                            <a:latin typeface="Cambria Math" panose="02040503050406030204" pitchFamily="18" charset="0"/>
+                            <a:latin typeface="Cambria Math"/>
                             <a:ea typeface="Cambria Math"/>
                           </a:rPr>
                         </m:ctrlPr>
@@ -7407,7 +7881,7 @@
             <a:fld id="{85442DEE-2235-41B4-99BD-234203159492}" type="slidenum">
               <a:rPr lang="en-US" smtClean="0"/>
               <a:pPr/>
-              <a:t>13</a:t>
+              <a:t>14</a:t>
             </a:fld>
             <a:endParaRPr lang="en-US" dirty="0"/>
           </a:p>
@@ -7665,7 +8139,7 @@
 </p:sld>
 </file>
 
-<file path=ppt/slides/slide14.xml><?xml version="1.0" encoding="utf-8"?>
+<file path=ppt/slides/slide15.xml><?xml version="1.0" encoding="utf-8"?>
 <p:sld xmlns:a="http://schemas.openxmlformats.org/drawingml/2006/main" xmlns:r="http://schemas.openxmlformats.org/officeDocument/2006/relationships" xmlns:p="http://schemas.openxmlformats.org/presentationml/2006/main">
   <p:cSld>
     <p:spTree>
@@ -7746,8 +8220,8 @@
                     <m:sSup>
                       <m:sSupPr>
                         <m:ctrlPr>
-                          <a:rPr lang="en-US" i="1" smtClean="0">
-                            <a:latin typeface="Cambria Math" panose="02040503050406030204" pitchFamily="18" charset="0"/>
+                          <a:rPr lang="en-US" b="0" i="1" smtClean="0">
+                            <a:latin typeface="Cambria Math"/>
                           </a:rPr>
                         </m:ctrlPr>
                       </m:sSupPr>
@@ -7786,8 +8260,8 @@
                     <m:sSup>
                       <m:sSupPr>
                         <m:ctrlPr>
-                          <a:rPr lang="en-US" i="1" smtClean="0">
-                            <a:latin typeface="Cambria Math" panose="02040503050406030204" pitchFamily="18" charset="0"/>
+                          <a:rPr lang="en-US" b="0" i="1" smtClean="0">
+                            <a:latin typeface="Cambria Math"/>
                           </a:rPr>
                         </m:ctrlPr>
                       </m:sSupPr>
@@ -7828,15 +8302,12 @@
                 </a:pPr>
                 <a14:m>
                   <m:oMathPara xmlns:m="http://schemas.openxmlformats.org/officeDocument/2006/math">
-                    <m:oMathParaPr>
-                      <m:jc m:val="centerGroup"/>
-                    </m:oMathParaPr>
-                    <m:oMath xmlns:m="http://schemas.openxmlformats.org/officeDocument/2006/math">
+                    <m:oMath>
                       <m:sSup>
                         <m:sSupPr>
                           <m:ctrlPr>
                             <a:rPr lang="en-US" i="1">
-                              <a:latin typeface="Cambria Math" panose="02040503050406030204" pitchFamily="18" charset="0"/>
+                              <a:latin typeface="Cambria Math"/>
                               <a:ea typeface="Cambria Math"/>
                             </a:rPr>
                           </m:ctrlPr>
@@ -7863,7 +8334,7 @@
                       <m:d>
                         <m:dPr>
                           <m:ctrlPr>
-                            <a:rPr lang="en-US" i="1">
+                            <a:rPr lang="en-US" b="0" i="1" smtClean="0">
                               <a:latin typeface="Cambria Math" panose="02040503050406030204" pitchFamily="18" charset="0"/>
                               <a:ea typeface="Cambria Math"/>
                             </a:rPr>
@@ -7897,7 +8368,7 @@
                         <m:sSupPr>
                           <m:ctrlPr>
                             <a:rPr lang="en-US" i="1">
-                              <a:latin typeface="Cambria Math" panose="02040503050406030204" pitchFamily="18" charset="0"/>
+                              <a:latin typeface="Cambria Math"/>
                               <a:ea typeface="Cambria Math"/>
                             </a:rPr>
                           </m:ctrlPr>
@@ -7924,7 +8395,7 @@
                       <m:d>
                         <m:dPr>
                           <m:ctrlPr>
-                            <a:rPr lang="en-US" i="1">
+                            <a:rPr lang="en-US" b="0" i="1" smtClean="0">
                               <a:latin typeface="Cambria Math" panose="02040503050406030204" pitchFamily="18" charset="0"/>
                             </a:rPr>
                           </m:ctrlPr>
@@ -8035,7 +8506,7 @@
                       <m:sSupPr>
                         <m:ctrlPr>
                           <a:rPr lang="en-US" i="1">
-                            <a:latin typeface="Cambria Math" panose="02040503050406030204" pitchFamily="18" charset="0"/>
+                            <a:latin typeface="Cambria Math"/>
                           </a:rPr>
                         </m:ctrlPr>
                       </m:sSupPr>
@@ -8075,7 +8546,7 @@
                       <m:sSupPr>
                         <m:ctrlPr>
                           <a:rPr lang="en-US" i="1">
-                            <a:latin typeface="Cambria Math" panose="02040503050406030204" pitchFamily="18" charset="0"/>
+                            <a:latin typeface="Cambria Math"/>
                           </a:rPr>
                         </m:ctrlPr>
                       </m:sSupPr>
@@ -8116,15 +8587,12 @@
                 </a:pPr>
                 <a14:m>
                   <m:oMathPara xmlns:m="http://schemas.openxmlformats.org/officeDocument/2006/math">
-                    <m:oMathParaPr>
-                      <m:jc m:val="centerGroup"/>
-                    </m:oMathParaPr>
-                    <m:oMath xmlns:m="http://schemas.openxmlformats.org/officeDocument/2006/math">
+                    <m:oMath>
                       <m:sSup>
                         <m:sSupPr>
                           <m:ctrlPr>
                             <a:rPr lang="en-US" i="1">
-                              <a:latin typeface="Cambria Math" panose="02040503050406030204" pitchFamily="18" charset="0"/>
+                              <a:latin typeface="Cambria Math"/>
                               <a:ea typeface="Cambria Math"/>
                             </a:rPr>
                           </m:ctrlPr>
@@ -8185,7 +8653,7 @@
                         <m:sSupPr>
                           <m:ctrlPr>
                             <a:rPr lang="en-US" i="1">
-                              <a:latin typeface="Cambria Math" panose="02040503050406030204" pitchFamily="18" charset="0"/>
+                              <a:latin typeface="Cambria Math"/>
                               <a:ea typeface="Cambria Math"/>
                             </a:rPr>
                           </m:ctrlPr>
@@ -8305,7 +8773,7 @@
             <a:fld id="{85442DEE-2235-41B4-99BD-234203159492}" type="slidenum">
               <a:rPr lang="en-US" smtClean="0"/>
               <a:pPr/>
-              <a:t>14</a:t>
+              <a:t>15</a:t>
             </a:fld>
             <a:endParaRPr lang="en-US" dirty="0"/>
           </a:p>
@@ -8821,7 +9289,7 @@
 </p:sld>
 </file>
 
-<file path=ppt/slides/slide15.xml><?xml version="1.0" encoding="utf-8"?>
+<file path=ppt/slides/slide16.xml><?xml version="1.0" encoding="utf-8"?>
 <p:sld xmlns:a="http://schemas.openxmlformats.org/drawingml/2006/main" xmlns:r="http://schemas.openxmlformats.org/officeDocument/2006/relationships" xmlns:p="http://schemas.openxmlformats.org/presentationml/2006/main">
   <p:cSld>
     <p:spTree>
@@ -8901,15 +9369,12 @@
                 </a:pPr>
                 <a14:m>
                   <m:oMathPara xmlns:m="http://schemas.openxmlformats.org/officeDocument/2006/math">
-                    <m:oMathParaPr>
-                      <m:jc m:val="centerGroup"/>
-                    </m:oMathParaPr>
-                    <m:oMath xmlns:m="http://schemas.openxmlformats.org/officeDocument/2006/math">
+                    <m:oMath>
                       <m:sSup>
                         <m:sSupPr>
                           <m:ctrlPr>
                             <a:rPr lang="en-US" i="1">
-                              <a:latin typeface="Cambria Math" panose="02040503050406030204" pitchFamily="18" charset="0"/>
+                              <a:latin typeface="Cambria Math"/>
                               <a:ea typeface="Cambria Math"/>
                             </a:rPr>
                           </m:ctrlPr>
@@ -8936,7 +9401,7 @@
                       <m:d>
                         <m:dPr>
                           <m:ctrlPr>
-                            <a:rPr lang="en-US" i="1" smtClean="0">
+                            <a:rPr lang="en-US" b="0" i="1" smtClean="0">
                               <a:latin typeface="Cambria Math" panose="02040503050406030204" pitchFamily="18" charset="0"/>
                               <a:ea typeface="Cambria Math"/>
                             </a:rPr>
@@ -8970,7 +9435,7 @@
                         <m:sSupPr>
                           <m:ctrlPr>
                             <a:rPr lang="en-US" i="1">
-                              <a:latin typeface="Cambria Math" panose="02040503050406030204" pitchFamily="18" charset="0"/>
+                              <a:latin typeface="Cambria Math"/>
                               <a:ea typeface="Cambria Math"/>
                             </a:rPr>
                           </m:ctrlPr>
@@ -8997,7 +9462,7 @@
                       <m:d>
                         <m:dPr>
                           <m:ctrlPr>
-                            <a:rPr lang="en-US" i="1">
+                            <a:rPr lang="en-US" b="0" i="1" smtClean="0">
                               <a:latin typeface="Cambria Math" panose="02040503050406030204" pitchFamily="18" charset="0"/>
                             </a:rPr>
                           </m:ctrlPr>
@@ -9084,7 +9549,7 @@
             <a:fld id="{85442DEE-2235-41B4-99BD-234203159492}" type="slidenum">
               <a:rPr lang="en-US" smtClean="0"/>
               <a:pPr/>
-              <a:t>15</a:t>
+              <a:t>16</a:t>
             </a:fld>
             <a:endParaRPr lang="en-US" dirty="0"/>
           </a:p>
@@ -9103,7 +9568,7 @@
 </p:sld>
 </file>
 
-<file path=ppt/slides/slide16.xml><?xml version="1.0" encoding="utf-8"?>
+<file path=ppt/slides/slide17.xml><?xml version="1.0" encoding="utf-8"?>
 <p:sld xmlns:a="http://schemas.openxmlformats.org/drawingml/2006/main" xmlns:r="http://schemas.openxmlformats.org/officeDocument/2006/relationships" xmlns:p="http://schemas.openxmlformats.org/presentationml/2006/main">
   <p:cSld>
     <p:spTree>
@@ -9178,15 +9643,12 @@
                 </a:pPr>
                 <a14:m>
                   <m:oMathPara xmlns:m="http://schemas.openxmlformats.org/officeDocument/2006/math">
-                    <m:oMathParaPr>
-                      <m:jc m:val="centerGroup"/>
-                    </m:oMathParaPr>
-                    <m:oMath xmlns:m="http://schemas.openxmlformats.org/officeDocument/2006/math">
+                    <m:oMath>
                       <m:sSup>
                         <m:sSupPr>
                           <m:ctrlPr>
                             <a:rPr lang="en-US" i="1">
-                              <a:latin typeface="Cambria Math" panose="02040503050406030204" pitchFamily="18" charset="0"/>
+                              <a:latin typeface="Cambria Math"/>
                               <a:ea typeface="Cambria Math"/>
                             </a:rPr>
                           </m:ctrlPr>
@@ -9247,7 +9709,7 @@
                         <m:sSupPr>
                           <m:ctrlPr>
                             <a:rPr lang="en-US" i="1">
-                              <a:latin typeface="Cambria Math" panose="02040503050406030204" pitchFamily="18" charset="0"/>
+                              <a:latin typeface="Cambria Math"/>
                               <a:ea typeface="Cambria Math"/>
                             </a:rPr>
                           </m:ctrlPr>
@@ -9310,7 +9772,7 @@
                       <m:sSupPr>
                         <m:ctrlPr>
                           <a:rPr lang="en-US" i="1">
-                            <a:latin typeface="Cambria Math" panose="02040503050406030204" pitchFamily="18" charset="0"/>
+                            <a:latin typeface="Cambria Math"/>
                             <a:ea typeface="Cambria Math"/>
                           </a:rPr>
                         </m:ctrlPr>
@@ -9384,7 +9846,7 @@
                       <m:sSupPr>
                         <m:ctrlPr>
                           <a:rPr lang="en-US" i="1">
-                            <a:latin typeface="Cambria Math" panose="02040503050406030204" pitchFamily="18" charset="0"/>
+                            <a:latin typeface="Cambria Math"/>
                             <a:ea typeface="Cambria Math"/>
                           </a:rPr>
                         </m:ctrlPr>
@@ -9512,14 +9974,11 @@
                 </a:pPr>
                 <a14:m>
                   <m:oMathPara xmlns:m="http://schemas.openxmlformats.org/officeDocument/2006/math">
-                    <m:oMathParaPr>
-                      <m:jc m:val="centerGroup"/>
-                    </m:oMathParaPr>
-                    <m:oMath xmlns:m="http://schemas.openxmlformats.org/officeDocument/2006/math">
+                    <m:oMath>
                       <m:f>
                         <m:fPr>
                           <m:ctrlPr>
-                            <a:rPr lang="en-US" i="1" smtClean="0">
+                            <a:rPr lang="en-US" i="1">
                               <a:latin typeface="Cambria Math" panose="02040503050406030204" pitchFamily="18" charset="0"/>
                               <a:ea typeface="Cambria Math"/>
                             </a:rPr>
@@ -9530,7 +9989,7 @@
                             <m:sSupPr>
                               <m:ctrlPr>
                                 <a:rPr lang="en-US" i="1">
-                                  <a:latin typeface="Cambria Math" panose="02040503050406030204" pitchFamily="18" charset="0"/>
+                                  <a:latin typeface="Cambria Math"/>
                                   <a:ea typeface="Cambria Math"/>
                                 </a:rPr>
                               </m:ctrlPr>
@@ -9557,7 +10016,7 @@
                           <m:d>
                             <m:dPr>
                               <m:ctrlPr>
-                                <a:rPr lang="en-US" i="1">
+                                <a:rPr lang="is-IS" i="1">
                                   <a:latin typeface="Cambria Math" panose="02040503050406030204" pitchFamily="18" charset="0"/>
                                 </a:rPr>
                               </m:ctrlPr>
@@ -9577,7 +10036,7 @@
                             <m:sSupPr>
                               <m:ctrlPr>
                                 <a:rPr lang="en-US" i="1">
-                                  <a:latin typeface="Cambria Math" panose="02040503050406030204" pitchFamily="18" charset="0"/>
+                                  <a:latin typeface="Cambria Math"/>
                                   <a:ea typeface="Cambria Math"/>
                                 </a:rPr>
                               </m:ctrlPr>
@@ -9604,7 +10063,7 @@
                           <m:d>
                             <m:dPr>
                               <m:ctrlPr>
-                                <a:rPr lang="en-US" i="1">
+                                <a:rPr lang="is-IS" i="1">
                                   <a:latin typeface="Cambria Math" panose="02040503050406030204" pitchFamily="18" charset="0"/>
                                   <a:ea typeface="Cambria Math"/>
                                 </a:rPr>
@@ -9679,7 +10138,7 @@
                       <m:sSupPr>
                         <m:ctrlPr>
                           <a:rPr lang="en-US" i="1">
-                            <a:latin typeface="Cambria Math" panose="02040503050406030204" pitchFamily="18" charset="0"/>
+                            <a:latin typeface="Cambria Math"/>
                             <a:ea typeface="Cambria Math"/>
                           </a:rPr>
                         </m:ctrlPr>
@@ -9732,7 +10191,7 @@
                       <m:sSupPr>
                         <m:ctrlPr>
                           <a:rPr lang="en-US" i="1">
-                            <a:latin typeface="Cambria Math" panose="02040503050406030204" pitchFamily="18" charset="0"/>
+                            <a:latin typeface="Cambria Math"/>
                             <a:ea typeface="Cambria Math"/>
                           </a:rPr>
                         </m:ctrlPr>
@@ -9794,7 +10253,7 @@
                       <m:sSupPr>
                         <m:ctrlPr>
                           <a:rPr lang="en-US" i="1">
-                            <a:latin typeface="Cambria Math" panose="02040503050406030204" pitchFamily="18" charset="0"/>
+                            <a:latin typeface="Cambria Math"/>
                             <a:ea typeface="Cambria Math"/>
                           </a:rPr>
                         </m:ctrlPr>
@@ -9915,7 +10374,7 @@
             <a:fld id="{85442DEE-2235-41B4-99BD-234203159492}" type="slidenum">
               <a:rPr lang="en-US" smtClean="0"/>
               <a:pPr/>
-              <a:t>16</a:t>
+              <a:t>17</a:t>
             </a:fld>
             <a:endParaRPr lang="en-US" dirty="0"/>
           </a:p>
@@ -10106,7 +10565,7 @@
 </p:sld>
 </file>
 
-<file path=ppt/slides/slide17.xml><?xml version="1.0" encoding="utf-8"?>
+<file path=ppt/slides/slide18.xml><?xml version="1.0" encoding="utf-8"?>
 <p:sld xmlns:a="http://schemas.openxmlformats.org/drawingml/2006/main" xmlns:r="http://schemas.openxmlformats.org/officeDocument/2006/relationships" xmlns:p="http://schemas.openxmlformats.org/presentationml/2006/main">
   <p:cSld>
     <p:spTree>
@@ -10188,10 +10647,7 @@
                 </a:pPr>
                 <a14:m>
                   <m:oMathPara xmlns:m="http://schemas.openxmlformats.org/officeDocument/2006/math">
-                    <m:oMathParaPr>
-                      <m:jc m:val="centerGroup"/>
-                    </m:oMathParaPr>
-                    <m:oMath xmlns:m="http://schemas.openxmlformats.org/officeDocument/2006/math">
+                    <m:oMath>
                       <m:f>
                         <m:fPr>
                           <m:ctrlPr>
@@ -10206,7 +10662,7 @@
                             <m:sSupPr>
                               <m:ctrlPr>
                                 <a:rPr lang="en-US" i="1">
-                                  <a:latin typeface="Cambria Math" panose="02040503050406030204" pitchFamily="18" charset="0"/>
+                                  <a:latin typeface="Cambria Math"/>
                                   <a:ea typeface="Cambria Math"/>
                                 </a:rPr>
                               </m:ctrlPr>
@@ -10233,7 +10689,7 @@
                           <m:d>
                             <m:dPr>
                               <m:ctrlPr>
-                                <a:rPr lang="en-US" i="1">
+                                <a:rPr lang="is-IS" b="0" i="1" smtClean="0">
                                   <a:latin typeface="Cambria Math" panose="02040503050406030204" pitchFamily="18" charset="0"/>
                                 </a:rPr>
                               </m:ctrlPr>
@@ -10253,7 +10709,7 @@
                             <m:sSupPr>
                               <m:ctrlPr>
                                 <a:rPr lang="en-US" i="1">
-                                  <a:latin typeface="Cambria Math" panose="02040503050406030204" pitchFamily="18" charset="0"/>
+                                  <a:latin typeface="Cambria Math"/>
                                   <a:ea typeface="Cambria Math"/>
                                 </a:rPr>
                               </m:ctrlPr>
@@ -10280,7 +10736,7 @@
                           <m:d>
                             <m:dPr>
                               <m:ctrlPr>
-                                <a:rPr lang="en-US" i="1">
+                                <a:rPr lang="is-IS" b="0" i="1" smtClean="0">
                                   <a:latin typeface="Cambria Math" panose="02040503050406030204" pitchFamily="18" charset="0"/>
                                   <a:ea typeface="Cambria Math"/>
                                 </a:rPr>
@@ -10331,7 +10787,7 @@
                       <m:sSupPr>
                         <m:ctrlPr>
                           <a:rPr lang="en-US" b="0" i="1" smtClean="0">
-                            <a:latin typeface="Cambria Math" panose="02040503050406030204" pitchFamily="18" charset="0"/>
+                            <a:latin typeface="Cambria Math"/>
                           </a:rPr>
                         </m:ctrlPr>
                       </m:sSupPr>
@@ -10454,7 +10910,7 @@
             <a:fld id="{85442DEE-2235-41B4-99BD-234203159492}" type="slidenum">
               <a:rPr lang="en-US" smtClean="0"/>
               <a:pPr/>
-              <a:t>17</a:t>
+              <a:t>18</a:t>
             </a:fld>
             <a:endParaRPr lang="en-US" dirty="0"/>
           </a:p>
@@ -11011,7 +11467,7 @@
 </p:sld>
 </file>
 
-<file path=ppt/slides/slide18.xml><?xml version="1.0" encoding="utf-8"?>
+<file path=ppt/slides/slide19.xml><?xml version="1.0" encoding="utf-8"?>
 <p:sld xmlns:a="http://schemas.openxmlformats.org/drawingml/2006/main" xmlns:r="http://schemas.openxmlformats.org/officeDocument/2006/relationships" xmlns:p="http://schemas.openxmlformats.org/presentationml/2006/main">
   <p:cSld>
     <p:spTree>
@@ -11085,14 +11541,11 @@
                 </a:pPr>
                 <a14:m>
                   <m:oMathPara xmlns:m="http://schemas.openxmlformats.org/officeDocument/2006/math">
-                    <m:oMathParaPr>
-                      <m:jc m:val="centerGroup"/>
-                    </m:oMathParaPr>
-                    <m:oMath xmlns:m="http://schemas.openxmlformats.org/officeDocument/2006/math">
+                    <m:oMath>
                       <m:d>
                         <m:dPr>
                           <m:ctrlPr>
-                            <a:rPr lang="en-US" i="1" smtClean="0">
+                            <a:rPr lang="en-US" b="0" i="1" smtClean="0">
                               <a:latin typeface="Cambria Math" panose="02040503050406030204" pitchFamily="18" charset="0"/>
                             </a:rPr>
                           </m:ctrlPr>
@@ -11121,7 +11574,7 @@
                       <m:sSup>
                         <m:sSupPr>
                           <m:ctrlPr>
-                            <a:rPr lang="en-US" i="1" smtClean="0">
+                            <a:rPr lang="en-US" b="0" i="1" smtClean="0">
                               <a:latin typeface="Cambria Math" panose="02040503050406030204" pitchFamily="18" charset="0"/>
                             </a:rPr>
                           </m:ctrlPr>
@@ -11146,7 +11599,7 @@
                       <m:sSup>
                         <m:sSupPr>
                           <m:ctrlPr>
-                            <a:rPr lang="en-US" i="1" smtClean="0">
+                            <a:rPr lang="en-US" b="0" i="1" smtClean="0">
                               <a:latin typeface="Cambria Math" panose="02040503050406030204" pitchFamily="18" charset="0"/>
                             </a:rPr>
                           </m:ctrlPr>
@@ -11206,10 +11659,7 @@
                 </a:pPr>
                 <a14:m>
                   <m:oMathPara xmlns:m="http://schemas.openxmlformats.org/officeDocument/2006/math">
-                    <m:oMathParaPr>
-                      <m:jc m:val="centerGroup"/>
-                    </m:oMathParaPr>
-                    <m:oMath xmlns:m="http://schemas.openxmlformats.org/officeDocument/2006/math">
+                    <m:oMath>
                       <m:f>
                         <m:fPr>
                           <m:ctrlPr>
@@ -11224,7 +11674,7 @@
                             <m:sSupPr>
                               <m:ctrlPr>
                                 <a:rPr lang="en-US" i="1">
-                                  <a:latin typeface="Cambria Math" panose="02040503050406030204" pitchFamily="18" charset="0"/>
+                                  <a:latin typeface="Cambria Math"/>
                                   <a:ea typeface="Cambria Math"/>
                                 </a:rPr>
                               </m:ctrlPr>
@@ -11251,7 +11701,7 @@
                           <m:d>
                             <m:dPr>
                               <m:ctrlPr>
-                                <a:rPr lang="en-US" i="1">
+                                <a:rPr lang="en-US" i="1" smtClean="0">
                                   <a:latin typeface="Cambria Math" panose="02040503050406030204" pitchFamily="18" charset="0"/>
                                 </a:rPr>
                               </m:ctrlPr>
@@ -11271,7 +11721,7 @@
                             <m:sSupPr>
                               <m:ctrlPr>
                                 <a:rPr lang="en-US" i="1">
-                                  <a:latin typeface="Cambria Math" panose="02040503050406030204" pitchFamily="18" charset="0"/>
+                                  <a:latin typeface="Cambria Math"/>
                                   <a:ea typeface="Cambria Math"/>
                                 </a:rPr>
                               </m:ctrlPr>
@@ -11298,7 +11748,7 @@
                           <m:d>
                             <m:dPr>
                               <m:ctrlPr>
-                                <a:rPr lang="en-US" i="1">
+                                <a:rPr lang="en-US" b="0" i="1" smtClean="0">
                                   <a:latin typeface="Cambria Math" panose="02040503050406030204" pitchFamily="18" charset="0"/>
                                   <a:ea typeface="Cambria Math"/>
                                 </a:rPr>
@@ -11493,7 +11943,7 @@
             <a:fld id="{85442DEE-2235-41B4-99BD-234203159492}" type="slidenum">
               <a:rPr lang="en-US" smtClean="0"/>
               <a:pPr/>
-              <a:t>18</a:t>
+              <a:t>19</a:t>
             </a:fld>
             <a:endParaRPr lang="en-US" dirty="0"/>
           </a:p>
@@ -11512,7 +11962,450 @@
 </p:sld>
 </file>
 
-<file path=ppt/slides/slide19.xml><?xml version="1.0" encoding="utf-8"?>
+<file path=ppt/slides/slide2.xml><?xml version="1.0" encoding="utf-8"?>
+<p:sld xmlns:a="http://schemas.openxmlformats.org/drawingml/2006/main" xmlns:r="http://schemas.openxmlformats.org/officeDocument/2006/relationships" xmlns:p="http://schemas.openxmlformats.org/presentationml/2006/main">
+  <p:cSld>
+    <p:spTree>
+      <p:nvGrpSpPr>
+        <p:cNvPr id="1" name=""/>
+        <p:cNvGrpSpPr/>
+        <p:nvPr/>
+      </p:nvGrpSpPr>
+      <p:grpSpPr>
+        <a:xfrm>
+          <a:off x="0" y="0"/>
+          <a:ext cx="0" cy="0"/>
+          <a:chOff x="0" y="0"/>
+          <a:chExt cx="0" cy="0"/>
+        </a:xfrm>
+      </p:grpSpPr>
+      <p:sp>
+        <p:nvSpPr>
+          <p:cNvPr id="2" name="Title 1">
+            <a:extLst>
+              <a:ext uri="{FF2B5EF4-FFF2-40B4-BE49-F238E27FC236}">
+                <a16:creationId xmlns:a16="http://schemas.microsoft.com/office/drawing/2014/main" id="{A2002DD1-8C67-3A8E-AD52-B2A20162FCB7}"/>
+              </a:ext>
+            </a:extLst>
+          </p:cNvPr>
+          <p:cNvSpPr>
+            <a:spLocks noGrp="1"/>
+          </p:cNvSpPr>
+          <p:nvPr>
+            <p:ph type="title"/>
+          </p:nvPr>
+        </p:nvSpPr>
+        <p:spPr/>
+        <p:txBody>
+          <a:bodyPr/>
+          <a:lstStyle/>
+          <a:p>
+            <a:r>
+              <a:rPr lang="en-US" dirty="0"/>
+              <a:t>Work and Leisure</a:t>
+            </a:r>
+          </a:p>
+        </p:txBody>
+      </p:sp>
+      <p:sp>
+        <p:nvSpPr>
+          <p:cNvPr id="7" name="Content Placeholder 6">
+            <a:extLst>
+              <a:ext uri="{FF2B5EF4-FFF2-40B4-BE49-F238E27FC236}">
+                <a16:creationId xmlns:a16="http://schemas.microsoft.com/office/drawing/2014/main" id="{4FC03615-59F6-A7FA-8BB6-74A8EC29FE0E}"/>
+              </a:ext>
+            </a:extLst>
+          </p:cNvPr>
+          <p:cNvSpPr>
+            <a:spLocks noGrp="1"/>
+          </p:cNvSpPr>
+          <p:nvPr>
+            <p:ph sz="half" idx="1"/>
+          </p:nvPr>
+        </p:nvSpPr>
+        <p:spPr/>
+        <p:txBody>
+          <a:bodyPr>
+            <a:normAutofit/>
+          </a:bodyPr>
+          <a:lstStyle/>
+          <a:p>
+            <a:r>
+              <a:rPr lang="en-US" dirty="0"/>
+              <a:t>Choosing a job/career one of most important decisions we make</a:t>
+            </a:r>
+          </a:p>
+          <a:p>
+            <a:r>
+              <a:rPr lang="en-US" dirty="0"/>
+              <a:t>Politics: Jobs, jobs, jobs!!!</a:t>
+            </a:r>
+          </a:p>
+          <a:p>
+            <a:r>
+              <a:rPr lang="en-US" dirty="0"/>
+              <a:t>Unemployment extremely serious and frightening risk</a:t>
+            </a:r>
+          </a:p>
+          <a:p>
+            <a:r>
+              <a:rPr lang="en-US" dirty="0"/>
+              <a:t>But abstracting from unemployment, more work </a:t>
+            </a:r>
+            <a:br>
+              <a:rPr lang="en-US" dirty="0"/>
+            </a:br>
+            <a:r>
+              <a:rPr lang="en-US" dirty="0"/>
+              <a:t>not always better</a:t>
+            </a:r>
+          </a:p>
+        </p:txBody>
+      </p:sp>
+      <p:sp>
+        <p:nvSpPr>
+          <p:cNvPr id="8" name="Content Placeholder 7">
+            <a:extLst>
+              <a:ext uri="{FF2B5EF4-FFF2-40B4-BE49-F238E27FC236}">
+                <a16:creationId xmlns:a16="http://schemas.microsoft.com/office/drawing/2014/main" id="{E7266366-5F32-5495-A516-407B6FF16C9A}"/>
+              </a:ext>
+            </a:extLst>
+          </p:cNvPr>
+          <p:cNvSpPr>
+            <a:spLocks noGrp="1"/>
+          </p:cNvSpPr>
+          <p:nvPr>
+            <p:ph sz="half" idx="2"/>
+          </p:nvPr>
+        </p:nvSpPr>
+        <p:spPr/>
+        <p:txBody>
+          <a:bodyPr>
+            <a:normAutofit/>
+          </a:bodyPr>
+          <a:lstStyle/>
+          <a:p>
+            <a:r>
+              <a:rPr lang="en-US" dirty="0"/>
+              <a:t>For many their job is a means </a:t>
+            </a:r>
+            <a:br>
+              <a:rPr lang="en-US" dirty="0"/>
+            </a:br>
+            <a:r>
+              <a:rPr lang="en-US" dirty="0"/>
+              <a:t>to an end</a:t>
+            </a:r>
+          </a:p>
+          <a:p>
+            <a:r>
+              <a:rPr lang="en-US" dirty="0"/>
+              <a:t>Work takes time away from time you have to enjoy fruits of labor</a:t>
+            </a:r>
+          </a:p>
+          <a:p>
+            <a:r>
+              <a:rPr lang="en-US" dirty="0"/>
+              <a:t>Important choice: How much should we work?</a:t>
+            </a:r>
+          </a:p>
+          <a:p>
+            <a:endParaRPr lang="en-US" dirty="0"/>
+          </a:p>
+          <a:p>
+            <a:r>
+              <a:rPr lang="en-US" dirty="0"/>
+              <a:t>We present a model to help us think about this question</a:t>
+            </a:r>
+          </a:p>
+          <a:p>
+            <a:endParaRPr lang="en-US" dirty="0"/>
+          </a:p>
+        </p:txBody>
+      </p:sp>
+      <p:sp>
+        <p:nvSpPr>
+          <p:cNvPr id="4" name="Slide Number Placeholder 3">
+            <a:extLst>
+              <a:ext uri="{FF2B5EF4-FFF2-40B4-BE49-F238E27FC236}">
+                <a16:creationId xmlns:a16="http://schemas.microsoft.com/office/drawing/2014/main" id="{4692D950-D56B-9C52-C58C-A2E499A559E2}"/>
+              </a:ext>
+            </a:extLst>
+          </p:cNvPr>
+          <p:cNvSpPr>
+            <a:spLocks noGrp="1"/>
+          </p:cNvSpPr>
+          <p:nvPr>
+            <p:ph type="sldNum" sz="quarter" idx="12"/>
+          </p:nvPr>
+        </p:nvSpPr>
+        <p:spPr/>
+        <p:txBody>
+          <a:bodyPr/>
+          <a:lstStyle/>
+          <a:p>
+            <a:fld id="{85442DEE-2235-41B4-99BD-234203159492}" type="slidenum">
+              <a:rPr lang="en-US" smtClean="0"/>
+              <a:pPr/>
+              <a:t>2</a:t>
+            </a:fld>
+            <a:endParaRPr lang="en-US" dirty="0"/>
+          </a:p>
+        </p:txBody>
+      </p:sp>
+    </p:spTree>
+    <p:extLst>
+      <p:ext uri="{BB962C8B-B14F-4D97-AF65-F5344CB8AC3E}">
+        <p14:creationId xmlns:p14="http://schemas.microsoft.com/office/powerpoint/2010/main" val="1755371700"/>
+      </p:ext>
+    </p:extLst>
+  </p:cSld>
+  <p:clrMapOvr>
+    <a:masterClrMapping/>
+  </p:clrMapOvr>
+  <p:timing>
+    <p:tnLst>
+      <p:par>
+        <p:cTn id="1" dur="indefinite" restart="never" nodeType="tmRoot">
+          <p:childTnLst>
+            <p:seq concurrent="1" nextAc="seek">
+              <p:cTn id="2" dur="indefinite" nodeType="mainSeq">
+                <p:childTnLst>
+                  <p:par>
+                    <p:cTn id="3" fill="hold">
+                      <p:stCondLst>
+                        <p:cond delay="indefinite"/>
+                      </p:stCondLst>
+                      <p:childTnLst>
+                        <p:par>
+                          <p:cTn id="4" fill="hold">
+                            <p:stCondLst>
+                              <p:cond delay="0"/>
+                            </p:stCondLst>
+                            <p:childTnLst>
+                              <p:par>
+                                <p:cTn id="5" presetID="1" presetClass="entr" presetSubtype="0" fill="hold" nodeType="clickEffect">
+                                  <p:stCondLst>
+                                    <p:cond delay="0"/>
+                                  </p:stCondLst>
+                                  <p:childTnLst>
+                                    <p:set>
+                                      <p:cBhvr>
+                                        <p:cTn id="6" dur="1" fill="hold">
+                                          <p:stCondLst>
+                                            <p:cond delay="0"/>
+                                          </p:stCondLst>
+                                        </p:cTn>
+                                        <p:tgtEl>
+                                          <p:spTgt spid="7">
+                                            <p:txEl>
+                                              <p:pRg st="3" end="3"/>
+                                            </p:txEl>
+                                          </p:spTgt>
+                                        </p:tgtEl>
+                                        <p:attrNameLst>
+                                          <p:attrName>style.visibility</p:attrName>
+                                        </p:attrNameLst>
+                                      </p:cBhvr>
+                                      <p:to>
+                                        <p:strVal val="visible"/>
+                                      </p:to>
+                                    </p:set>
+                                  </p:childTnLst>
+                                </p:cTn>
+                              </p:par>
+                            </p:childTnLst>
+                          </p:cTn>
+                        </p:par>
+                      </p:childTnLst>
+                    </p:cTn>
+                  </p:par>
+                  <p:par>
+                    <p:cTn id="7" fill="hold">
+                      <p:stCondLst>
+                        <p:cond delay="indefinite"/>
+                      </p:stCondLst>
+                      <p:childTnLst>
+                        <p:par>
+                          <p:cTn id="8" fill="hold">
+                            <p:stCondLst>
+                              <p:cond delay="0"/>
+                            </p:stCondLst>
+                            <p:childTnLst>
+                              <p:par>
+                                <p:cTn id="9" presetID="1" presetClass="entr" presetSubtype="0" fill="hold" nodeType="clickEffect">
+                                  <p:stCondLst>
+                                    <p:cond delay="0"/>
+                                  </p:stCondLst>
+                                  <p:childTnLst>
+                                    <p:set>
+                                      <p:cBhvr>
+                                        <p:cTn id="10" dur="1" fill="hold">
+                                          <p:stCondLst>
+                                            <p:cond delay="0"/>
+                                          </p:stCondLst>
+                                        </p:cTn>
+                                        <p:tgtEl>
+                                          <p:spTgt spid="8">
+                                            <p:txEl>
+                                              <p:pRg st="0" end="0"/>
+                                            </p:txEl>
+                                          </p:spTgt>
+                                        </p:tgtEl>
+                                        <p:attrNameLst>
+                                          <p:attrName>style.visibility</p:attrName>
+                                        </p:attrNameLst>
+                                      </p:cBhvr>
+                                      <p:to>
+                                        <p:strVal val="visible"/>
+                                      </p:to>
+                                    </p:set>
+                                  </p:childTnLst>
+                                </p:cTn>
+                              </p:par>
+                              <p:par>
+                                <p:cTn id="11" presetID="1" presetClass="entr" presetSubtype="0" fill="hold" nodeType="withEffect">
+                                  <p:stCondLst>
+                                    <p:cond delay="0"/>
+                                  </p:stCondLst>
+                                  <p:childTnLst>
+                                    <p:set>
+                                      <p:cBhvr>
+                                        <p:cTn id="12" dur="1" fill="hold">
+                                          <p:stCondLst>
+                                            <p:cond delay="0"/>
+                                          </p:stCondLst>
+                                        </p:cTn>
+                                        <p:tgtEl>
+                                          <p:spTgt spid="8">
+                                            <p:txEl>
+                                              <p:pRg st="1" end="1"/>
+                                            </p:txEl>
+                                          </p:spTgt>
+                                        </p:tgtEl>
+                                        <p:attrNameLst>
+                                          <p:attrName>style.visibility</p:attrName>
+                                        </p:attrNameLst>
+                                      </p:cBhvr>
+                                      <p:to>
+                                        <p:strVal val="visible"/>
+                                      </p:to>
+                                    </p:set>
+                                  </p:childTnLst>
+                                </p:cTn>
+                              </p:par>
+                              <p:par>
+                                <p:cTn id="13" presetID="1" presetClass="entr" presetSubtype="0" fill="hold" nodeType="withEffect">
+                                  <p:stCondLst>
+                                    <p:cond delay="0"/>
+                                  </p:stCondLst>
+                                  <p:childTnLst>
+                                    <p:set>
+                                      <p:cBhvr>
+                                        <p:cTn id="14" dur="1" fill="hold">
+                                          <p:stCondLst>
+                                            <p:cond delay="0"/>
+                                          </p:stCondLst>
+                                        </p:cTn>
+                                        <p:tgtEl>
+                                          <p:spTgt spid="8">
+                                            <p:txEl>
+                                              <p:pRg st="2" end="2"/>
+                                            </p:txEl>
+                                          </p:spTgt>
+                                        </p:tgtEl>
+                                        <p:attrNameLst>
+                                          <p:attrName>style.visibility</p:attrName>
+                                        </p:attrNameLst>
+                                      </p:cBhvr>
+                                      <p:to>
+                                        <p:strVal val="visible"/>
+                                      </p:to>
+                                    </p:set>
+                                  </p:childTnLst>
+                                </p:cTn>
+                              </p:par>
+                            </p:childTnLst>
+                          </p:cTn>
+                        </p:par>
+                      </p:childTnLst>
+                    </p:cTn>
+                  </p:par>
+                  <p:par>
+                    <p:cTn id="15" fill="hold">
+                      <p:stCondLst>
+                        <p:cond delay="indefinite"/>
+                      </p:stCondLst>
+                      <p:childTnLst>
+                        <p:par>
+                          <p:cTn id="16" fill="hold">
+                            <p:stCondLst>
+                              <p:cond delay="0"/>
+                            </p:stCondLst>
+                            <p:childTnLst>
+                              <p:par>
+                                <p:cTn id="17" presetID="1" presetClass="entr" presetSubtype="0" fill="hold" nodeType="clickEffect">
+                                  <p:stCondLst>
+                                    <p:cond delay="0"/>
+                                  </p:stCondLst>
+                                  <p:childTnLst>
+                                    <p:set>
+                                      <p:cBhvr>
+                                        <p:cTn id="18" dur="1" fill="hold">
+                                          <p:stCondLst>
+                                            <p:cond delay="0"/>
+                                          </p:stCondLst>
+                                        </p:cTn>
+                                        <p:tgtEl>
+                                          <p:spTgt spid="8">
+                                            <p:txEl>
+                                              <p:pRg st="4" end="4"/>
+                                            </p:txEl>
+                                          </p:spTgt>
+                                        </p:tgtEl>
+                                        <p:attrNameLst>
+                                          <p:attrName>style.visibility</p:attrName>
+                                        </p:attrNameLst>
+                                      </p:cBhvr>
+                                      <p:to>
+                                        <p:strVal val="visible"/>
+                                      </p:to>
+                                    </p:set>
+                                  </p:childTnLst>
+                                </p:cTn>
+                              </p:par>
+                            </p:childTnLst>
+                          </p:cTn>
+                        </p:par>
+                      </p:childTnLst>
+                    </p:cTn>
+                  </p:par>
+                </p:childTnLst>
+              </p:cTn>
+              <p:prevCondLst>
+                <p:cond evt="onPrev" delay="0">
+                  <p:tgtEl>
+                    <p:sldTgt/>
+                  </p:tgtEl>
+                </p:cond>
+              </p:prevCondLst>
+              <p:nextCondLst>
+                <p:cond evt="onNext" delay="0">
+                  <p:tgtEl>
+                    <p:sldTgt/>
+                  </p:tgtEl>
+                </p:cond>
+              </p:nextCondLst>
+            </p:seq>
+          </p:childTnLst>
+        </p:cTn>
+      </p:par>
+    </p:tnLst>
+  </p:timing>
+</p:sld>
+</file>
+
+<file path=ppt/slides/slide20.xml><?xml version="1.0" encoding="utf-8"?>
 <p:sld xmlns:a="http://schemas.openxmlformats.org/drawingml/2006/main" xmlns:r="http://schemas.openxmlformats.org/officeDocument/2006/relationships" xmlns:p="http://schemas.openxmlformats.org/presentationml/2006/main">
   <p:cSld>
     <p:spTree>
@@ -11766,7 +12659,7 @@
                       <m:sSupPr>
                         <m:ctrlPr>
                           <a:rPr lang="en-US" i="1">
-                            <a:latin typeface="Cambria Math" panose="02040503050406030204" pitchFamily="18" charset="0"/>
+                            <a:latin typeface="Cambria Math"/>
                             <a:ea typeface="Cambria Math"/>
                           </a:rPr>
                         </m:ctrlPr>
@@ -11827,7 +12720,7 @@
                       <m:sSupPr>
                         <m:ctrlPr>
                           <a:rPr lang="en-US" i="1">
-                            <a:latin typeface="Cambria Math" panose="02040503050406030204" pitchFamily="18" charset="0"/>
+                            <a:latin typeface="Cambria Math"/>
                             <a:ea typeface="Cambria Math"/>
                           </a:rPr>
                         </m:ctrlPr>
@@ -11854,7 +12747,7 @@
                     <m:d>
                       <m:dPr>
                         <m:ctrlPr>
-                          <a:rPr lang="en-US" i="1">
+                          <a:rPr lang="en-US" b="0" i="1" smtClean="0">
                             <a:latin typeface="Cambria Math" panose="02040503050406030204" pitchFamily="18" charset="0"/>
                           </a:rPr>
                         </m:ctrlPr>
@@ -12006,7 +12899,7 @@
             <a:fld id="{85442DEE-2235-41B4-99BD-234203159492}" type="slidenum">
               <a:rPr lang="en-US" smtClean="0"/>
               <a:pPr/>
-              <a:t>19</a:t>
+              <a:t>20</a:t>
             </a:fld>
             <a:endParaRPr lang="en-US" dirty="0"/>
           </a:p>
@@ -12308,745 +13201,7 @@
 </p:sld>
 </file>
 
-<file path=ppt/slides/slide2.xml><?xml version="1.0" encoding="utf-8"?>
-<p:sld xmlns:a="http://schemas.openxmlformats.org/drawingml/2006/main" xmlns:r="http://schemas.openxmlformats.org/officeDocument/2006/relationships" xmlns:p="http://schemas.openxmlformats.org/presentationml/2006/main">
-  <p:cSld>
-    <p:spTree>
-      <p:nvGrpSpPr>
-        <p:cNvPr id="1" name=""/>
-        <p:cNvGrpSpPr/>
-        <p:nvPr/>
-      </p:nvGrpSpPr>
-      <p:grpSpPr>
-        <a:xfrm>
-          <a:off x="0" y="0"/>
-          <a:ext cx="0" cy="0"/>
-          <a:chOff x="0" y="0"/>
-          <a:chExt cx="0" cy="0"/>
-        </a:xfrm>
-      </p:grpSpPr>
-      <p:sp>
-        <p:nvSpPr>
-          <p:cNvPr id="2" name="Title 1">
-            <a:extLst>
-              <a:ext uri="{FF2B5EF4-FFF2-40B4-BE49-F238E27FC236}">
-                <a16:creationId xmlns:a16="http://schemas.microsoft.com/office/drawing/2014/main" id="{A2002DD1-8C67-3A8E-AD52-B2A20162FCB7}"/>
-              </a:ext>
-            </a:extLst>
-          </p:cNvPr>
-          <p:cNvSpPr>
-            <a:spLocks noGrp="1"/>
-          </p:cNvSpPr>
-          <p:nvPr>
-            <p:ph type="title"/>
-          </p:nvPr>
-        </p:nvSpPr>
-        <p:spPr/>
-        <p:txBody>
-          <a:bodyPr/>
-          <a:lstStyle/>
-          <a:p>
-            <a:r>
-              <a:rPr lang="en-US" dirty="0"/>
-              <a:t>Work and Leisure</a:t>
-            </a:r>
-          </a:p>
-        </p:txBody>
-      </p:sp>
-      <p:sp>
-        <p:nvSpPr>
-          <p:cNvPr id="7" name="Content Placeholder 6">
-            <a:extLst>
-              <a:ext uri="{FF2B5EF4-FFF2-40B4-BE49-F238E27FC236}">
-                <a16:creationId xmlns:a16="http://schemas.microsoft.com/office/drawing/2014/main" id="{4FC03615-59F6-A7FA-8BB6-74A8EC29FE0E}"/>
-              </a:ext>
-            </a:extLst>
-          </p:cNvPr>
-          <p:cNvSpPr>
-            <a:spLocks noGrp="1"/>
-          </p:cNvSpPr>
-          <p:nvPr>
-            <p:ph sz="half" idx="1"/>
-          </p:nvPr>
-        </p:nvSpPr>
-        <p:spPr/>
-        <p:txBody>
-          <a:bodyPr>
-            <a:normAutofit/>
-          </a:bodyPr>
-          <a:lstStyle/>
-          <a:p>
-            <a:r>
-              <a:rPr lang="en-US" dirty="0"/>
-              <a:t>Choosing a job/career one of most important decisions we make</a:t>
-            </a:r>
-          </a:p>
-          <a:p>
-            <a:r>
-              <a:rPr lang="en-US" dirty="0"/>
-              <a:t>Politics: Jobs, jobs, jobs!!!</a:t>
-            </a:r>
-          </a:p>
-          <a:p>
-            <a:r>
-              <a:rPr lang="en-US" dirty="0"/>
-              <a:t>Unemployment extremely serious and frightening risk</a:t>
-            </a:r>
-          </a:p>
-          <a:p>
-            <a:r>
-              <a:rPr lang="en-US" dirty="0"/>
-              <a:t>But abstracting from unemployment, more work </a:t>
-            </a:r>
-            <a:br>
-              <a:rPr lang="en-US" dirty="0"/>
-            </a:br>
-            <a:r>
-              <a:rPr lang="en-US" dirty="0"/>
-              <a:t>not always better</a:t>
-            </a:r>
-          </a:p>
-        </p:txBody>
-      </p:sp>
-      <p:sp>
-        <p:nvSpPr>
-          <p:cNvPr id="8" name="Content Placeholder 7">
-            <a:extLst>
-              <a:ext uri="{FF2B5EF4-FFF2-40B4-BE49-F238E27FC236}">
-                <a16:creationId xmlns:a16="http://schemas.microsoft.com/office/drawing/2014/main" id="{E7266366-5F32-5495-A516-407B6FF16C9A}"/>
-              </a:ext>
-            </a:extLst>
-          </p:cNvPr>
-          <p:cNvSpPr>
-            <a:spLocks noGrp="1"/>
-          </p:cNvSpPr>
-          <p:nvPr>
-            <p:ph sz="half" idx="2"/>
-          </p:nvPr>
-        </p:nvSpPr>
-        <p:spPr/>
-        <p:txBody>
-          <a:bodyPr>
-            <a:normAutofit/>
-          </a:bodyPr>
-          <a:lstStyle/>
-          <a:p>
-            <a:r>
-              <a:rPr lang="en-US" dirty="0"/>
-              <a:t>For many their job is a means </a:t>
-            </a:r>
-            <a:br>
-              <a:rPr lang="en-US" dirty="0"/>
-            </a:br>
-            <a:r>
-              <a:rPr lang="en-US" dirty="0"/>
-              <a:t>to an end</a:t>
-            </a:r>
-          </a:p>
-          <a:p>
-            <a:r>
-              <a:rPr lang="en-US" dirty="0"/>
-              <a:t>Work takes time away from time you have to enjoy fruits of labor</a:t>
-            </a:r>
-          </a:p>
-          <a:p>
-            <a:r>
-              <a:rPr lang="en-US" dirty="0"/>
-              <a:t>Important choice: How much should we work?</a:t>
-            </a:r>
-          </a:p>
-          <a:p>
-            <a:endParaRPr lang="en-US" dirty="0"/>
-          </a:p>
-          <a:p>
-            <a:r>
-              <a:rPr lang="en-US" dirty="0"/>
-              <a:t>We present a model to help us think about this question</a:t>
-            </a:r>
-          </a:p>
-          <a:p>
-            <a:endParaRPr lang="en-US" dirty="0"/>
-          </a:p>
-        </p:txBody>
-      </p:sp>
-      <p:sp>
-        <p:nvSpPr>
-          <p:cNvPr id="4" name="Slide Number Placeholder 3">
-            <a:extLst>
-              <a:ext uri="{FF2B5EF4-FFF2-40B4-BE49-F238E27FC236}">
-                <a16:creationId xmlns:a16="http://schemas.microsoft.com/office/drawing/2014/main" id="{4692D950-D56B-9C52-C58C-A2E499A559E2}"/>
-              </a:ext>
-            </a:extLst>
-          </p:cNvPr>
-          <p:cNvSpPr>
-            <a:spLocks noGrp="1"/>
-          </p:cNvSpPr>
-          <p:nvPr>
-            <p:ph type="sldNum" sz="quarter" idx="12"/>
-          </p:nvPr>
-        </p:nvSpPr>
-        <p:spPr/>
-        <p:txBody>
-          <a:bodyPr/>
-          <a:lstStyle/>
-          <a:p>
-            <a:fld id="{85442DEE-2235-41B4-99BD-234203159492}" type="slidenum">
-              <a:rPr lang="en-US" smtClean="0"/>
-              <a:pPr/>
-              <a:t>2</a:t>
-            </a:fld>
-            <a:endParaRPr lang="en-US" dirty="0"/>
-          </a:p>
-        </p:txBody>
-      </p:sp>
-    </p:spTree>
-    <p:extLst>
-      <p:ext uri="{BB962C8B-B14F-4D97-AF65-F5344CB8AC3E}">
-        <p14:creationId xmlns:p14="http://schemas.microsoft.com/office/powerpoint/2010/main" val="1755371700"/>
-      </p:ext>
-    </p:extLst>
-  </p:cSld>
-  <p:clrMapOvr>
-    <a:masterClrMapping/>
-  </p:clrMapOvr>
-  <p:timing>
-    <p:tnLst>
-      <p:par>
-        <p:cTn id="1" dur="indefinite" restart="never" nodeType="tmRoot">
-          <p:childTnLst>
-            <p:seq concurrent="1" nextAc="seek">
-              <p:cTn id="2" dur="indefinite" nodeType="mainSeq">
-                <p:childTnLst>
-                  <p:par>
-                    <p:cTn id="3" fill="hold">
-                      <p:stCondLst>
-                        <p:cond delay="indefinite"/>
-                      </p:stCondLst>
-                      <p:childTnLst>
-                        <p:par>
-                          <p:cTn id="4" fill="hold">
-                            <p:stCondLst>
-                              <p:cond delay="0"/>
-                            </p:stCondLst>
-                            <p:childTnLst>
-                              <p:par>
-                                <p:cTn id="5" presetID="1" presetClass="entr" presetSubtype="0" fill="hold" nodeType="clickEffect">
-                                  <p:stCondLst>
-                                    <p:cond delay="0"/>
-                                  </p:stCondLst>
-                                  <p:childTnLst>
-                                    <p:set>
-                                      <p:cBhvr>
-                                        <p:cTn id="6" dur="1" fill="hold">
-                                          <p:stCondLst>
-                                            <p:cond delay="0"/>
-                                          </p:stCondLst>
-                                        </p:cTn>
-                                        <p:tgtEl>
-                                          <p:spTgt spid="7">
-                                            <p:txEl>
-                                              <p:pRg st="3" end="3"/>
-                                            </p:txEl>
-                                          </p:spTgt>
-                                        </p:tgtEl>
-                                        <p:attrNameLst>
-                                          <p:attrName>style.visibility</p:attrName>
-                                        </p:attrNameLst>
-                                      </p:cBhvr>
-                                      <p:to>
-                                        <p:strVal val="visible"/>
-                                      </p:to>
-                                    </p:set>
-                                  </p:childTnLst>
-                                </p:cTn>
-                              </p:par>
-                            </p:childTnLst>
-                          </p:cTn>
-                        </p:par>
-                      </p:childTnLst>
-                    </p:cTn>
-                  </p:par>
-                  <p:par>
-                    <p:cTn id="7" fill="hold">
-                      <p:stCondLst>
-                        <p:cond delay="indefinite"/>
-                      </p:stCondLst>
-                      <p:childTnLst>
-                        <p:par>
-                          <p:cTn id="8" fill="hold">
-                            <p:stCondLst>
-                              <p:cond delay="0"/>
-                            </p:stCondLst>
-                            <p:childTnLst>
-                              <p:par>
-                                <p:cTn id="9" presetID="1" presetClass="entr" presetSubtype="0" fill="hold" nodeType="clickEffect">
-                                  <p:stCondLst>
-                                    <p:cond delay="0"/>
-                                  </p:stCondLst>
-                                  <p:childTnLst>
-                                    <p:set>
-                                      <p:cBhvr>
-                                        <p:cTn id="10" dur="1" fill="hold">
-                                          <p:stCondLst>
-                                            <p:cond delay="0"/>
-                                          </p:stCondLst>
-                                        </p:cTn>
-                                        <p:tgtEl>
-                                          <p:spTgt spid="8">
-                                            <p:txEl>
-                                              <p:pRg st="0" end="0"/>
-                                            </p:txEl>
-                                          </p:spTgt>
-                                        </p:tgtEl>
-                                        <p:attrNameLst>
-                                          <p:attrName>style.visibility</p:attrName>
-                                        </p:attrNameLst>
-                                      </p:cBhvr>
-                                      <p:to>
-                                        <p:strVal val="visible"/>
-                                      </p:to>
-                                    </p:set>
-                                  </p:childTnLst>
-                                </p:cTn>
-                              </p:par>
-                              <p:par>
-                                <p:cTn id="11" presetID="1" presetClass="entr" presetSubtype="0" fill="hold" nodeType="withEffect">
-                                  <p:stCondLst>
-                                    <p:cond delay="0"/>
-                                  </p:stCondLst>
-                                  <p:childTnLst>
-                                    <p:set>
-                                      <p:cBhvr>
-                                        <p:cTn id="12" dur="1" fill="hold">
-                                          <p:stCondLst>
-                                            <p:cond delay="0"/>
-                                          </p:stCondLst>
-                                        </p:cTn>
-                                        <p:tgtEl>
-                                          <p:spTgt spid="8">
-                                            <p:txEl>
-                                              <p:pRg st="1" end="1"/>
-                                            </p:txEl>
-                                          </p:spTgt>
-                                        </p:tgtEl>
-                                        <p:attrNameLst>
-                                          <p:attrName>style.visibility</p:attrName>
-                                        </p:attrNameLst>
-                                      </p:cBhvr>
-                                      <p:to>
-                                        <p:strVal val="visible"/>
-                                      </p:to>
-                                    </p:set>
-                                  </p:childTnLst>
-                                </p:cTn>
-                              </p:par>
-                              <p:par>
-                                <p:cTn id="13" presetID="1" presetClass="entr" presetSubtype="0" fill="hold" nodeType="withEffect">
-                                  <p:stCondLst>
-                                    <p:cond delay="0"/>
-                                  </p:stCondLst>
-                                  <p:childTnLst>
-                                    <p:set>
-                                      <p:cBhvr>
-                                        <p:cTn id="14" dur="1" fill="hold">
-                                          <p:stCondLst>
-                                            <p:cond delay="0"/>
-                                          </p:stCondLst>
-                                        </p:cTn>
-                                        <p:tgtEl>
-                                          <p:spTgt spid="8">
-                                            <p:txEl>
-                                              <p:pRg st="2" end="2"/>
-                                            </p:txEl>
-                                          </p:spTgt>
-                                        </p:tgtEl>
-                                        <p:attrNameLst>
-                                          <p:attrName>style.visibility</p:attrName>
-                                        </p:attrNameLst>
-                                      </p:cBhvr>
-                                      <p:to>
-                                        <p:strVal val="visible"/>
-                                      </p:to>
-                                    </p:set>
-                                  </p:childTnLst>
-                                </p:cTn>
-                              </p:par>
-                            </p:childTnLst>
-                          </p:cTn>
-                        </p:par>
-                      </p:childTnLst>
-                    </p:cTn>
-                  </p:par>
-                  <p:par>
-                    <p:cTn id="15" fill="hold">
-                      <p:stCondLst>
-                        <p:cond delay="indefinite"/>
-                      </p:stCondLst>
-                      <p:childTnLst>
-                        <p:par>
-                          <p:cTn id="16" fill="hold">
-                            <p:stCondLst>
-                              <p:cond delay="0"/>
-                            </p:stCondLst>
-                            <p:childTnLst>
-                              <p:par>
-                                <p:cTn id="17" presetID="1" presetClass="entr" presetSubtype="0" fill="hold" nodeType="clickEffect">
-                                  <p:stCondLst>
-                                    <p:cond delay="0"/>
-                                  </p:stCondLst>
-                                  <p:childTnLst>
-                                    <p:set>
-                                      <p:cBhvr>
-                                        <p:cTn id="18" dur="1" fill="hold">
-                                          <p:stCondLst>
-                                            <p:cond delay="0"/>
-                                          </p:stCondLst>
-                                        </p:cTn>
-                                        <p:tgtEl>
-                                          <p:spTgt spid="8">
-                                            <p:txEl>
-                                              <p:pRg st="4" end="4"/>
-                                            </p:txEl>
-                                          </p:spTgt>
-                                        </p:tgtEl>
-                                        <p:attrNameLst>
-                                          <p:attrName>style.visibility</p:attrName>
-                                        </p:attrNameLst>
-                                      </p:cBhvr>
-                                      <p:to>
-                                        <p:strVal val="visible"/>
-                                      </p:to>
-                                    </p:set>
-                                  </p:childTnLst>
-                                </p:cTn>
-                              </p:par>
-                            </p:childTnLst>
-                          </p:cTn>
-                        </p:par>
-                      </p:childTnLst>
-                    </p:cTn>
-                  </p:par>
-                </p:childTnLst>
-              </p:cTn>
-              <p:prevCondLst>
-                <p:cond evt="onPrev" delay="0">
-                  <p:tgtEl>
-                    <p:sldTgt/>
-                  </p:tgtEl>
-                </p:cond>
-              </p:prevCondLst>
-              <p:nextCondLst>
-                <p:cond evt="onNext" delay="0">
-                  <p:tgtEl>
-                    <p:sldTgt/>
-                  </p:tgtEl>
-                </p:cond>
-              </p:nextCondLst>
-            </p:seq>
-          </p:childTnLst>
-        </p:cTn>
-      </p:par>
-    </p:tnLst>
-  </p:timing>
-</p:sld>
-</file>
-
-<file path=ppt/slides/slide20.xml><?xml version="1.0" encoding="utf-8"?>
-<p:sld xmlns:a="http://schemas.openxmlformats.org/drawingml/2006/main" xmlns:r="http://schemas.openxmlformats.org/officeDocument/2006/relationships" xmlns:p="http://schemas.openxmlformats.org/presentationml/2006/main">
-  <p:cSld>
-    <p:spTree>
-      <p:nvGrpSpPr>
-        <p:cNvPr id="1" name=""/>
-        <p:cNvGrpSpPr/>
-        <p:nvPr/>
-      </p:nvGrpSpPr>
-      <p:grpSpPr>
-        <a:xfrm>
-          <a:off x="0" y="0"/>
-          <a:ext cx="0" cy="0"/>
-          <a:chOff x="0" y="0"/>
-          <a:chExt cx="0" cy="0"/>
-        </a:xfrm>
-      </p:grpSpPr>
-      <p:sp>
-        <p:nvSpPr>
-          <p:cNvPr id="2" name="Title 1">
-            <a:extLst>
-              <a:ext uri="{FF2B5EF4-FFF2-40B4-BE49-F238E27FC236}">
-                <a16:creationId xmlns:a16="http://schemas.microsoft.com/office/drawing/2014/main" id="{CD9F3E61-9AE8-A766-54E7-32F08D94DE6C}"/>
-              </a:ext>
-            </a:extLst>
-          </p:cNvPr>
-          <p:cNvSpPr>
-            <a:spLocks noGrp="1"/>
-          </p:cNvSpPr>
-          <p:nvPr>
-            <p:ph type="title"/>
-          </p:nvPr>
-        </p:nvSpPr>
-        <p:spPr/>
-        <p:txBody>
-          <a:bodyPr/>
-          <a:lstStyle/>
-          <a:p>
-            <a:r>
-              <a:rPr lang="en-US" dirty="0"/>
-              <a:t>Poll</a:t>
-            </a:r>
-          </a:p>
-        </p:txBody>
-      </p:sp>
-      <p:sp>
-        <p:nvSpPr>
-          <p:cNvPr id="3" name="Content Placeholder 2">
-            <a:extLst>
-              <a:ext uri="{FF2B5EF4-FFF2-40B4-BE49-F238E27FC236}">
-                <a16:creationId xmlns:a16="http://schemas.microsoft.com/office/drawing/2014/main" id="{E14814FE-86F8-B9B7-74F4-C83F0BA4DFE3}"/>
-              </a:ext>
-            </a:extLst>
-          </p:cNvPr>
-          <p:cNvSpPr>
-            <a:spLocks noGrp="1"/>
-          </p:cNvSpPr>
-          <p:nvPr>
-            <p:ph idx="1"/>
-          </p:nvPr>
-        </p:nvSpPr>
-        <p:spPr/>
-        <p:txBody>
-          <a:bodyPr/>
-          <a:lstStyle/>
-          <a:p>
-            <a:r>
-              <a:rPr lang="en-US" dirty="0"/>
-              <a:t>Suppose your wage was temporarily high for one week. How would this affect your labor supply</a:t>
-            </a:r>
-          </a:p>
-          <a:p>
-            <a:pPr marL="514350" indent="-514350">
-              <a:buFont typeface="+mj-lt"/>
-              <a:buAutoNum type="alphaLcParenR"/>
-            </a:pPr>
-            <a:r>
-              <a:rPr lang="en-US" dirty="0"/>
-              <a:t>I would work more</a:t>
-            </a:r>
-          </a:p>
-          <a:p>
-            <a:pPr marL="514350" indent="-514350">
-              <a:buFont typeface="+mj-lt"/>
-              <a:buAutoNum type="alphaLcParenR"/>
-            </a:pPr>
-            <a:r>
-              <a:rPr lang="en-US" dirty="0"/>
-              <a:t>I would work the same amount</a:t>
-            </a:r>
-          </a:p>
-          <a:p>
-            <a:pPr marL="514350" indent="-514350">
-              <a:buFont typeface="+mj-lt"/>
-              <a:buAutoNum type="alphaLcParenR"/>
-            </a:pPr>
-            <a:r>
-              <a:rPr lang="en-US" dirty="0"/>
-              <a:t>I would work less</a:t>
-            </a:r>
-          </a:p>
-          <a:p>
-            <a:endParaRPr lang="en-US" dirty="0"/>
-          </a:p>
-        </p:txBody>
-      </p:sp>
-      <p:sp>
-        <p:nvSpPr>
-          <p:cNvPr id="4" name="Slide Number Placeholder 3">
-            <a:extLst>
-              <a:ext uri="{FF2B5EF4-FFF2-40B4-BE49-F238E27FC236}">
-                <a16:creationId xmlns:a16="http://schemas.microsoft.com/office/drawing/2014/main" id="{43D942C3-9E26-D5DA-7237-DE9368B166B4}"/>
-              </a:ext>
-            </a:extLst>
-          </p:cNvPr>
-          <p:cNvSpPr>
-            <a:spLocks noGrp="1"/>
-          </p:cNvSpPr>
-          <p:nvPr>
-            <p:ph type="sldNum" sz="quarter" idx="12"/>
-          </p:nvPr>
-        </p:nvSpPr>
-        <p:spPr/>
-        <p:txBody>
-          <a:bodyPr/>
-          <a:lstStyle/>
-          <a:p>
-            <a:fld id="{85442DEE-2235-41B4-99BD-234203159492}" type="slidenum">
-              <a:rPr lang="en-US" smtClean="0"/>
-              <a:pPr/>
-              <a:t>20</a:t>
-            </a:fld>
-            <a:endParaRPr lang="en-US" dirty="0"/>
-          </a:p>
-        </p:txBody>
-      </p:sp>
-    </p:spTree>
-    <p:extLst>
-      <p:ext uri="{BB962C8B-B14F-4D97-AF65-F5344CB8AC3E}">
-        <p14:creationId xmlns:p14="http://schemas.microsoft.com/office/powerpoint/2010/main" val="3748171676"/>
-      </p:ext>
-    </p:extLst>
-  </p:cSld>
-  <p:clrMapOvr>
-    <a:masterClrMapping/>
-  </p:clrMapOvr>
-</p:sld>
-</file>
-
 <file path=ppt/slides/slide21.xml><?xml version="1.0" encoding="utf-8"?>
-<p:sld xmlns:a="http://schemas.openxmlformats.org/drawingml/2006/main" xmlns:r="http://schemas.openxmlformats.org/officeDocument/2006/relationships" xmlns:p="http://schemas.openxmlformats.org/presentationml/2006/main">
-  <p:cSld>
-    <p:spTree>
-      <p:nvGrpSpPr>
-        <p:cNvPr id="1" name=""/>
-        <p:cNvGrpSpPr/>
-        <p:nvPr/>
-      </p:nvGrpSpPr>
-      <p:grpSpPr>
-        <a:xfrm>
-          <a:off x="0" y="0"/>
-          <a:ext cx="0" cy="0"/>
-          <a:chOff x="0" y="0"/>
-          <a:chExt cx="0" cy="0"/>
-        </a:xfrm>
-      </p:grpSpPr>
-      <p:sp>
-        <p:nvSpPr>
-          <p:cNvPr id="2" name="Title 1">
-            <a:extLst>
-              <a:ext uri="{FF2B5EF4-FFF2-40B4-BE49-F238E27FC236}">
-                <a16:creationId xmlns:a16="http://schemas.microsoft.com/office/drawing/2014/main" id="{DF1A6044-54D6-CDBF-BAF1-6FC647432F00}"/>
-              </a:ext>
-            </a:extLst>
-          </p:cNvPr>
-          <p:cNvSpPr>
-            <a:spLocks noGrp="1"/>
-          </p:cNvSpPr>
-          <p:nvPr>
-            <p:ph type="title"/>
-          </p:nvPr>
-        </p:nvSpPr>
-        <p:spPr/>
-        <p:txBody>
-          <a:bodyPr/>
-          <a:lstStyle/>
-          <a:p>
-            <a:r>
-              <a:rPr lang="en-US" dirty="0"/>
-              <a:t>Poll</a:t>
-            </a:r>
-          </a:p>
-        </p:txBody>
-      </p:sp>
-      <p:sp>
-        <p:nvSpPr>
-          <p:cNvPr id="3" name="Content Placeholder 2">
-            <a:extLst>
-              <a:ext uri="{FF2B5EF4-FFF2-40B4-BE49-F238E27FC236}">
-                <a16:creationId xmlns:a16="http://schemas.microsoft.com/office/drawing/2014/main" id="{99A8B90C-0FC4-507A-E9AB-E2A85AA2B4AB}"/>
-              </a:ext>
-            </a:extLst>
-          </p:cNvPr>
-          <p:cNvSpPr>
-            <a:spLocks noGrp="1"/>
-          </p:cNvSpPr>
-          <p:nvPr>
-            <p:ph idx="1"/>
-          </p:nvPr>
-        </p:nvSpPr>
-        <p:spPr/>
-        <p:txBody>
-          <a:bodyPr/>
-          <a:lstStyle/>
-          <a:p>
-            <a:r>
-              <a:rPr lang="en-US" dirty="0"/>
-              <a:t>Suppose your wage was permanently higher. How would this affect your labor supply</a:t>
-            </a:r>
-          </a:p>
-          <a:p>
-            <a:pPr marL="514350" indent="-514350">
-              <a:buFont typeface="+mj-lt"/>
-              <a:buAutoNum type="alphaLcParenR"/>
-            </a:pPr>
-            <a:r>
-              <a:rPr lang="en-US" dirty="0"/>
-              <a:t>I would work more</a:t>
-            </a:r>
-          </a:p>
-          <a:p>
-            <a:pPr marL="514350" indent="-514350">
-              <a:buFont typeface="+mj-lt"/>
-              <a:buAutoNum type="alphaLcParenR"/>
-            </a:pPr>
-            <a:r>
-              <a:rPr lang="en-US" dirty="0"/>
-              <a:t>I would work the same amount</a:t>
-            </a:r>
-          </a:p>
-          <a:p>
-            <a:pPr marL="514350" indent="-514350">
-              <a:buFont typeface="+mj-lt"/>
-              <a:buAutoNum type="alphaLcParenR"/>
-            </a:pPr>
-            <a:r>
-              <a:rPr lang="en-US" dirty="0"/>
-              <a:t>I would work less</a:t>
-            </a:r>
-          </a:p>
-        </p:txBody>
-      </p:sp>
-      <p:sp>
-        <p:nvSpPr>
-          <p:cNvPr id="4" name="Slide Number Placeholder 3">
-            <a:extLst>
-              <a:ext uri="{FF2B5EF4-FFF2-40B4-BE49-F238E27FC236}">
-                <a16:creationId xmlns:a16="http://schemas.microsoft.com/office/drawing/2014/main" id="{030B8672-DDB4-871D-0A45-74E2C9615241}"/>
-              </a:ext>
-            </a:extLst>
-          </p:cNvPr>
-          <p:cNvSpPr>
-            <a:spLocks noGrp="1"/>
-          </p:cNvSpPr>
-          <p:nvPr>
-            <p:ph type="sldNum" sz="quarter" idx="12"/>
-          </p:nvPr>
-        </p:nvSpPr>
-        <p:spPr/>
-        <p:txBody>
-          <a:bodyPr/>
-          <a:lstStyle/>
-          <a:p>
-            <a:fld id="{85442DEE-2235-41B4-99BD-234203159492}" type="slidenum">
-              <a:rPr lang="en-US" smtClean="0"/>
-              <a:pPr/>
-              <a:t>21</a:t>
-            </a:fld>
-            <a:endParaRPr lang="en-US" dirty="0"/>
-          </a:p>
-        </p:txBody>
-      </p:sp>
-    </p:spTree>
-    <p:extLst>
-      <p:ext uri="{BB962C8B-B14F-4D97-AF65-F5344CB8AC3E}">
-        <p14:creationId xmlns:p14="http://schemas.microsoft.com/office/powerpoint/2010/main" val="2302705801"/>
-      </p:ext>
-    </p:extLst>
-  </p:cSld>
-  <p:clrMapOvr>
-    <a:masterClrMapping/>
-  </p:clrMapOvr>
-</p:sld>
-</file>
-
-<file path=ppt/slides/slide22.xml><?xml version="1.0" encoding="utf-8"?>
 <p:sld xmlns:a="http://schemas.openxmlformats.org/drawingml/2006/main" xmlns:r="http://schemas.openxmlformats.org/officeDocument/2006/relationships" xmlns:p="http://schemas.openxmlformats.org/presentationml/2006/main">
   <p:cSld>
     <p:spTree>
@@ -13274,7 +13429,7 @@
             <a:fld id="{85442DEE-2235-41B4-99BD-234203159492}" type="slidenum">
               <a:rPr lang="en-US" smtClean="0"/>
               <a:pPr/>
-              <a:t>22</a:t>
+              <a:t>21</a:t>
             </a:fld>
             <a:endParaRPr lang="en-US" dirty="0"/>
           </a:p>
@@ -13293,7 +13448,7 @@
 </p:sld>
 </file>
 
-<file path=ppt/slides/slide23.xml><?xml version="1.0" encoding="utf-8"?>
+<file path=ppt/slides/slide22.xml><?xml version="1.0" encoding="utf-8"?>
 <p:sld xmlns:a="http://schemas.openxmlformats.org/drawingml/2006/main" xmlns:r="http://schemas.openxmlformats.org/officeDocument/2006/relationships" xmlns:p="http://schemas.openxmlformats.org/presentationml/2006/main">
   <p:cSld>
     <p:spTree>
@@ -13404,8 +13559,8 @@
                     <m:sSup>
                       <m:sSupPr>
                         <m:ctrlPr>
-                          <a:rPr lang="en-US" sz="3200" i="1" smtClean="0">
-                            <a:latin typeface="Cambria Math" panose="02040503050406030204" pitchFamily="18" charset="0"/>
+                          <a:rPr lang="en-US" sz="3200" b="0" i="1" smtClean="0">
+                            <a:latin typeface="Cambria Math"/>
                           </a:rPr>
                         </m:ctrlPr>
                       </m:sSupPr>
@@ -13429,8 +13584,8 @@
                     <m:d>
                       <m:dPr>
                         <m:ctrlPr>
-                          <a:rPr lang="en-US" sz="3200" i="1" smtClean="0">
-                            <a:latin typeface="Cambria Math" panose="02040503050406030204" pitchFamily="18" charset="0"/>
+                          <a:rPr lang="en-US" sz="3200" b="0" i="1" smtClean="0">
+                            <a:latin typeface="Cambria Math"/>
                           </a:rPr>
                         </m:ctrlPr>
                       </m:dPr>
@@ -13475,7 +13630,7 @@
                       <m:sSupPr>
                         <m:ctrlPr>
                           <a:rPr lang="en-US" sz="3200" i="1">
-                            <a:latin typeface="Cambria Math" panose="02040503050406030204" pitchFamily="18" charset="0"/>
+                            <a:latin typeface="Cambria Math"/>
                           </a:rPr>
                         </m:ctrlPr>
                       </m:sSupPr>
@@ -13506,7 +13661,7 @@
                       <m:dPr>
                         <m:ctrlPr>
                           <a:rPr lang="en-US" sz="3200" i="1">
-                            <a:latin typeface="Cambria Math" panose="02040503050406030204" pitchFamily="18" charset="0"/>
+                            <a:latin typeface="Cambria Math"/>
                           </a:rPr>
                         </m:ctrlPr>
                       </m:dPr>
@@ -13605,10 +13760,7 @@
                 </a:pPr>
                 <a14:m>
                   <m:oMathPara xmlns:m="http://schemas.openxmlformats.org/officeDocument/2006/math">
-                    <m:oMathParaPr>
-                      <m:jc m:val="centerGroup"/>
-                    </m:oMathParaPr>
-                    <m:oMath xmlns:m="http://schemas.openxmlformats.org/officeDocument/2006/math">
+                    <m:oMath>
                       <m:f>
                         <m:fPr>
                           <m:ctrlPr>
@@ -13623,7 +13775,7 @@
                             <m:sSupPr>
                               <m:ctrlPr>
                                 <a:rPr lang="en-US" sz="3200" i="1">
-                                  <a:latin typeface="Cambria Math" panose="02040503050406030204" pitchFamily="18" charset="0"/>
+                                  <a:latin typeface="Cambria Math"/>
                                   <a:ea typeface="Cambria Math"/>
                                 </a:rPr>
                               </m:ctrlPr>
@@ -13650,7 +13802,7 @@
                           <m:d>
                             <m:dPr>
                               <m:ctrlPr>
-                                <a:rPr lang="en-US" sz="3200" i="1">
+                                <a:rPr lang="is-IS" sz="3200" i="1">
                                   <a:latin typeface="Cambria Math" panose="02040503050406030204" pitchFamily="18" charset="0"/>
                                 </a:rPr>
                               </m:ctrlPr>
@@ -13670,7 +13822,7 @@
                             <m:sSupPr>
                               <m:ctrlPr>
                                 <a:rPr lang="en-US" sz="3200" i="1">
-                                  <a:latin typeface="Cambria Math" panose="02040503050406030204" pitchFamily="18" charset="0"/>
+                                  <a:latin typeface="Cambria Math"/>
                                   <a:ea typeface="Cambria Math"/>
                                 </a:rPr>
                               </m:ctrlPr>
@@ -13697,7 +13849,7 @@
                           <m:d>
                             <m:dPr>
                               <m:ctrlPr>
-                                <a:rPr lang="en-US" sz="3200" i="1">
+                                <a:rPr lang="is-IS" sz="3200" i="1">
                                   <a:latin typeface="Cambria Math" panose="02040503050406030204" pitchFamily="18" charset="0"/>
                                   <a:ea typeface="Cambria Math"/>
                                 </a:rPr>
@@ -13802,7 +13954,7 @@
             <a:fld id="{85442DEE-2235-41B4-99BD-234203159492}" type="slidenum">
               <a:rPr lang="en-US" smtClean="0"/>
               <a:pPr/>
-              <a:t>23</a:t>
+              <a:t>22</a:t>
             </a:fld>
             <a:endParaRPr lang="en-US" dirty="0"/>
           </a:p>
@@ -14011,7 +14163,7 @@
 </p:sld>
 </file>
 
-<file path=ppt/slides/slide24.xml><?xml version="1.0" encoding="utf-8"?>
+<file path=ppt/slides/slide23.xml><?xml version="1.0" encoding="utf-8"?>
 <p:sld xmlns:a="http://schemas.openxmlformats.org/drawingml/2006/main" xmlns:r="http://schemas.openxmlformats.org/officeDocument/2006/relationships" xmlns:p="http://schemas.openxmlformats.org/presentationml/2006/main">
   <p:cSld>
     <p:spTree>
@@ -14108,10 +14260,7 @@
                 </a:pPr>
                 <a14:m>
                   <m:oMathPara xmlns:m="http://schemas.openxmlformats.org/officeDocument/2006/math">
-                    <m:oMathParaPr>
-                      <m:jc m:val="centerGroup"/>
-                    </m:oMathParaPr>
-                    <m:oMath xmlns:m="http://schemas.openxmlformats.org/officeDocument/2006/math">
+                    <m:oMath>
                       <m:r>
                         <a:rPr lang="en-US" i="1">
                           <a:latin typeface="Cambria Math" panose="02040503050406030204" pitchFamily="18" charset="0"/>
@@ -14187,7 +14336,7 @@
                             <m:sSupPr>
                               <m:ctrlPr>
                                 <a:rPr lang="en-US" i="1">
-                                  <a:latin typeface="Cambria Math" panose="02040503050406030204" pitchFamily="18" charset="0"/>
+                                  <a:latin typeface="Cambria Math"/>
                                   <a:ea typeface="Cambria Math"/>
                                 </a:rPr>
                               </m:ctrlPr>
@@ -14214,7 +14363,7 @@
                           <m:d>
                             <m:dPr>
                               <m:ctrlPr>
-                                <a:rPr lang="en-US" i="1">
+                                <a:rPr lang="is-IS" i="1">
                                   <a:latin typeface="Cambria Math" panose="02040503050406030204" pitchFamily="18" charset="0"/>
                                 </a:rPr>
                               </m:ctrlPr>
@@ -14234,7 +14383,7 @@
                             <m:sSupPr>
                               <m:ctrlPr>
                                 <a:rPr lang="en-US" i="1">
-                                  <a:latin typeface="Cambria Math" panose="02040503050406030204" pitchFamily="18" charset="0"/>
+                                  <a:latin typeface="Cambria Math"/>
                                   <a:ea typeface="Cambria Math"/>
                                 </a:rPr>
                               </m:ctrlPr>
@@ -14261,7 +14410,7 @@
                           <m:d>
                             <m:dPr>
                               <m:ctrlPr>
-                                <a:rPr lang="en-US" i="1">
+                                <a:rPr lang="is-IS" i="1">
                                   <a:latin typeface="Cambria Math" panose="02040503050406030204" pitchFamily="18" charset="0"/>
                                   <a:ea typeface="Cambria Math"/>
                                 </a:rPr>
@@ -14299,10 +14448,7 @@
                 </a:pPr>
                 <a14:m>
                   <m:oMathPara xmlns:m="http://schemas.openxmlformats.org/officeDocument/2006/math">
-                    <m:oMathParaPr>
-                      <m:jc m:val="centerGroup"/>
-                    </m:oMathParaPr>
-                    <m:oMath xmlns:m="http://schemas.openxmlformats.org/officeDocument/2006/math">
+                    <m:oMath>
                       <m:r>
                         <a:rPr lang="en-US" i="1">
                           <a:latin typeface="Cambria Math" panose="02040503050406030204" pitchFamily="18" charset="0"/>
@@ -14454,7 +14600,7 @@
             <a:fld id="{85442DEE-2235-41B4-99BD-234203159492}" type="slidenum">
               <a:rPr lang="en-US" smtClean="0"/>
               <a:pPr/>
-              <a:t>24</a:t>
+              <a:t>23</a:t>
             </a:fld>
             <a:endParaRPr lang="en-US" dirty="0"/>
           </a:p>
@@ -14513,10 +14659,7 @@
                   <a:pPr/>
                   <a14:m>
                     <m:oMathPara xmlns:m="http://schemas.openxmlformats.org/officeDocument/2006/math">
-                      <m:oMathParaPr>
-                        <m:jc m:val="centerGroup"/>
-                      </m:oMathParaPr>
-                      <m:oMath xmlns:m="http://schemas.openxmlformats.org/officeDocument/2006/math">
+                      <m:oMath>
                         <m:sSup>
                           <m:sSupPr>
                             <m:ctrlPr>
@@ -14685,10 +14828,7 @@
                 <a:pPr/>
                 <a14:m>
                   <m:oMathPara xmlns:m="http://schemas.openxmlformats.org/officeDocument/2006/math">
-                    <m:oMathParaPr>
-                      <m:jc m:val="centerGroup"/>
-                    </m:oMathParaPr>
-                    <m:oMath xmlns:m="http://schemas.openxmlformats.org/officeDocument/2006/math">
+                    <m:oMath>
                       <m:f>
                         <m:fPr>
                           <m:ctrlPr>
@@ -14703,7 +14843,7 @@
                             <m:sSupPr>
                               <m:ctrlPr>
                                 <a:rPr lang="en-US" sz="3200" i="1">
-                                  <a:latin typeface="Cambria Math" panose="02040503050406030204" pitchFamily="18" charset="0"/>
+                                  <a:latin typeface="Cambria Math"/>
                                   <a:ea typeface="Cambria Math"/>
                                 </a:rPr>
                               </m:ctrlPr>
@@ -14730,7 +14870,7 @@
                           <m:d>
                             <m:dPr>
                               <m:ctrlPr>
-                                <a:rPr lang="en-US" sz="3200" i="1">
+                                <a:rPr lang="is-IS" sz="3200" i="1">
                                   <a:latin typeface="Cambria Math" panose="02040503050406030204" pitchFamily="18" charset="0"/>
                                 </a:rPr>
                               </m:ctrlPr>
@@ -14750,7 +14890,7 @@
                             <m:sSupPr>
                               <m:ctrlPr>
                                 <a:rPr lang="en-US" sz="3200" i="1">
-                                  <a:latin typeface="Cambria Math" panose="02040503050406030204" pitchFamily="18" charset="0"/>
+                                  <a:latin typeface="Cambria Math"/>
                                   <a:ea typeface="Cambria Math"/>
                                 </a:rPr>
                               </m:ctrlPr>
@@ -14777,7 +14917,7 @@
                           <m:d>
                             <m:dPr>
                               <m:ctrlPr>
-                                <a:rPr lang="en-US" sz="3200" i="1">
+                                <a:rPr lang="is-IS" sz="3200" i="1">
                                   <a:latin typeface="Cambria Math" panose="02040503050406030204" pitchFamily="18" charset="0"/>
                                   <a:ea typeface="Cambria Math"/>
                                 </a:rPr>
@@ -14915,10 +15055,7 @@
                   <a:pPr/>
                   <a14:m>
                     <m:oMathPara xmlns:m="http://schemas.openxmlformats.org/officeDocument/2006/math">
-                      <m:oMathParaPr>
-                        <m:jc m:val="centerGroup"/>
-                      </m:oMathParaPr>
-                      <m:oMath xmlns:m="http://schemas.openxmlformats.org/officeDocument/2006/math">
+                      <m:oMath>
                         <m:sSup>
                           <m:sSupPr>
                             <m:ctrlPr>
@@ -15329,7 +15466,7 @@
 </p:sld>
 </file>
 
-<file path=ppt/slides/slide25.xml><?xml version="1.0" encoding="utf-8"?>
+<file path=ppt/slides/slide24.xml><?xml version="1.0" encoding="utf-8"?>
 <p:sld xmlns:a="http://schemas.openxmlformats.org/drawingml/2006/main" xmlns:r="http://schemas.openxmlformats.org/officeDocument/2006/relationships" xmlns:p="http://schemas.openxmlformats.org/presentationml/2006/main">
   <p:cSld>
     <p:spTree>
@@ -15447,10 +15584,7 @@
                 </a:pPr>
                 <a14:m>
                   <m:oMathPara xmlns:m="http://schemas.openxmlformats.org/officeDocument/2006/math">
-                    <m:oMathParaPr>
-                      <m:jc m:val="centerGroup"/>
-                    </m:oMathParaPr>
-                    <m:oMath xmlns:m="http://schemas.openxmlformats.org/officeDocument/2006/math">
+                    <m:oMath>
                       <m:f>
                         <m:fPr>
                           <m:ctrlPr>
@@ -15465,7 +15599,7 @@
                             <m:sSupPr>
                               <m:ctrlPr>
                                 <a:rPr lang="en-US" i="1">
-                                  <a:latin typeface="Cambria Math" panose="02040503050406030204" pitchFamily="18" charset="0"/>
+                                  <a:latin typeface="Cambria Math"/>
                                   <a:ea typeface="Cambria Math"/>
                                 </a:rPr>
                               </m:ctrlPr>
@@ -15492,7 +15626,7 @@
                           <m:d>
                             <m:dPr>
                               <m:ctrlPr>
-                                <a:rPr lang="en-US" i="1">
+                                <a:rPr lang="en-US" b="0" i="1" smtClean="0">
                                   <a:latin typeface="Cambria Math" panose="02040503050406030204" pitchFamily="18" charset="0"/>
                                 </a:rPr>
                               </m:ctrlPr>
@@ -15512,7 +15646,7 @@
                             <m:sSupPr>
                               <m:ctrlPr>
                                 <a:rPr lang="en-US" i="1">
-                                  <a:latin typeface="Cambria Math" panose="02040503050406030204" pitchFamily="18" charset="0"/>
+                                  <a:latin typeface="Cambria Math"/>
                                   <a:ea typeface="Cambria Math"/>
                                 </a:rPr>
                               </m:ctrlPr>
@@ -15539,7 +15673,7 @@
                           <m:d>
                             <m:dPr>
                               <m:ctrlPr>
-                                <a:rPr lang="en-US" i="1">
+                                <a:rPr lang="en-US" b="0" i="1" smtClean="0">
                                   <a:latin typeface="Cambria Math" panose="02040503050406030204" pitchFamily="18" charset="0"/>
                                   <a:ea typeface="Cambria Math"/>
                                 </a:rPr>
@@ -15644,7 +15778,7 @@
                       <m:sSupPr>
                         <m:ctrlPr>
                           <a:rPr lang="en-US" i="1">
-                            <a:latin typeface="Cambria Math" panose="02040503050406030204" pitchFamily="18" charset="0"/>
+                            <a:latin typeface="Cambria Math"/>
                             <a:ea typeface="Cambria Math"/>
                           </a:rPr>
                         </m:ctrlPr>
@@ -15773,7 +15907,7 @@
             <a:fld id="{85442DEE-2235-41B4-99BD-234203159492}" type="slidenum">
               <a:rPr lang="en-US" smtClean="0"/>
               <a:pPr/>
-              <a:t>25</a:t>
+              <a:t>24</a:t>
             </a:fld>
             <a:endParaRPr lang="en-US" dirty="0"/>
           </a:p>
@@ -16000,7 +16134,7 @@
 </p:sld>
 </file>
 
-<file path=ppt/slides/slide26.xml><?xml version="1.0" encoding="utf-8"?>
+<file path=ppt/slides/slide25.xml><?xml version="1.0" encoding="utf-8"?>
 <p:sld xmlns:a="http://schemas.openxmlformats.org/drawingml/2006/main" xmlns:r="http://schemas.openxmlformats.org/officeDocument/2006/relationships" xmlns:p="http://schemas.openxmlformats.org/presentationml/2006/main">
   <p:cSld>
     <p:spTree>
@@ -16213,7 +16347,7 @@
             <a:fld id="{85442DEE-2235-41B4-99BD-234203159492}" type="slidenum">
               <a:rPr lang="en-US" smtClean="0"/>
               <a:pPr/>
-              <a:t>26</a:t>
+              <a:t>25</a:t>
             </a:fld>
             <a:endParaRPr lang="en-US" dirty="0"/>
           </a:p>
@@ -16404,7 +16538,7 @@
 </p:sld>
 </file>
 
-<file path=ppt/slides/slide27.xml><?xml version="1.0" encoding="utf-8"?>
+<file path=ppt/slides/slide26.xml><?xml version="1.0" encoding="utf-8"?>
 <p:sld xmlns:a="http://schemas.openxmlformats.org/drawingml/2006/main" xmlns:r="http://schemas.openxmlformats.org/officeDocument/2006/relationships" xmlns:p="http://schemas.openxmlformats.org/presentationml/2006/main">
   <p:cSld>
     <p:spTree>
@@ -16520,7 +16654,7 @@
             <a:fld id="{85442DEE-2235-41B4-99BD-234203159492}" type="slidenum">
               <a:rPr lang="en-US" smtClean="0"/>
               <a:pPr/>
-              <a:t>27</a:t>
+              <a:t>26</a:t>
             </a:fld>
             <a:endParaRPr lang="en-US" dirty="0"/>
           </a:p>
@@ -16539,7 +16673,7 @@
 </p:sld>
 </file>
 
-<file path=ppt/slides/slide28.xml><?xml version="1.0" encoding="utf-8"?>
+<file path=ppt/slides/slide27.xml><?xml version="1.0" encoding="utf-8"?>
 <p:sld xmlns:a="http://schemas.openxmlformats.org/drawingml/2006/main" xmlns:r="http://schemas.openxmlformats.org/officeDocument/2006/relationships" xmlns:p="http://schemas.openxmlformats.org/presentationml/2006/main">
   <p:cSld>
     <p:spTree>
@@ -16678,7 +16812,7 @@
             <a:fld id="{85442DEE-2235-41B4-99BD-234203159492}" type="slidenum">
               <a:rPr lang="en-US" smtClean="0"/>
               <a:pPr/>
-              <a:t>28</a:t>
+              <a:t>27</a:t>
             </a:fld>
             <a:endParaRPr lang="en-US" dirty="0"/>
           </a:p>
@@ -16767,7 +16901,7 @@
 </p:sld>
 </file>
 
-<file path=ppt/slides/slide29.xml><?xml version="1.0" encoding="utf-8"?>
+<file path=ppt/slides/slide28.xml><?xml version="1.0" encoding="utf-8"?>
 <p:sld xmlns:a="http://schemas.openxmlformats.org/drawingml/2006/main" xmlns:r="http://schemas.openxmlformats.org/officeDocument/2006/relationships" xmlns:p="http://schemas.openxmlformats.org/presentationml/2006/main">
   <p:cSld>
     <p:spTree>
@@ -16872,7 +17006,7 @@
             <a:fld id="{85442DEE-2235-41B4-99BD-234203159492}" type="slidenum">
               <a:rPr lang="en-US" smtClean="0"/>
               <a:pPr/>
-              <a:t>29</a:t>
+              <a:t>28</a:t>
             </a:fld>
             <a:endParaRPr lang="en-US" dirty="0"/>
           </a:p>
@@ -17047,6 +17181,201 @@
       </p:par>
     </p:tnLst>
   </p:timing>
+</p:sld>
+</file>
+
+<file path=ppt/slides/slide29.xml><?xml version="1.0" encoding="utf-8"?>
+<p:sld xmlns:a="http://schemas.openxmlformats.org/drawingml/2006/main" xmlns:r="http://schemas.openxmlformats.org/officeDocument/2006/relationships" xmlns:p="http://schemas.openxmlformats.org/presentationml/2006/main">
+  <p:cSld>
+    <p:spTree>
+      <p:nvGrpSpPr>
+        <p:cNvPr id="1" name=""/>
+        <p:cNvGrpSpPr/>
+        <p:nvPr/>
+      </p:nvGrpSpPr>
+      <p:grpSpPr>
+        <a:xfrm>
+          <a:off x="0" y="0"/>
+          <a:ext cx="0" cy="0"/>
+          <a:chOff x="0" y="0"/>
+          <a:chExt cx="0" cy="0"/>
+        </a:xfrm>
+      </p:grpSpPr>
+      <p:sp>
+        <p:nvSpPr>
+          <p:cNvPr id="2" name="Title 1">
+            <a:extLst>
+              <a:ext uri="{FF2B5EF4-FFF2-40B4-BE49-F238E27FC236}">
+                <a16:creationId xmlns:a16="http://schemas.microsoft.com/office/drawing/2014/main" id="{47FB22CA-32D8-D7F6-D531-A6045BEB1278}"/>
+              </a:ext>
+            </a:extLst>
+          </p:cNvPr>
+          <p:cNvSpPr>
+            <a:spLocks noGrp="1"/>
+          </p:cNvSpPr>
+          <p:nvPr>
+            <p:ph type="title"/>
+          </p:nvPr>
+        </p:nvSpPr>
+        <p:spPr/>
+        <p:txBody>
+          <a:bodyPr/>
+          <a:lstStyle/>
+          <a:p>
+            <a:r>
+              <a:rPr lang="en-US" dirty="0"/>
+              <a:t>Hours Worked Per Person</a:t>
+            </a:r>
+          </a:p>
+        </p:txBody>
+      </p:sp>
+      <p:sp>
+        <p:nvSpPr>
+          <p:cNvPr id="5" name="Content Placeholder 4">
+            <a:extLst>
+              <a:ext uri="{FF2B5EF4-FFF2-40B4-BE49-F238E27FC236}">
+                <a16:creationId xmlns:a16="http://schemas.microsoft.com/office/drawing/2014/main" id="{1014F91B-47DA-86D0-2EF9-BB805A3A7178}"/>
+              </a:ext>
+            </a:extLst>
+          </p:cNvPr>
+          <p:cNvSpPr>
+            <a:spLocks noGrp="1"/>
+          </p:cNvSpPr>
+          <p:nvPr>
+            <p:ph sz="half" idx="1"/>
+          </p:nvPr>
+        </p:nvSpPr>
+        <p:spPr>
+          <a:xfrm>
+            <a:off x="228600" y="1600199"/>
+            <a:ext cx="4800600" cy="4525963"/>
+          </a:xfrm>
+        </p:spPr>
+        <p:txBody>
+          <a:bodyPr/>
+          <a:lstStyle/>
+          <a:p>
+            <a:endParaRPr lang="en-US" dirty="0"/>
+          </a:p>
+          <a:p>
+            <a:r>
+              <a:rPr lang="en-US" dirty="0"/>
+              <a:t>Hours worked </a:t>
+            </a:r>
+            <a:r>
+              <a:rPr lang="en-US" dirty="0">
+                <a:solidFill>
+                  <a:srgbClr val="C00000"/>
+                </a:solidFill>
+              </a:rPr>
+              <a:t>per worker </a:t>
+            </a:r>
+            <a:r>
+              <a:rPr lang="en-US" dirty="0"/>
+              <a:t>have fallen</a:t>
+            </a:r>
+          </a:p>
+          <a:p>
+            <a:r>
+              <a:rPr lang="en-US" dirty="0"/>
+              <a:t>But hours worked </a:t>
+            </a:r>
+            <a:r>
+              <a:rPr lang="en-US" dirty="0">
+                <a:solidFill>
+                  <a:srgbClr val="C00000"/>
+                </a:solidFill>
+              </a:rPr>
+              <a:t>per person </a:t>
+            </a:r>
+            <a:r>
+              <a:rPr lang="en-US" dirty="0"/>
+              <a:t>have not</a:t>
+            </a:r>
+          </a:p>
+          <a:p>
+            <a:r>
+              <a:rPr lang="en-US" dirty="0"/>
+              <a:t>Why might this be?</a:t>
+            </a:r>
+          </a:p>
+        </p:txBody>
+      </p:sp>
+      <p:pic>
+        <p:nvPicPr>
+          <p:cNvPr id="8" name="Content Placeholder 7" descr="A graph showing the growth of the company's stock market&#10;&#10;AI-generated content may be incorrect.">
+            <a:extLst>
+              <a:ext uri="{FF2B5EF4-FFF2-40B4-BE49-F238E27FC236}">
+                <a16:creationId xmlns:a16="http://schemas.microsoft.com/office/drawing/2014/main" id="{7AC83DB0-6F36-E897-5B08-05F2B484F03F}"/>
+              </a:ext>
+            </a:extLst>
+          </p:cNvPr>
+          <p:cNvPicPr>
+            <a:picLocks noGrp="1" noChangeAspect="1"/>
+          </p:cNvPicPr>
+          <p:nvPr>
+            <p:ph sz="half" idx="2"/>
+          </p:nvPr>
+        </p:nvPicPr>
+        <p:blipFill>
+          <a:blip r:embed="rId2">
+            <a:extLst>
+              <a:ext uri="{28A0092B-C50C-407E-A947-70E740481C1C}">
+                <a14:useLocalDpi xmlns:a14="http://schemas.microsoft.com/office/drawing/2010/main" val="0"/>
+              </a:ext>
+            </a:extLst>
+          </a:blip>
+          <a:stretch>
+            <a:fillRect/>
+          </a:stretch>
+        </p:blipFill>
+        <p:spPr>
+          <a:xfrm>
+            <a:off x="5251106" y="1559751"/>
+            <a:ext cx="6611530" cy="4796600"/>
+          </a:xfrm>
+        </p:spPr>
+      </p:pic>
+      <p:sp>
+        <p:nvSpPr>
+          <p:cNvPr id="4" name="Slide Number Placeholder 3">
+            <a:extLst>
+              <a:ext uri="{FF2B5EF4-FFF2-40B4-BE49-F238E27FC236}">
+                <a16:creationId xmlns:a16="http://schemas.microsoft.com/office/drawing/2014/main" id="{4E0AC229-1350-706D-5188-3B220E584BCD}"/>
+              </a:ext>
+            </a:extLst>
+          </p:cNvPr>
+          <p:cNvSpPr>
+            <a:spLocks noGrp="1"/>
+          </p:cNvSpPr>
+          <p:nvPr>
+            <p:ph type="sldNum" sz="quarter" idx="12"/>
+          </p:nvPr>
+        </p:nvSpPr>
+        <p:spPr/>
+        <p:txBody>
+          <a:bodyPr/>
+          <a:lstStyle/>
+          <a:p>
+            <a:fld id="{85442DEE-2235-41B4-99BD-234203159492}" type="slidenum">
+              <a:rPr lang="en-US" smtClean="0"/>
+              <a:pPr/>
+              <a:t>29</a:t>
+            </a:fld>
+            <a:endParaRPr lang="en-US" dirty="0"/>
+          </a:p>
+        </p:txBody>
+      </p:sp>
+    </p:spTree>
+    <p:extLst>
+      <p:ext uri="{BB962C8B-B14F-4D97-AF65-F5344CB8AC3E}">
+        <p14:creationId xmlns:p14="http://schemas.microsoft.com/office/powerpoint/2010/main" val="2554071313"/>
+      </p:ext>
+    </p:extLst>
+  </p:cSld>
+  <p:clrMapOvr>
+    <a:masterClrMapping/>
+  </p:clrMapOvr>
 </p:sld>
 </file>
 
@@ -17488,201 +17817,6 @@
           <p:cNvPr id="2" name="Title 1">
             <a:extLst>
               <a:ext uri="{FF2B5EF4-FFF2-40B4-BE49-F238E27FC236}">
-                <a16:creationId xmlns:a16="http://schemas.microsoft.com/office/drawing/2014/main" id="{47FB22CA-32D8-D7F6-D531-A6045BEB1278}"/>
-              </a:ext>
-            </a:extLst>
-          </p:cNvPr>
-          <p:cNvSpPr>
-            <a:spLocks noGrp="1"/>
-          </p:cNvSpPr>
-          <p:nvPr>
-            <p:ph type="title"/>
-          </p:nvPr>
-        </p:nvSpPr>
-        <p:spPr/>
-        <p:txBody>
-          <a:bodyPr/>
-          <a:lstStyle/>
-          <a:p>
-            <a:r>
-              <a:rPr lang="en-US" dirty="0"/>
-              <a:t>Hours Worked Per Person</a:t>
-            </a:r>
-          </a:p>
-        </p:txBody>
-      </p:sp>
-      <p:sp>
-        <p:nvSpPr>
-          <p:cNvPr id="5" name="Content Placeholder 4">
-            <a:extLst>
-              <a:ext uri="{FF2B5EF4-FFF2-40B4-BE49-F238E27FC236}">
-                <a16:creationId xmlns:a16="http://schemas.microsoft.com/office/drawing/2014/main" id="{1014F91B-47DA-86D0-2EF9-BB805A3A7178}"/>
-              </a:ext>
-            </a:extLst>
-          </p:cNvPr>
-          <p:cNvSpPr>
-            <a:spLocks noGrp="1"/>
-          </p:cNvSpPr>
-          <p:nvPr>
-            <p:ph sz="half" idx="1"/>
-          </p:nvPr>
-        </p:nvSpPr>
-        <p:spPr>
-          <a:xfrm>
-            <a:off x="228600" y="1600199"/>
-            <a:ext cx="4800600" cy="4525963"/>
-          </a:xfrm>
-        </p:spPr>
-        <p:txBody>
-          <a:bodyPr/>
-          <a:lstStyle/>
-          <a:p>
-            <a:endParaRPr lang="en-US" dirty="0"/>
-          </a:p>
-          <a:p>
-            <a:r>
-              <a:rPr lang="en-US" dirty="0"/>
-              <a:t>Hours worked </a:t>
-            </a:r>
-            <a:r>
-              <a:rPr lang="en-US" dirty="0">
-                <a:solidFill>
-                  <a:srgbClr val="C00000"/>
-                </a:solidFill>
-              </a:rPr>
-              <a:t>per worker </a:t>
-            </a:r>
-            <a:r>
-              <a:rPr lang="en-US" dirty="0"/>
-              <a:t>have fallen</a:t>
-            </a:r>
-          </a:p>
-          <a:p>
-            <a:r>
-              <a:rPr lang="en-US" dirty="0"/>
-              <a:t>But hours worked </a:t>
-            </a:r>
-            <a:r>
-              <a:rPr lang="en-US" dirty="0">
-                <a:solidFill>
-                  <a:srgbClr val="C00000"/>
-                </a:solidFill>
-              </a:rPr>
-              <a:t>per person </a:t>
-            </a:r>
-            <a:r>
-              <a:rPr lang="en-US" dirty="0"/>
-              <a:t>have not</a:t>
-            </a:r>
-          </a:p>
-          <a:p>
-            <a:r>
-              <a:rPr lang="en-US" dirty="0"/>
-              <a:t>Why might this be?</a:t>
-            </a:r>
-          </a:p>
-        </p:txBody>
-      </p:sp>
-      <p:pic>
-        <p:nvPicPr>
-          <p:cNvPr id="8" name="Content Placeholder 7" descr="A graph showing the growth of the company's stock market&#10;&#10;AI-generated content may be incorrect.">
-            <a:extLst>
-              <a:ext uri="{FF2B5EF4-FFF2-40B4-BE49-F238E27FC236}">
-                <a16:creationId xmlns:a16="http://schemas.microsoft.com/office/drawing/2014/main" id="{7AC83DB0-6F36-E897-5B08-05F2B484F03F}"/>
-              </a:ext>
-            </a:extLst>
-          </p:cNvPr>
-          <p:cNvPicPr>
-            <a:picLocks noGrp="1" noChangeAspect="1"/>
-          </p:cNvPicPr>
-          <p:nvPr>
-            <p:ph sz="half" idx="2"/>
-          </p:nvPr>
-        </p:nvPicPr>
-        <p:blipFill>
-          <a:blip r:embed="rId2">
-            <a:extLst>
-              <a:ext uri="{28A0092B-C50C-407E-A947-70E740481C1C}">
-                <a14:useLocalDpi xmlns:a14="http://schemas.microsoft.com/office/drawing/2010/main" val="0"/>
-              </a:ext>
-            </a:extLst>
-          </a:blip>
-          <a:stretch>
-            <a:fillRect/>
-          </a:stretch>
-        </p:blipFill>
-        <p:spPr>
-          <a:xfrm>
-            <a:off x="5251106" y="1559751"/>
-            <a:ext cx="6611530" cy="4796600"/>
-          </a:xfrm>
-        </p:spPr>
-      </p:pic>
-      <p:sp>
-        <p:nvSpPr>
-          <p:cNvPr id="4" name="Slide Number Placeholder 3">
-            <a:extLst>
-              <a:ext uri="{FF2B5EF4-FFF2-40B4-BE49-F238E27FC236}">
-                <a16:creationId xmlns:a16="http://schemas.microsoft.com/office/drawing/2014/main" id="{4E0AC229-1350-706D-5188-3B220E584BCD}"/>
-              </a:ext>
-            </a:extLst>
-          </p:cNvPr>
-          <p:cNvSpPr>
-            <a:spLocks noGrp="1"/>
-          </p:cNvSpPr>
-          <p:nvPr>
-            <p:ph type="sldNum" sz="quarter" idx="12"/>
-          </p:nvPr>
-        </p:nvSpPr>
-        <p:spPr/>
-        <p:txBody>
-          <a:bodyPr/>
-          <a:lstStyle/>
-          <a:p>
-            <a:fld id="{85442DEE-2235-41B4-99BD-234203159492}" type="slidenum">
-              <a:rPr lang="en-US" smtClean="0"/>
-              <a:pPr/>
-              <a:t>30</a:t>
-            </a:fld>
-            <a:endParaRPr lang="en-US" dirty="0"/>
-          </a:p>
-        </p:txBody>
-      </p:sp>
-    </p:spTree>
-    <p:extLst>
-      <p:ext uri="{BB962C8B-B14F-4D97-AF65-F5344CB8AC3E}">
-        <p14:creationId xmlns:p14="http://schemas.microsoft.com/office/powerpoint/2010/main" val="2554071313"/>
-      </p:ext>
-    </p:extLst>
-  </p:cSld>
-  <p:clrMapOvr>
-    <a:masterClrMapping/>
-  </p:clrMapOvr>
-</p:sld>
-</file>
-
-<file path=ppt/slides/slide31.xml><?xml version="1.0" encoding="utf-8"?>
-<p:sld xmlns:a="http://schemas.openxmlformats.org/drawingml/2006/main" xmlns:r="http://schemas.openxmlformats.org/officeDocument/2006/relationships" xmlns:p="http://schemas.openxmlformats.org/presentationml/2006/main">
-  <p:cSld>
-    <p:spTree>
-      <p:nvGrpSpPr>
-        <p:cNvPr id="1" name=""/>
-        <p:cNvGrpSpPr/>
-        <p:nvPr/>
-      </p:nvGrpSpPr>
-      <p:grpSpPr>
-        <a:xfrm>
-          <a:off x="0" y="0"/>
-          <a:ext cx="0" cy="0"/>
-          <a:chOff x="0" y="0"/>
-          <a:chExt cx="0" cy="0"/>
-        </a:xfrm>
-      </p:grpSpPr>
-      <p:sp>
-        <p:nvSpPr>
-          <p:cNvPr id="2" name="Title 1">
-            <a:extLst>
-              <a:ext uri="{FF2B5EF4-FFF2-40B4-BE49-F238E27FC236}">
                 <a16:creationId xmlns:a16="http://schemas.microsoft.com/office/drawing/2014/main" id="{B757B66D-E6A4-3767-F4D5-148AAE85CD6C}"/>
               </a:ext>
             </a:extLst>
@@ -17834,7 +17968,7 @@
             <a:fld id="{85442DEE-2235-41B4-99BD-234203159492}" type="slidenum">
               <a:rPr lang="en-US" smtClean="0"/>
               <a:pPr/>
-              <a:t>31</a:t>
+              <a:t>30</a:t>
             </a:fld>
             <a:endParaRPr lang="en-US" dirty="0"/>
           </a:p>
@@ -17963,7 +18097,7 @@
 </p:sld>
 </file>
 
-<file path=ppt/slides/slide32.xml><?xml version="1.0" encoding="utf-8"?>
+<file path=ppt/slides/slide31.xml><?xml version="1.0" encoding="utf-8"?>
 <p:sld xmlns:a="http://schemas.openxmlformats.org/drawingml/2006/main" xmlns:r="http://schemas.openxmlformats.org/officeDocument/2006/relationships" xmlns:p="http://schemas.openxmlformats.org/presentationml/2006/main">
   <p:cSld>
     <p:spTree>
@@ -18037,10 +18171,7 @@
                 </a:pPr>
                 <a14:m>
                   <m:oMathPara xmlns:m="http://schemas.openxmlformats.org/officeDocument/2006/math">
-                    <m:oMathParaPr>
-                      <m:jc m:val="centerGroup"/>
-                    </m:oMathParaPr>
-                    <m:oMath xmlns:m="http://schemas.openxmlformats.org/officeDocument/2006/math">
+                    <m:oMath>
                       <m:r>
                         <a:rPr lang="en-US" b="0" i="1" smtClean="0">
                           <a:latin typeface="Cambria Math" panose="02040503050406030204" pitchFamily="18" charset="0"/>
@@ -18073,7 +18204,7 @@
                       <m:func>
                         <m:funcPr>
                           <m:ctrlPr>
-                            <a:rPr lang="en-US" b="0" i="1" smtClean="0">
+                            <a:rPr lang="en-US" b="0" i="0" smtClean="0">
                               <a:latin typeface="Cambria Math" panose="02040503050406030204" pitchFamily="18" charset="0"/>
                             </a:rPr>
                           </m:ctrlPr>
@@ -18109,10 +18240,7 @@
                 </a:pPr>
                 <a14:m>
                   <m:oMathPara xmlns:m="http://schemas.openxmlformats.org/officeDocument/2006/math">
-                    <m:oMathParaPr>
-                      <m:jc m:val="centerGroup"/>
-                    </m:oMathParaPr>
-                    <m:oMath xmlns:m="http://schemas.openxmlformats.org/officeDocument/2006/math">
+                    <m:oMath>
                       <m:r>
                         <a:rPr lang="en-US" b="0" i="1" smtClean="0">
                           <a:latin typeface="Cambria Math" panose="02040503050406030204" pitchFamily="18" charset="0"/>
@@ -18152,7 +18280,7 @@
                       <m:func>
                         <m:funcPr>
                           <m:ctrlPr>
-                            <a:rPr lang="en-US" b="0" i="1" smtClean="0">
+                            <a:rPr lang="en-US" b="0" i="0" smtClean="0">
                               <a:latin typeface="Cambria Math" panose="02040503050406030204" pitchFamily="18" charset="0"/>
                               <a:ea typeface="Cambria Math" panose="02040503050406030204" pitchFamily="18" charset="0"/>
                             </a:rPr>
@@ -18210,10 +18338,7 @@
                 </a:pPr>
                 <a14:m>
                   <m:oMathPara xmlns:m="http://schemas.openxmlformats.org/officeDocument/2006/math">
-                    <m:oMathParaPr>
-                      <m:jc m:val="centerGroup"/>
-                    </m:oMathParaPr>
-                    <m:oMath xmlns:m="http://schemas.openxmlformats.org/officeDocument/2006/math">
+                    <m:oMath>
                       <m:r>
                         <a:rPr lang="en-US" b="0" i="1" smtClean="0">
                           <a:latin typeface="Cambria Math" panose="02040503050406030204" pitchFamily="18" charset="0"/>
@@ -18252,7 +18377,7 @@
                           <m:sSupPr>
                             <m:ctrlPr>
                               <a:rPr lang="en-US" i="1">
-                                <a:latin typeface="Cambria Math" panose="02040503050406030204" pitchFamily="18" charset="0"/>
+                                <a:latin typeface="Cambria Math"/>
                                 <a:ea typeface="Cambria Math"/>
                               </a:rPr>
                             </m:ctrlPr>
@@ -18299,7 +18424,7 @@
                           <m:sSupPr>
                             <m:ctrlPr>
                               <a:rPr lang="en-US" i="1">
-                                <a:latin typeface="Cambria Math" panose="02040503050406030204" pitchFamily="18" charset="0"/>
+                                <a:latin typeface="Cambria Math"/>
                                 <a:ea typeface="Cambria Math"/>
                               </a:rPr>
                             </m:ctrlPr>
@@ -18375,10 +18500,7 @@
                 </a:pPr>
                 <a14:m>
                   <m:oMathPara xmlns:m="http://schemas.openxmlformats.org/officeDocument/2006/math">
-                    <m:oMathParaPr>
-                      <m:jc m:val="centerGroup"/>
-                    </m:oMathParaPr>
-                    <m:oMath xmlns:m="http://schemas.openxmlformats.org/officeDocument/2006/math">
+                    <m:oMath>
                       <m:r>
                         <a:rPr lang="en-US" i="1" smtClean="0">
                           <a:latin typeface="Cambria Math" panose="02040503050406030204" pitchFamily="18" charset="0"/>
@@ -18389,7 +18511,7 @@
                       <m:f>
                         <m:fPr>
                           <m:ctrlPr>
-                            <a:rPr lang="en-US" i="1" smtClean="0">
+                            <a:rPr lang="en-US" b="0" i="1" smtClean="0">
                               <a:latin typeface="Cambria Math" panose="02040503050406030204" pitchFamily="18" charset="0"/>
                               <a:ea typeface="Cambria Math" panose="02040503050406030204" pitchFamily="18" charset="0"/>
                             </a:rPr>
@@ -18452,10 +18574,7 @@
                 </a:pPr>
                 <a14:m>
                   <m:oMathPara xmlns:m="http://schemas.openxmlformats.org/officeDocument/2006/math">
-                    <m:oMathParaPr>
-                      <m:jc m:val="centerGroup"/>
-                    </m:oMathParaPr>
-                    <m:oMath xmlns:m="http://schemas.openxmlformats.org/officeDocument/2006/math">
+                    <m:oMath>
                       <m:f>
                         <m:fPr>
                           <m:ctrlPr>
@@ -18501,7 +18620,7 @@
                       <m:f>
                         <m:fPr>
                           <m:ctrlPr>
-                            <a:rPr lang="en-US" i="1" smtClean="0">
+                            <a:rPr lang="en-US" b="0" i="1" smtClean="0">
                               <a:latin typeface="Cambria Math" panose="02040503050406030204" pitchFamily="18" charset="0"/>
                               <a:ea typeface="Cambria Math" panose="02040503050406030204" pitchFamily="18" charset="0"/>
                             </a:rPr>
@@ -18670,7 +18789,7 @@
                     <m:func>
                       <m:funcPr>
                         <m:ctrlPr>
-                          <a:rPr lang="en-US" i="1">
+                          <a:rPr lang="en-US" b="0" i="0" smtClean="0">
                             <a:latin typeface="Cambria Math" panose="02040503050406030204" pitchFamily="18" charset="0"/>
                           </a:rPr>
                         </m:ctrlPr>
@@ -18741,7 +18860,7 @@
                     <m:func>
                       <m:funcPr>
                         <m:ctrlPr>
-                          <a:rPr lang="en-US" i="1">
+                          <a:rPr lang="en-US" b="0" i="0" smtClean="0">
                             <a:latin typeface="Cambria Math" panose="02040503050406030204" pitchFamily="18" charset="0"/>
                           </a:rPr>
                         </m:ctrlPr>
@@ -18838,7 +18957,7 @@
             <a:fld id="{85442DEE-2235-41B4-99BD-234203159492}" type="slidenum">
               <a:rPr lang="en-US" smtClean="0"/>
               <a:pPr/>
-              <a:t>32</a:t>
+              <a:t>31</a:t>
             </a:fld>
             <a:endParaRPr lang="en-US" dirty="0"/>
           </a:p>
@@ -18888,9 +19007,40 @@
                                           </p:stCondLst>
                                         </p:cTn>
                                         <p:tgtEl>
-                                          <p:spTgt spid="5">
+                                          <p:spTgt spid="3">
                                             <p:txEl>
-                                              <p:pRg st="0" end="0"/>
+                                              <p:pRg st="4" end="4"/>
+                                            </p:txEl>
+                                          </p:spTgt>
+                                        </p:tgtEl>
+                                        <p:attrNameLst>
+                                          <p:attrName>style.visibility</p:attrName>
+                                        </p:attrNameLst>
+                                      </p:cBhvr>
+                                      <p:to>
+                                        <p:strVal val="visible"/>
+                                      </p:to>
+                                    </p:set>
+                                  </p:childTnLst>
+                                </p:cTn>
+                              </p:par>
+                              <p:par>
+                                <p:cTn id="7" presetID="1" presetClass="entr" presetSubtype="0" fill="hold" nodeType="withEffect">
+                                  <p:stCondLst>
+                                    <p:cond delay="0"/>
+                                  </p:stCondLst>
+                                  <p:childTnLst>
+                                    <p:set>
+                                      <p:cBhvr>
+                                        <p:cTn id="8" dur="1" fill="hold">
+                                          <p:stCondLst>
+                                            <p:cond delay="0"/>
+                                          </p:stCondLst>
+                                        </p:cTn>
+                                        <p:tgtEl>
+                                          <p:spTgt spid="3">
+                                            <p:txEl>
+                                              <p:pRg st="5" end="5"/>
                                             </p:txEl>
                                           </p:spTgt>
                                         </p:tgtEl>
@@ -18912,34 +19062,34 @@
                     </p:cTn>
                   </p:par>
                   <p:par>
-                    <p:cTn id="7" fill="hold">
+                    <p:cTn id="9" fill="hold">
                       <p:stCondLst>
                         <p:cond delay="indefinite"/>
                       </p:stCondLst>
                       <p:childTnLst>
                         <p:par>
-                          <p:cTn id="8" fill="hold">
+                          <p:cTn id="10" fill="hold">
                             <p:stCondLst>
                               <p:cond delay="0"/>
                             </p:stCondLst>
                             <p:childTnLst>
                               <p:par>
-                                <p:cTn id="9" presetID="1" presetClass="entr" presetSubtype="0" fill="hold" nodeType="clickEffect">
+                                <p:cTn id="11" presetID="1" presetClass="entr" presetSubtype="0" fill="hold" nodeType="clickEffect">
                                   <p:stCondLst>
                                     <p:cond delay="0"/>
                                   </p:stCondLst>
                                   <p:childTnLst>
                                     <p:set>
                                       <p:cBhvr>
-                                        <p:cTn id="10" dur="1" fill="hold">
+                                        <p:cTn id="12" dur="1" fill="hold">
                                           <p:stCondLst>
                                             <p:cond delay="0"/>
                                           </p:stCondLst>
                                         </p:cTn>
                                         <p:tgtEl>
-                                          <p:spTgt spid="5">
+                                          <p:spTgt spid="3">
                                             <p:txEl>
-                                              <p:pRg st="1" end="1"/>
+                                              <p:pRg st="6" end="6"/>
                                             </p:txEl>
                                           </p:spTgt>
                                         </p:tgtEl>
@@ -18954,26 +19104,8 @@
                                   </p:childTnLst>
                                 </p:cTn>
                               </p:par>
-                            </p:childTnLst>
-                          </p:cTn>
-                        </p:par>
-                      </p:childTnLst>
-                    </p:cTn>
-                  </p:par>
-                  <p:par>
-                    <p:cTn id="11" fill="hold">
-                      <p:stCondLst>
-                        <p:cond delay="indefinite"/>
-                      </p:stCondLst>
-                      <p:childTnLst>
-                        <p:par>
-                          <p:cTn id="12" fill="hold">
-                            <p:stCondLst>
-                              <p:cond delay="0"/>
-                            </p:stCondLst>
-                            <p:childTnLst>
                               <p:par>
-                                <p:cTn id="13" presetID="1" presetClass="entr" presetSubtype="0" fill="hold" nodeType="clickEffect">
+                                <p:cTn id="13" presetID="1" presetClass="entr" presetSubtype="0" fill="hold" nodeType="withEffect">
                                   <p:stCondLst>
                                     <p:cond delay="0"/>
                                   </p:stCondLst>
@@ -18986,9 +19118,9 @@
                                           </p:stCondLst>
                                         </p:cTn>
                                         <p:tgtEl>
-                                          <p:spTgt spid="5">
+                                          <p:spTgt spid="3">
                                             <p:txEl>
-                                              <p:pRg st="2" end="2"/>
+                                              <p:pRg st="7" end="7"/>
                                             </p:txEl>
                                           </p:spTgt>
                                         </p:tgtEl>
@@ -19037,7 +19169,7 @@
                                         <p:tgtEl>
                                           <p:spTgt spid="5">
                                             <p:txEl>
-                                              <p:pRg st="3" end="3"/>
+                                              <p:pRg st="0" end="0"/>
                                             </p:txEl>
                                           </p:spTgt>
                                         </p:tgtEl>
@@ -19086,7 +19218,7 @@
                                         <p:tgtEl>
                                           <p:spTgt spid="5">
                                             <p:txEl>
-                                              <p:pRg st="4" end="4"/>
+                                              <p:pRg st="1" end="1"/>
                                             </p:txEl>
                                           </p:spTgt>
                                         </p:tgtEl>
@@ -19128,6 +19260,153 @@
                                     <p:set>
                                       <p:cBhvr>
                                         <p:cTn id="26" dur="1" fill="hold">
+                                          <p:stCondLst>
+                                            <p:cond delay="0"/>
+                                          </p:stCondLst>
+                                        </p:cTn>
+                                        <p:tgtEl>
+                                          <p:spTgt spid="5">
+                                            <p:txEl>
+                                              <p:pRg st="2" end="2"/>
+                                            </p:txEl>
+                                          </p:spTgt>
+                                        </p:tgtEl>
+                                        <p:attrNameLst>
+                                          <p:attrName>style.visibility</p:attrName>
+                                        </p:attrNameLst>
+                                      </p:cBhvr>
+                                      <p:to>
+                                        <p:strVal val="visible"/>
+                                      </p:to>
+                                    </p:set>
+                                  </p:childTnLst>
+                                </p:cTn>
+                              </p:par>
+                            </p:childTnLst>
+                          </p:cTn>
+                        </p:par>
+                      </p:childTnLst>
+                    </p:cTn>
+                  </p:par>
+                  <p:par>
+                    <p:cTn id="27" fill="hold">
+                      <p:stCondLst>
+                        <p:cond delay="indefinite"/>
+                      </p:stCondLst>
+                      <p:childTnLst>
+                        <p:par>
+                          <p:cTn id="28" fill="hold">
+                            <p:stCondLst>
+                              <p:cond delay="0"/>
+                            </p:stCondLst>
+                            <p:childTnLst>
+                              <p:par>
+                                <p:cTn id="29" presetID="1" presetClass="entr" presetSubtype="0" fill="hold" nodeType="clickEffect">
+                                  <p:stCondLst>
+                                    <p:cond delay="0"/>
+                                  </p:stCondLst>
+                                  <p:childTnLst>
+                                    <p:set>
+                                      <p:cBhvr>
+                                        <p:cTn id="30" dur="1" fill="hold">
+                                          <p:stCondLst>
+                                            <p:cond delay="0"/>
+                                          </p:stCondLst>
+                                        </p:cTn>
+                                        <p:tgtEl>
+                                          <p:spTgt spid="5">
+                                            <p:txEl>
+                                              <p:pRg st="3" end="3"/>
+                                            </p:txEl>
+                                          </p:spTgt>
+                                        </p:tgtEl>
+                                        <p:attrNameLst>
+                                          <p:attrName>style.visibility</p:attrName>
+                                        </p:attrNameLst>
+                                      </p:cBhvr>
+                                      <p:to>
+                                        <p:strVal val="visible"/>
+                                      </p:to>
+                                    </p:set>
+                                  </p:childTnLst>
+                                </p:cTn>
+                              </p:par>
+                            </p:childTnLst>
+                          </p:cTn>
+                        </p:par>
+                      </p:childTnLst>
+                    </p:cTn>
+                  </p:par>
+                  <p:par>
+                    <p:cTn id="31" fill="hold">
+                      <p:stCondLst>
+                        <p:cond delay="indefinite"/>
+                      </p:stCondLst>
+                      <p:childTnLst>
+                        <p:par>
+                          <p:cTn id="32" fill="hold">
+                            <p:stCondLst>
+                              <p:cond delay="0"/>
+                            </p:stCondLst>
+                            <p:childTnLst>
+                              <p:par>
+                                <p:cTn id="33" presetID="1" presetClass="entr" presetSubtype="0" fill="hold" nodeType="clickEffect">
+                                  <p:stCondLst>
+                                    <p:cond delay="0"/>
+                                  </p:stCondLst>
+                                  <p:childTnLst>
+                                    <p:set>
+                                      <p:cBhvr>
+                                        <p:cTn id="34" dur="1" fill="hold">
+                                          <p:stCondLst>
+                                            <p:cond delay="0"/>
+                                          </p:stCondLst>
+                                        </p:cTn>
+                                        <p:tgtEl>
+                                          <p:spTgt spid="5">
+                                            <p:txEl>
+                                              <p:pRg st="4" end="4"/>
+                                            </p:txEl>
+                                          </p:spTgt>
+                                        </p:tgtEl>
+                                        <p:attrNameLst>
+                                          <p:attrName>style.visibility</p:attrName>
+                                        </p:attrNameLst>
+                                      </p:cBhvr>
+                                      <p:to>
+                                        <p:strVal val="visible"/>
+                                      </p:to>
+                                    </p:set>
+                                  </p:childTnLst>
+                                </p:cTn>
+                              </p:par>
+                            </p:childTnLst>
+                          </p:cTn>
+                        </p:par>
+                      </p:childTnLst>
+                    </p:cTn>
+                  </p:par>
+                  <p:par>
+                    <p:cTn id="35" fill="hold">
+                      <p:stCondLst>
+                        <p:cond delay="indefinite"/>
+                      </p:stCondLst>
+                      <p:childTnLst>
+                        <p:par>
+                          <p:cTn id="36" fill="hold">
+                            <p:stCondLst>
+                              <p:cond delay="0"/>
+                            </p:stCondLst>
+                            <p:childTnLst>
+                              <p:par>
+                                <p:cTn id="37" presetID="1" presetClass="entr" presetSubtype="0" fill="hold" nodeType="clickEffect">
+                                  <p:stCondLst>
+                                    <p:cond delay="0"/>
+                                  </p:stCondLst>
+                                  <p:childTnLst>
+                                    <p:set>
+                                      <p:cBhvr>
+                                        <p:cTn id="38" dur="1" fill="hold">
                                           <p:stCondLst>
                                             <p:cond delay="0"/>
                                           </p:stCondLst>
@@ -19181,7 +19460,7 @@
 </p:sld>
 </file>
 
-<file path=ppt/slides/slide33.xml><?xml version="1.0" encoding="utf-8"?>
+<file path=ppt/slides/slide32.xml><?xml version="1.0" encoding="utf-8"?>
 <p:sld xmlns:a="http://schemas.openxmlformats.org/drawingml/2006/main" xmlns:r="http://schemas.openxmlformats.org/officeDocument/2006/relationships" xmlns:p="http://schemas.openxmlformats.org/presentationml/2006/main">
   <p:cSld>
     <p:spTree>
@@ -19278,7 +19557,7 @@
             <a:fld id="{85442DEE-2235-41B4-99BD-234203159492}" type="slidenum">
               <a:rPr lang="en-US" smtClean="0"/>
               <a:pPr/>
-              <a:t>33</a:t>
+              <a:t>32</a:t>
             </a:fld>
             <a:endParaRPr lang="en-US" dirty="0"/>
           </a:p>
@@ -19407,7 +19686,7 @@
 </p:sld>
 </file>
 
-<file path=ppt/slides/slide34.xml><?xml version="1.0" encoding="utf-8"?>
+<file path=ppt/slides/slide33.xml><?xml version="1.0" encoding="utf-8"?>
 <p:sld xmlns:a="http://schemas.openxmlformats.org/drawingml/2006/main" xmlns:r="http://schemas.openxmlformats.org/officeDocument/2006/relationships" xmlns:p="http://schemas.openxmlformats.org/presentationml/2006/main">
   <p:cSld>
     <p:spTree>
@@ -19541,7 +19820,7 @@
             <a:fld id="{85442DEE-2235-41B4-99BD-234203159492}" type="slidenum">
               <a:rPr lang="en-US" smtClean="0"/>
               <a:pPr/>
-              <a:t>34</a:t>
+              <a:t>33</a:t>
             </a:fld>
             <a:endParaRPr lang="en-US" dirty="0"/>
           </a:p>
@@ -19768,7 +20047,7 @@
 </p:sld>
 </file>
 
-<file path=ppt/slides/slide35.xml><?xml version="1.0" encoding="utf-8"?>
+<file path=ppt/slides/slide34.xml><?xml version="1.0" encoding="utf-8"?>
 <p:sld xmlns:a="http://schemas.openxmlformats.org/drawingml/2006/main" xmlns:r="http://schemas.openxmlformats.org/officeDocument/2006/relationships" xmlns:p="http://schemas.openxmlformats.org/presentationml/2006/main">
   <p:cSld>
     <p:spTree>
@@ -19872,7 +20151,7 @@
             <a:fld id="{85442DEE-2235-41B4-99BD-234203159492}" type="slidenum">
               <a:rPr lang="en-US" smtClean="0"/>
               <a:pPr/>
-              <a:t>35</a:t>
+              <a:t>34</a:t>
             </a:fld>
             <a:endParaRPr lang="en-US" dirty="0"/>
           </a:p>
@@ -20052,7 +20331,7 @@
 </p:sld>
 </file>
 
-<file path=ppt/slides/slide36.xml><?xml version="1.0" encoding="utf-8"?>
+<file path=ppt/slides/slide35.xml><?xml version="1.0" encoding="utf-8"?>
 <p:sld xmlns:a="http://schemas.openxmlformats.org/drawingml/2006/main" xmlns:r="http://schemas.openxmlformats.org/officeDocument/2006/relationships" xmlns:p="http://schemas.openxmlformats.org/presentationml/2006/main">
   <p:cSld>
     <p:spTree>
@@ -20134,15 +20413,12 @@
                 </a:pPr>
                 <a14:m>
                   <m:oMathPara xmlns:m="http://schemas.openxmlformats.org/officeDocument/2006/math">
-                    <m:oMathParaPr>
-                      <m:jc m:val="centerGroup"/>
-                    </m:oMathParaPr>
-                    <m:oMath xmlns:m="http://schemas.openxmlformats.org/officeDocument/2006/math">
+                    <m:oMath>
                       <m:sSub>
                         <m:sSubPr>
                           <m:ctrlPr>
                             <a:rPr lang="en-US" i="1">
-                              <a:latin typeface="Cambria Math" panose="02040503050406030204" pitchFamily="18" charset="0"/>
+                              <a:latin typeface="Cambria Math"/>
                             </a:rPr>
                           </m:ctrlPr>
                         </m:sSubPr>
@@ -20178,7 +20454,7 @@
                       <m:sSubSup>
                         <m:sSubSupPr>
                           <m:ctrlPr>
-                            <a:rPr lang="en-US" i="1" smtClean="0">
+                            <a:rPr lang="en-US" b="0" i="1" smtClean="0">
                               <a:latin typeface="Cambria Math" panose="02040503050406030204" pitchFamily="18" charset="0"/>
                             </a:rPr>
                           </m:ctrlPr>
@@ -20218,7 +20494,7 @@
                         <m:sSubSupPr>
                           <m:ctrlPr>
                             <a:rPr lang="en-US" i="1">
-                              <a:latin typeface="Cambria Math" panose="02040503050406030204" pitchFamily="18" charset="0"/>
+                              <a:latin typeface="Cambria Math"/>
                             </a:rPr>
                           </m:ctrlPr>
                         </m:sSubSupPr>
@@ -20256,7 +20532,7 @@
                       <m:sSubSup>
                         <m:sSubSupPr>
                           <m:ctrlPr>
-                            <a:rPr lang="en-US" i="1">
+                            <a:rPr lang="en-US" b="0" i="1" smtClean="0">
                               <a:latin typeface="Cambria Math" panose="02040503050406030204" pitchFamily="18" charset="0"/>
                             </a:rPr>
                           </m:ctrlPr>
@@ -20308,7 +20584,7 @@
                       <m:sSup>
                         <m:sSupPr>
                           <m:ctrlPr>
-                            <a:rPr lang="en-US" i="1" smtClean="0">
+                            <a:rPr lang="en-US" b="0" i="1" smtClean="0">
                               <a:latin typeface="Cambria Math" panose="02040503050406030204" pitchFamily="18" charset="0"/>
                               <a:ea typeface="Cambria Math" panose="02040503050406030204" pitchFamily="18" charset="0"/>
                             </a:rPr>
@@ -20318,7 +20594,7 @@
                           <m:d>
                             <m:dPr>
                               <m:ctrlPr>
-                                <a:rPr lang="en-US" i="1" smtClean="0">
+                                <a:rPr lang="en-US" b="0" i="1" smtClean="0">
                                   <a:latin typeface="Cambria Math" panose="02040503050406030204" pitchFamily="18" charset="0"/>
                                   <a:ea typeface="Cambria Math" panose="02040503050406030204" pitchFamily="18" charset="0"/>
                                 </a:rPr>
@@ -20328,7 +20604,7 @@
                               <m:f>
                                 <m:fPr>
                                   <m:ctrlPr>
-                                    <a:rPr lang="en-US" i="1" smtClean="0">
+                                    <a:rPr lang="en-US" b="0" i="1" smtClean="0">
                                       <a:latin typeface="Cambria Math" panose="02040503050406030204" pitchFamily="18" charset="0"/>
                                       <a:ea typeface="Cambria Math" panose="02040503050406030204" pitchFamily="18" charset="0"/>
                                     </a:rPr>
@@ -20464,7 +20740,7 @@
                       <m:sSup>
                         <m:sSupPr>
                           <m:ctrlPr>
-                            <a:rPr lang="en-US" i="1" smtClean="0">
+                            <a:rPr lang="en-US" b="0" i="1" smtClean="0">
                               <a:latin typeface="Cambria Math" panose="02040503050406030204" pitchFamily="18" charset="0"/>
                             </a:rPr>
                           </m:ctrlPr>
@@ -20473,7 +20749,7 @@
                           <m:d>
                             <m:dPr>
                               <m:ctrlPr>
-                                <a:rPr lang="en-US" i="1" smtClean="0">
+                                <a:rPr lang="en-US" b="0" i="1" smtClean="0">
                                   <a:latin typeface="Cambria Math" panose="02040503050406030204" pitchFamily="18" charset="0"/>
                                 </a:rPr>
                               </m:ctrlPr>
@@ -20482,7 +20758,7 @@
                               <m:f>
                                 <m:fPr>
                                   <m:ctrlPr>
-                                    <a:rPr lang="en-US" i="1" smtClean="0">
+                                    <a:rPr lang="en-US" b="0" i="1" smtClean="0">
                                       <a:latin typeface="Cambria Math" panose="02040503050406030204" pitchFamily="18" charset="0"/>
                                     </a:rPr>
                                   </m:ctrlPr>
@@ -20557,7 +20833,7 @@
                       <m:sSup>
                         <m:sSupPr>
                           <m:ctrlPr>
-                            <a:rPr lang="en-US" i="1" smtClean="0">
+                            <a:rPr lang="en-US" b="0" i="1" smtClean="0">
                               <a:latin typeface="Cambria Math" panose="02040503050406030204" pitchFamily="18" charset="0"/>
                             </a:rPr>
                           </m:ctrlPr>
@@ -20566,7 +20842,7 @@
                           <m:d>
                             <m:dPr>
                               <m:ctrlPr>
-                                <a:rPr lang="en-US" i="1" smtClean="0">
+                                <a:rPr lang="en-US" b="0" i="1" smtClean="0">
                                   <a:latin typeface="Cambria Math" panose="02040503050406030204" pitchFamily="18" charset="0"/>
                                 </a:rPr>
                               </m:ctrlPr>
@@ -20575,7 +20851,7 @@
                               <m:f>
                                 <m:fPr>
                                   <m:ctrlPr>
-                                    <a:rPr lang="en-US" i="1" smtClean="0">
+                                    <a:rPr lang="en-US" b="0" i="1" smtClean="0">
                                       <a:latin typeface="Cambria Math" panose="02040503050406030204" pitchFamily="18" charset="0"/>
                                     </a:rPr>
                                   </m:ctrlPr>
@@ -20670,14 +20946,11 @@
                 </a:pPr>
                 <a14:m>
                   <m:oMathPara xmlns:m="http://schemas.openxmlformats.org/officeDocument/2006/math">
-                    <m:oMathParaPr>
-                      <m:jc m:val="centerGroup"/>
-                    </m:oMathParaPr>
-                    <m:oMath xmlns:m="http://schemas.openxmlformats.org/officeDocument/2006/math">
+                    <m:oMath>
                       <m:func>
                         <m:funcPr>
                           <m:ctrlPr>
-                            <a:rPr lang="en-US" i="1" smtClean="0">
+                            <a:rPr lang="en-US" b="0" i="0" smtClean="0">
                               <a:latin typeface="Cambria Math" panose="02040503050406030204" pitchFamily="18" charset="0"/>
                             </a:rPr>
                           </m:ctrlPr>
@@ -20697,7 +20970,7 @@
                           <m:sSub>
                             <m:sSubPr>
                               <m:ctrlPr>
-                                <a:rPr lang="en-US" i="1" smtClean="0">
+                                <a:rPr lang="en-US" b="0" i="1" smtClean="0">
                                   <a:latin typeface="Cambria Math" panose="02040503050406030204" pitchFamily="18" charset="0"/>
                                 </a:rPr>
                               </m:ctrlPr>
@@ -20737,7 +21010,7 @@
                       <m:func>
                         <m:funcPr>
                           <m:ctrlPr>
-                            <a:rPr lang="en-US" b="0" i="1" smtClean="0">
+                            <a:rPr lang="en-US" b="0" i="0" smtClean="0">
                               <a:latin typeface="Cambria Math" panose="02040503050406030204" pitchFamily="18" charset="0"/>
                             </a:rPr>
                           </m:ctrlPr>
@@ -20758,7 +21031,7 @@
                             <m:sSubPr>
                               <m:ctrlPr>
                                 <a:rPr lang="en-US" b="0" i="1" smtClean="0">
-                                  <a:latin typeface="Cambria Math" panose="02040503050406030204" pitchFamily="18" charset="0"/>
+                                  <a:latin typeface="Cambria Math"/>
                                 </a:rPr>
                               </m:ctrlPr>
                             </m:sSubPr>
@@ -20795,7 +21068,7 @@
                             <m:fPr>
                               <m:ctrlPr>
                                 <a:rPr lang="en-US" b="0" i="1" smtClean="0">
-                                  <a:latin typeface="Cambria Math" panose="02040503050406030204" pitchFamily="18" charset="0"/>
+                                  <a:latin typeface="Cambria Math"/>
                                 </a:rPr>
                               </m:ctrlPr>
                             </m:fPr>
@@ -20825,7 +21098,7 @@
                           <m:func>
                             <m:funcPr>
                               <m:ctrlPr>
-                                <a:rPr lang="en-US" b="0" i="1" smtClean="0">
+                                <a:rPr lang="en-US" b="0" i="0" smtClean="0">
                                   <a:latin typeface="Cambria Math" panose="02040503050406030204" pitchFamily="18" charset="0"/>
                                 </a:rPr>
                               </m:ctrlPr>
@@ -20926,7 +21199,7 @@
                               <m:func>
                                 <m:funcPr>
                                   <m:ctrlPr>
-                                    <a:rPr lang="en-US" b="0" i="1" smtClean="0">
+                                    <a:rPr lang="en-US" b="0" i="0" smtClean="0">
                                       <a:latin typeface="Cambria Math" panose="02040503050406030204" pitchFamily="18" charset="0"/>
                                     </a:rPr>
                                   </m:ctrlPr>
@@ -20956,7 +21229,7 @@
                                         <a:rPr lang="en-US" b="0" i="1" smtClean="0">
                                           <a:latin typeface="Cambria Math" panose="02040503050406030204" pitchFamily="18" charset="0"/>
                                         </a:rPr>
-                                        <m:t>h</m:t>
+                                        <m:t>ℎ</m:t>
                                       </m:r>
                                     </m:e>
                                     <m:sub>
@@ -21077,7 +21350,7 @@
             <a:fld id="{85442DEE-2235-41B4-99BD-234203159492}" type="slidenum">
               <a:rPr lang="en-US" smtClean="0"/>
               <a:pPr/>
-              <a:t>36</a:t>
+              <a:t>35</a:t>
             </a:fld>
             <a:endParaRPr lang="en-US" dirty="0"/>
           </a:p>
@@ -21255,7 +21528,7 @@
 </p:sld>
 </file>
 
-<file path=ppt/slides/slide37.xml><?xml version="1.0" encoding="utf-8"?>
+<file path=ppt/slides/slide36.xml><?xml version="1.0" encoding="utf-8"?>
 <p:sld xmlns:a="http://schemas.openxmlformats.org/drawingml/2006/main" xmlns:r="http://schemas.openxmlformats.org/officeDocument/2006/relationships" xmlns:p="http://schemas.openxmlformats.org/presentationml/2006/main">
   <p:cSld>
     <p:spTree>
@@ -21492,7 +21765,7 @@
             <a:fld id="{85442DEE-2235-41B4-99BD-234203159492}" type="slidenum">
               <a:rPr lang="en-US" smtClean="0"/>
               <a:pPr/>
-              <a:t>37</a:t>
+              <a:t>36</a:t>
             </a:fld>
             <a:endParaRPr lang="en-US" dirty="0"/>
           </a:p>
@@ -21763,7 +22036,7 @@
 </p:sld>
 </file>
 
-<file path=ppt/slides/slide38.xml><?xml version="1.0" encoding="utf-8"?>
+<file path=ppt/slides/slide37.xml><?xml version="1.0" encoding="utf-8"?>
 <p:sld xmlns:a="http://schemas.openxmlformats.org/drawingml/2006/main" xmlns:r="http://schemas.openxmlformats.org/officeDocument/2006/relationships" xmlns:p="http://schemas.openxmlformats.org/presentationml/2006/main">
   <p:cSld>
     <p:spTree>
@@ -21912,7 +22185,7 @@
             <a:fld id="{85442DEE-2235-41B4-99BD-234203159492}" type="slidenum">
               <a:rPr lang="en-US" smtClean="0"/>
               <a:pPr/>
-              <a:t>38</a:t>
+              <a:t>37</a:t>
             </a:fld>
             <a:endParaRPr lang="en-US" dirty="0"/>
           </a:p>
@@ -21931,7 +22204,7 @@
 </p:sld>
 </file>
 
-<file path=ppt/slides/slide39.xml><?xml version="1.0" encoding="utf-8"?>
+<file path=ppt/slides/slide38.xml><?xml version="1.0" encoding="utf-8"?>
 <p:sld xmlns:a="http://schemas.openxmlformats.org/drawingml/2006/main" xmlns:r="http://schemas.openxmlformats.org/officeDocument/2006/relationships" xmlns:p="http://schemas.openxmlformats.org/presentationml/2006/main">
   <p:cSld>
     <p:spTree>
@@ -22009,14 +22282,11 @@
                 </a:pPr>
                 <a14:m>
                   <m:oMathPara xmlns:m="http://schemas.openxmlformats.org/officeDocument/2006/math">
-                    <m:oMathParaPr>
-                      <m:jc m:val="centerGroup"/>
-                    </m:oMathParaPr>
-                    <m:oMath xmlns:m="http://schemas.openxmlformats.org/officeDocument/2006/math">
+                    <m:oMath>
                       <m:f>
                         <m:fPr>
                           <m:ctrlPr>
-                            <a:rPr lang="en-US" i="1" smtClean="0">
+                            <a:rPr lang="en-US" b="0" i="1" smtClean="0">
                               <a:latin typeface="Cambria Math" panose="02040503050406030204" pitchFamily="18" charset="0"/>
                               <a:ea typeface="Cambria Math" panose="02040503050406030204" pitchFamily="18" charset="0"/>
                             </a:rPr>
@@ -22309,10 +22579,7 @@
                 </a:pPr>
                 <a14:m>
                   <m:oMathPara xmlns:m="http://schemas.openxmlformats.org/officeDocument/2006/math">
-                    <m:oMathParaPr>
-                      <m:jc m:val="centerGroup"/>
-                    </m:oMathParaPr>
-                    <m:oMath xmlns:m="http://schemas.openxmlformats.org/officeDocument/2006/math">
+                    <m:oMath>
                       <m:r>
                         <a:rPr lang="en-US" i="1" smtClean="0">
                           <a:latin typeface="Cambria Math" panose="02040503050406030204" pitchFamily="18" charset="0"/>
@@ -22323,7 +22590,7 @@
                       <m:func>
                         <m:funcPr>
                           <m:ctrlPr>
-                            <a:rPr lang="en-US" b="0" i="1" smtClean="0">
+                            <a:rPr lang="en-US" b="0" i="0" smtClean="0">
                               <a:latin typeface="Cambria Math" panose="02040503050406030204" pitchFamily="18" charset="0"/>
                               <a:ea typeface="Cambria Math" panose="02040503050406030204" pitchFamily="18" charset="0"/>
                             </a:rPr>
@@ -22464,7 +22731,7 @@
                       <m:func>
                         <m:funcPr>
                           <m:ctrlPr>
-                            <a:rPr lang="en-US" b="0" i="1" smtClean="0">
+                            <a:rPr lang="en-US" b="0" i="0" smtClean="0">
                               <a:latin typeface="Cambria Math" panose="02040503050406030204" pitchFamily="18" charset="0"/>
                               <a:ea typeface="Cambria Math" panose="02040503050406030204" pitchFamily="18" charset="0"/>
                             </a:rPr>
@@ -22530,7 +22797,7 @@
                       <m:func>
                         <m:funcPr>
                           <m:ctrlPr>
-                            <a:rPr lang="is-IS" b="0" i="1" smtClean="0">
+                            <a:rPr lang="is-IS" b="0" i="0" smtClean="0">
                               <a:latin typeface="Cambria Math" panose="02040503050406030204" pitchFamily="18" charset="0"/>
                               <a:ea typeface="Cambria Math" panose="02040503050406030204" pitchFamily="18" charset="0"/>
                             </a:rPr>
@@ -22572,7 +22839,7 @@
                                   <m:sSub>
                                     <m:sSubPr>
                                       <m:ctrlPr>
-                                        <a:rPr lang="en-US" b="0" i="1" smtClean="0">
+                                        <a:rPr lang="is-IS" b="0" i="1" smtClean="0">
                                           <a:latin typeface="Cambria Math" panose="02040503050406030204" pitchFamily="18" charset="0"/>
                                           <a:ea typeface="Cambria Math" panose="02040503050406030204" pitchFamily="18" charset="0"/>
                                         </a:rPr>
@@ -22643,7 +22910,7 @@
                       <m:func>
                         <m:funcPr>
                           <m:ctrlPr>
-                            <a:rPr lang="en-US" b="0" i="1" smtClean="0">
+                            <a:rPr lang="en-US" b="0" i="0" smtClean="0">
                               <a:latin typeface="Cambria Math" panose="02040503050406030204" pitchFamily="18" charset="0"/>
                               <a:ea typeface="Cambria Math" panose="02040503050406030204" pitchFamily="18" charset="0"/>
                             </a:rPr>
@@ -22857,7 +23124,7 @@
             <a:fld id="{85442DEE-2235-41B4-99BD-234203159492}" type="slidenum">
               <a:rPr lang="en-US" smtClean="0"/>
               <a:pPr/>
-              <a:t>39</a:t>
+              <a:t>38</a:t>
             </a:fld>
             <a:endParaRPr lang="en-US" dirty="0"/>
           </a:p>
@@ -22867,6 +23134,168 @@
     <p:extLst>
       <p:ext uri="{BB962C8B-B14F-4D97-AF65-F5344CB8AC3E}">
         <p14:creationId xmlns:p14="http://schemas.microsoft.com/office/powerpoint/2010/main" val="2056447259"/>
+      </p:ext>
+    </p:extLst>
+  </p:cSld>
+  <p:clrMapOvr>
+    <a:masterClrMapping/>
+  </p:clrMapOvr>
+</p:sld>
+</file>
+
+<file path=ppt/slides/slide39.xml><?xml version="1.0" encoding="utf-8"?>
+<p:sld xmlns:a="http://schemas.openxmlformats.org/drawingml/2006/main" xmlns:r="http://schemas.openxmlformats.org/officeDocument/2006/relationships" xmlns:p="http://schemas.openxmlformats.org/presentationml/2006/main">
+  <p:cSld>
+    <p:spTree>
+      <p:nvGrpSpPr>
+        <p:cNvPr id="1" name=""/>
+        <p:cNvGrpSpPr/>
+        <p:nvPr/>
+      </p:nvGrpSpPr>
+      <p:grpSpPr>
+        <a:xfrm>
+          <a:off x="0" y="0"/>
+          <a:ext cx="0" cy="0"/>
+          <a:chOff x="0" y="0"/>
+          <a:chExt cx="0" cy="0"/>
+        </a:xfrm>
+      </p:grpSpPr>
+      <p:sp>
+        <p:nvSpPr>
+          <p:cNvPr id="2" name="Title 1">
+            <a:extLst>
+              <a:ext uri="{FF2B5EF4-FFF2-40B4-BE49-F238E27FC236}">
+                <a16:creationId xmlns:a16="http://schemas.microsoft.com/office/drawing/2014/main" id="{E857A8A1-5057-57A2-8485-AB04FBDA577E}"/>
+              </a:ext>
+            </a:extLst>
+          </p:cNvPr>
+          <p:cNvSpPr>
+            <a:spLocks noGrp="1"/>
+          </p:cNvSpPr>
+          <p:nvPr>
+            <p:ph type="title"/>
+          </p:nvPr>
+        </p:nvSpPr>
+        <p:spPr/>
+        <p:txBody>
+          <a:bodyPr/>
+          <a:lstStyle/>
+          <a:p>
+            <a:r>
+              <a:rPr lang="en-US" dirty="0"/>
+              <a:t>Hours in Europe vs. U.S. </a:t>
+            </a:r>
+          </a:p>
+        </p:txBody>
+      </p:sp>
+      <p:sp>
+        <p:nvSpPr>
+          <p:cNvPr id="3" name="Content Placeholder 2">
+            <a:extLst>
+              <a:ext uri="{FF2B5EF4-FFF2-40B4-BE49-F238E27FC236}">
+                <a16:creationId xmlns:a16="http://schemas.microsoft.com/office/drawing/2014/main" id="{0797D03A-58B0-90A6-E0D7-15C5745601ED}"/>
+              </a:ext>
+            </a:extLst>
+          </p:cNvPr>
+          <p:cNvSpPr>
+            <a:spLocks noGrp="1"/>
+          </p:cNvSpPr>
+          <p:nvPr>
+            <p:ph sz="half" idx="1"/>
+          </p:nvPr>
+        </p:nvSpPr>
+        <p:spPr>
+          <a:xfrm>
+            <a:off x="304800" y="1624013"/>
+            <a:ext cx="4578448" cy="4525963"/>
+          </a:xfrm>
+        </p:spPr>
+        <p:txBody>
+          <a:bodyPr/>
+          <a:lstStyle/>
+          <a:p>
+            <a:r>
+              <a:rPr lang="en-US" dirty="0"/>
+              <a:t>Employment rates comparable for “prime age” workers</a:t>
+            </a:r>
+          </a:p>
+          <a:p>
+            <a:r>
+              <a:rPr lang="en-US" dirty="0"/>
+              <a:t>Employment rates lower in Europe for young and older workers</a:t>
+            </a:r>
+          </a:p>
+        </p:txBody>
+      </p:sp>
+      <p:pic>
+        <p:nvPicPr>
+          <p:cNvPr id="7" name="Content Placeholder 6" descr="A graph of employment rates&#10;&#10;AI-generated content may be incorrect.">
+            <a:extLst>
+              <a:ext uri="{FF2B5EF4-FFF2-40B4-BE49-F238E27FC236}">
+                <a16:creationId xmlns:a16="http://schemas.microsoft.com/office/drawing/2014/main" id="{1CA992FC-2817-EB33-5BB7-A868234D7728}"/>
+              </a:ext>
+            </a:extLst>
+          </p:cNvPr>
+          <p:cNvPicPr>
+            <a:picLocks noGrp="1" noChangeAspect="1"/>
+          </p:cNvPicPr>
+          <p:nvPr>
+            <p:ph sz="half" idx="2"/>
+          </p:nvPr>
+        </p:nvPicPr>
+        <p:blipFill>
+          <a:blip r:embed="rId2">
+            <a:extLst>
+              <a:ext uri="{28A0092B-C50C-407E-A947-70E740481C1C}">
+                <a14:useLocalDpi xmlns:a14="http://schemas.microsoft.com/office/drawing/2010/main" val="0"/>
+              </a:ext>
+            </a:extLst>
+          </a:blip>
+          <a:stretch>
+            <a:fillRect/>
+          </a:stretch>
+        </p:blipFill>
+        <p:spPr>
+          <a:xfrm>
+            <a:off x="5151311" y="1624013"/>
+            <a:ext cx="6766841" cy="4852987"/>
+          </a:xfrm>
+        </p:spPr>
+      </p:pic>
+      <p:sp>
+        <p:nvSpPr>
+          <p:cNvPr id="5" name="Slide Number Placeholder 4">
+            <a:extLst>
+              <a:ext uri="{FF2B5EF4-FFF2-40B4-BE49-F238E27FC236}">
+                <a16:creationId xmlns:a16="http://schemas.microsoft.com/office/drawing/2014/main" id="{323B1B02-8060-C162-3A63-EBDC30485C91}"/>
+              </a:ext>
+            </a:extLst>
+          </p:cNvPr>
+          <p:cNvSpPr>
+            <a:spLocks noGrp="1"/>
+          </p:cNvSpPr>
+          <p:nvPr>
+            <p:ph type="sldNum" sz="quarter" idx="12"/>
+          </p:nvPr>
+        </p:nvSpPr>
+        <p:spPr/>
+        <p:txBody>
+          <a:bodyPr/>
+          <a:lstStyle/>
+          <a:p>
+            <a:fld id="{85442DEE-2235-41B4-99BD-234203159492}" type="slidenum">
+              <a:rPr lang="en-US" smtClean="0"/>
+              <a:pPr/>
+              <a:t>39</a:t>
+            </a:fld>
+            <a:endParaRPr lang="en-US" dirty="0"/>
+          </a:p>
+        </p:txBody>
+      </p:sp>
+    </p:spTree>
+    <p:extLst>
+      <p:ext uri="{BB962C8B-B14F-4D97-AF65-F5344CB8AC3E}">
+        <p14:creationId xmlns:p14="http://schemas.microsoft.com/office/powerpoint/2010/main" val="2429060117"/>
       </p:ext>
     </p:extLst>
   </p:cSld>
@@ -22955,10 +23384,7 @@
                 </a:pPr>
                 <a14:m>
                   <m:oMathPara xmlns:m="http://schemas.openxmlformats.org/officeDocument/2006/math">
-                    <m:oMathParaPr>
-                      <m:jc m:val="centerGroup"/>
-                    </m:oMathParaPr>
-                    <m:oMath xmlns:m="http://schemas.openxmlformats.org/officeDocument/2006/math">
+                    <m:oMath>
                       <m:r>
                         <a:rPr lang="en-US" b="0" i="1" smtClean="0">
                           <a:latin typeface="Cambria Math"/>
@@ -22969,7 +23395,7 @@
                         <m:dPr>
                           <m:ctrlPr>
                             <a:rPr lang="en-US" b="0" i="1" smtClean="0">
-                              <a:latin typeface="Cambria Math" panose="02040503050406030204" pitchFamily="18" charset="0"/>
+                              <a:latin typeface="Cambria Math"/>
                             </a:rPr>
                           </m:ctrlPr>
                         </m:dPr>
@@ -23225,10 +23651,10 @@
       </p:grpSpPr>
       <p:sp>
         <p:nvSpPr>
-          <p:cNvPr id="2" name="Title 1">
+          <p:cNvPr id="6" name="Title 5">
             <a:extLst>
               <a:ext uri="{FF2B5EF4-FFF2-40B4-BE49-F238E27FC236}">
-                <a16:creationId xmlns:a16="http://schemas.microsoft.com/office/drawing/2014/main" id="{E857A8A1-5057-57A2-8485-AB04FBDA577E}"/>
+                <a16:creationId xmlns:a16="http://schemas.microsoft.com/office/drawing/2014/main" id="{A6F98E55-1268-AC89-1407-2F6985E9B5A5}"/>
               </a:ext>
             </a:extLst>
           </p:cNvPr>
@@ -23245,18 +23671,22 @@
           <a:lstStyle/>
           <a:p>
             <a:r>
+              <a:rPr lang="en-US" dirty="0" err="1"/>
+              <a:t>iClicker</a:t>
+            </a:r>
+            <a:r>
               <a:rPr lang="en-US" dirty="0"/>
-              <a:t>Hours in Europe vs. U.S. </a:t>
+              <a:t> Poll</a:t>
             </a:r>
           </a:p>
         </p:txBody>
       </p:sp>
       <p:sp>
         <p:nvSpPr>
-          <p:cNvPr id="3" name="Content Placeholder 2">
+          <p:cNvPr id="7" name="Content Placeholder 6">
             <a:extLst>
               <a:ext uri="{FF2B5EF4-FFF2-40B4-BE49-F238E27FC236}">
-                <a16:creationId xmlns:a16="http://schemas.microsoft.com/office/drawing/2014/main" id="{0797D03A-58B0-90A6-E0D7-15C5745601ED}"/>
+                <a16:creationId xmlns:a16="http://schemas.microsoft.com/office/drawing/2014/main" id="{AB999412-09A3-F97D-127F-0D9BA26A156B}"/>
               </a:ext>
             </a:extLst>
           </p:cNvPr>
@@ -23264,73 +23694,84 @@
             <a:spLocks noGrp="1"/>
           </p:cNvSpPr>
           <p:nvPr>
-            <p:ph sz="half" idx="1"/>
+            <p:ph idx="1"/>
           </p:nvPr>
         </p:nvSpPr>
-        <p:spPr>
-          <a:xfrm>
-            <a:off x="304800" y="1624013"/>
-            <a:ext cx="4578448" cy="4525963"/>
-          </a:xfrm>
-        </p:spPr>
+        <p:spPr/>
         <p:txBody>
           <a:bodyPr/>
           <a:lstStyle/>
           <a:p>
             <a:r>
               <a:rPr lang="en-US" dirty="0"/>
-              <a:t>Employment rates comparable for “prime age” workers</a:t>
-            </a:r>
-          </a:p>
-          <a:p>
-            <a:r>
+              <a:t>Why do the French work so much less? </a:t>
+            </a:r>
+            <a:br>
               <a:rPr lang="en-US" dirty="0"/>
-              <a:t>Employment rates lower in Europe for young and older workers</a:t>
+            </a:br>
+            <a:r>
+              <a:rPr lang="en-US" dirty="0"/>
+              <a:t>(Pick answer you think is most important)</a:t>
+            </a:r>
+          </a:p>
+          <a:p>
+            <a:pPr marL="514350" indent="-514350">
+              <a:buFont typeface="+mj-lt"/>
+              <a:buAutoNum type="alphaLcParenR"/>
+            </a:pPr>
+            <a:r>
+              <a:rPr lang="en-US" dirty="0"/>
+              <a:t>Different preferences and culture</a:t>
+            </a:r>
+          </a:p>
+          <a:p>
+            <a:pPr marL="514350" indent="-514350">
+              <a:buFont typeface="+mj-lt"/>
+              <a:buAutoNum type="alphaLcParenR"/>
+            </a:pPr>
+            <a:r>
+              <a:rPr lang="en-US" dirty="0"/>
+              <a:t>More generous social safety net (UI, health insurance, etc.)</a:t>
+            </a:r>
+          </a:p>
+          <a:p>
+            <a:pPr marL="514350" indent="-514350">
+              <a:buFont typeface="+mj-lt"/>
+              <a:buAutoNum type="alphaLcParenR"/>
+            </a:pPr>
+            <a:r>
+              <a:rPr lang="en-US" dirty="0"/>
+              <a:t>Higher minimum wage / labor market regulations</a:t>
+            </a:r>
+          </a:p>
+          <a:p>
+            <a:pPr marL="514350" indent="-514350">
+              <a:buFont typeface="+mj-lt"/>
+              <a:buAutoNum type="alphaLcParenR"/>
+            </a:pPr>
+            <a:r>
+              <a:rPr lang="en-US" dirty="0"/>
+              <a:t>Unions</a:t>
+            </a:r>
+          </a:p>
+          <a:p>
+            <a:pPr marL="514350" indent="-514350">
+              <a:buFont typeface="+mj-lt"/>
+              <a:buAutoNum type="alphaLcParenR"/>
+            </a:pPr>
+            <a:r>
+              <a:rPr lang="en-US" dirty="0"/>
+              <a:t>Higher taxes</a:t>
             </a:r>
           </a:p>
         </p:txBody>
       </p:sp>
-      <p:pic>
-        <p:nvPicPr>
-          <p:cNvPr id="7" name="Content Placeholder 6" descr="A graph of employment rates&#10;&#10;AI-generated content may be incorrect.">
-            <a:extLst>
-              <a:ext uri="{FF2B5EF4-FFF2-40B4-BE49-F238E27FC236}">
-                <a16:creationId xmlns:a16="http://schemas.microsoft.com/office/drawing/2014/main" id="{1CA992FC-2817-EB33-5BB7-A868234D7728}"/>
-              </a:ext>
-            </a:extLst>
-          </p:cNvPr>
-          <p:cNvPicPr>
-            <a:picLocks noGrp="1" noChangeAspect="1"/>
-          </p:cNvPicPr>
-          <p:nvPr>
-            <p:ph sz="half" idx="2"/>
-          </p:nvPr>
-        </p:nvPicPr>
-        <p:blipFill>
-          <a:blip r:embed="rId2">
-            <a:extLst>
-              <a:ext uri="{28A0092B-C50C-407E-A947-70E740481C1C}">
-                <a14:useLocalDpi xmlns:a14="http://schemas.microsoft.com/office/drawing/2010/main" val="0"/>
-              </a:ext>
-            </a:extLst>
-          </a:blip>
-          <a:stretch>
-            <a:fillRect/>
-          </a:stretch>
-        </p:blipFill>
-        <p:spPr>
-          <a:xfrm>
-            <a:off x="5151311" y="1624013"/>
-            <a:ext cx="6766841" cy="4852987"/>
-          </a:xfrm>
-        </p:spPr>
-      </p:pic>
       <p:sp>
         <p:nvSpPr>
           <p:cNvPr id="5" name="Slide Number Placeholder 4">
             <a:extLst>
               <a:ext uri="{FF2B5EF4-FFF2-40B4-BE49-F238E27FC236}">
-                <a16:creationId xmlns:a16="http://schemas.microsoft.com/office/drawing/2014/main" id="{323B1B02-8060-C162-3A63-EBDC30485C91}"/>
+                <a16:creationId xmlns:a16="http://schemas.microsoft.com/office/drawing/2014/main" id="{6EA9E2F2-232F-3690-116E-46B0B4CABCED}"/>
               </a:ext>
             </a:extLst>
           </p:cNvPr>
@@ -23358,7 +23799,7 @@
     </p:spTree>
     <p:extLst>
       <p:ext uri="{BB962C8B-B14F-4D97-AF65-F5344CB8AC3E}">
-        <p14:creationId xmlns:p14="http://schemas.microsoft.com/office/powerpoint/2010/main" val="2429060117"/>
+        <p14:creationId xmlns:p14="http://schemas.microsoft.com/office/powerpoint/2010/main" val="1076194347"/>
       </p:ext>
     </p:extLst>
   </p:cSld>
@@ -24126,7 +24567,8 @@
                       <m:sSubPr>
                         <m:ctrlPr>
                           <a:rPr lang="en-US" i="1" smtClean="0">
-                            <a:latin typeface="Cambria Math" panose="02040503050406030204" pitchFamily="18" charset="0"/>
+                            <a:latin typeface="Cambria Math"/>
+                            <a:ea typeface="Cambria Math"/>
                           </a:rPr>
                         </m:ctrlPr>
                       </m:sSubPr>
@@ -24164,7 +24606,8 @@
                       <m:sSubPr>
                         <m:ctrlPr>
                           <a:rPr lang="en-US" i="1" smtClean="0">
-                            <a:latin typeface="Cambria Math" panose="02040503050406030204" pitchFamily="18" charset="0"/>
+                            <a:latin typeface="Cambria Math"/>
+                            <a:ea typeface="Cambria Math"/>
                           </a:rPr>
                         </m:ctrlPr>
                       </m:sSubPr>
@@ -24207,7 +24650,7 @@
                       <m:dPr>
                         <m:ctrlPr>
                           <a:rPr lang="en-US" b="0" i="1" smtClean="0">
-                            <a:latin typeface="Cambria Math" panose="02040503050406030204" pitchFamily="18" charset="0"/>
+                            <a:latin typeface="Cambria Math"/>
                           </a:rPr>
                         </m:ctrlPr>
                       </m:dPr>
@@ -24236,7 +24679,7 @@
                       <m:dPr>
                         <m:ctrlPr>
                           <a:rPr lang="en-US" b="0" i="1" smtClean="0">
-                            <a:latin typeface="Cambria Math" panose="02040503050406030204" pitchFamily="18" charset="0"/>
+                            <a:latin typeface="Cambria Math"/>
                           </a:rPr>
                         </m:ctrlPr>
                       </m:dPr>
@@ -24263,8 +24706,8 @@
                     <m:d>
                       <m:dPr>
                         <m:ctrlPr>
-                          <a:rPr lang="en-US" i="1" smtClean="0">
-                            <a:latin typeface="Cambria Math" panose="02040503050406030204" pitchFamily="18" charset="0"/>
+                          <a:rPr lang="en-US" b="0" i="1" smtClean="0">
+                            <a:latin typeface="Cambria Math"/>
                           </a:rPr>
                         </m:ctrlPr>
                       </m:dPr>
@@ -24279,7 +24722,8 @@
                           <m:sSubPr>
                             <m:ctrlPr>
                               <a:rPr lang="en-US" b="0" i="1" smtClean="0">
-                                <a:latin typeface="Cambria Math" panose="02040503050406030204" pitchFamily="18" charset="0"/>
+                                <a:latin typeface="Cambria Math"/>
+                                <a:ea typeface="Cambria Math"/>
                               </a:rPr>
                             </m:ctrlPr>
                           </m:sSubPr>
@@ -24319,7 +24763,7 @@
                       <m:dPr>
                         <m:ctrlPr>
                           <a:rPr lang="en-US" b="0" i="1" smtClean="0">
-                            <a:latin typeface="Cambria Math" panose="02040503050406030204" pitchFamily="18" charset="0"/>
+                            <a:latin typeface="Cambria Math"/>
                           </a:rPr>
                         </m:ctrlPr>
                       </m:dPr>
@@ -24334,7 +24778,8 @@
                           <m:sSubPr>
                             <m:ctrlPr>
                               <a:rPr lang="en-US" b="0" i="1" smtClean="0">
-                                <a:latin typeface="Cambria Math" panose="02040503050406030204" pitchFamily="18" charset="0"/>
+                                <a:latin typeface="Cambria Math"/>
+                                <a:ea typeface="Cambria Math"/>
                               </a:rPr>
                             </m:ctrlPr>
                           </m:sSubPr>
@@ -24392,14 +24837,11 @@
                 </a:pPr>
                 <a14:m>
                   <m:oMathPara xmlns:m="http://schemas.openxmlformats.org/officeDocument/2006/math">
-                    <m:oMathParaPr>
-                      <m:jc m:val="centerGroup"/>
-                    </m:oMathParaPr>
-                    <m:oMath xmlns:m="http://schemas.openxmlformats.org/officeDocument/2006/math">
+                    <m:oMath>
                       <m:f>
                         <m:fPr>
                           <m:ctrlPr>
-                            <a:rPr lang="en-US" i="1" smtClean="0">
+                            <a:rPr lang="en-US" b="0" i="1" smtClean="0">
                               <a:latin typeface="Cambria Math" panose="02040503050406030204" pitchFamily="18" charset="0"/>
                             </a:rPr>
                           </m:ctrlPr>
@@ -24408,8 +24850,8 @@
                           <m:sSup>
                             <m:sSupPr>
                               <m:ctrlPr>
-                                <a:rPr lang="en-US" i="1" smtClean="0">
-                                  <a:latin typeface="Cambria Math" panose="02040503050406030204" pitchFamily="18" charset="0"/>
+                                <a:rPr lang="en-US" b="0" i="1" smtClean="0">
+                                  <a:latin typeface="Cambria Math"/>
                                 </a:rPr>
                               </m:ctrlPr>
                             </m:sSupPr>
@@ -24433,8 +24875,8 @@
                           <m:d>
                             <m:dPr>
                               <m:ctrlPr>
-                                <a:rPr lang="en-US" i="1" smtClean="0">
-                                  <a:latin typeface="Cambria Math" panose="02040503050406030204" pitchFamily="18" charset="0"/>
+                                <a:rPr lang="en-US" b="0" i="1" smtClean="0">
+                                  <a:latin typeface="Cambria Math"/>
                                 </a:rPr>
                               </m:ctrlPr>
                             </m:dPr>
@@ -24452,8 +24894,8 @@
                           <m:sSup>
                             <m:sSupPr>
                               <m:ctrlPr>
-                                <a:rPr lang="en-US" i="1" smtClean="0">
-                                  <a:latin typeface="Cambria Math" panose="02040503050406030204" pitchFamily="18" charset="0"/>
+                                <a:rPr lang="en-US" b="0" i="1" smtClean="0">
+                                  <a:latin typeface="Cambria Math"/>
                                 </a:rPr>
                               </m:ctrlPr>
                             </m:sSupPr>
@@ -24477,8 +24919,8 @@
                           <m:d>
                             <m:dPr>
                               <m:ctrlPr>
-                                <a:rPr lang="en-US" i="1" smtClean="0">
-                                  <a:latin typeface="Cambria Math" panose="02040503050406030204" pitchFamily="18" charset="0"/>
+                                <a:rPr lang="en-US" b="0" i="1" smtClean="0">
+                                  <a:latin typeface="Cambria Math"/>
                                 </a:rPr>
                               </m:ctrlPr>
                             </m:dPr>
@@ -24509,7 +24951,7 @@
                         <m:fPr>
                           <m:ctrlPr>
                             <a:rPr lang="en-US" b="0" i="1" smtClean="0">
-                              <a:latin typeface="Cambria Math" panose="02040503050406030204" pitchFamily="18" charset="0"/>
+                              <a:latin typeface="Cambria Math"/>
                             </a:rPr>
                           </m:ctrlPr>
                         </m:fPr>
@@ -24524,7 +24966,8 @@
                             <m:sSubPr>
                               <m:ctrlPr>
                                 <a:rPr lang="en-US" b="0" i="1" smtClean="0">
-                                  <a:latin typeface="Cambria Math" panose="02040503050406030204" pitchFamily="18" charset="0"/>
+                                  <a:latin typeface="Cambria Math"/>
+                                  <a:ea typeface="Cambria Math"/>
                                 </a:rPr>
                               </m:ctrlPr>
                             </m:sSubPr>
@@ -24558,7 +25001,8 @@
                             <m:sSubPr>
                               <m:ctrlPr>
                                 <a:rPr lang="en-US" b="0" i="1" smtClean="0">
-                                  <a:latin typeface="Cambria Math" panose="02040503050406030204" pitchFamily="18" charset="0"/>
+                                  <a:latin typeface="Cambria Math"/>
+                                  <a:ea typeface="Cambria Math"/>
                                 </a:rPr>
                               </m:ctrlPr>
                             </m:sSubPr>
@@ -24946,14 +25390,11 @@
                 </a:pPr>
                 <a14:m>
                   <m:oMathPara xmlns:m="http://schemas.openxmlformats.org/officeDocument/2006/math">
-                    <m:oMathParaPr>
-                      <m:jc m:val="centerGroup"/>
-                    </m:oMathParaPr>
-                    <m:oMath xmlns:m="http://schemas.openxmlformats.org/officeDocument/2006/math">
+                    <m:oMath>
                       <m:f>
                         <m:fPr>
                           <m:ctrlPr>
-                            <a:rPr lang="en-US" i="1" smtClean="0">
+                            <a:rPr lang="en-US" i="1">
                               <a:latin typeface="Cambria Math" panose="02040503050406030204" pitchFamily="18" charset="0"/>
                             </a:rPr>
                           </m:ctrlPr>
@@ -24963,7 +25404,7 @@
                             <m:sSupPr>
                               <m:ctrlPr>
                                 <a:rPr lang="en-US" i="1">
-                                  <a:latin typeface="Cambria Math" panose="02040503050406030204" pitchFamily="18" charset="0"/>
+                                  <a:latin typeface="Cambria Math"/>
                                 </a:rPr>
                               </m:ctrlPr>
                             </m:sSupPr>
@@ -24988,7 +25429,7 @@
                             <m:dPr>
                               <m:ctrlPr>
                                 <a:rPr lang="en-US" i="1">
-                                  <a:latin typeface="Cambria Math" panose="02040503050406030204" pitchFamily="18" charset="0"/>
+                                  <a:latin typeface="Cambria Math"/>
                                 </a:rPr>
                               </m:ctrlPr>
                             </m:dPr>
@@ -25007,7 +25448,7 @@
                             <m:sSupPr>
                               <m:ctrlPr>
                                 <a:rPr lang="en-US" i="1">
-                                  <a:latin typeface="Cambria Math" panose="02040503050406030204" pitchFamily="18" charset="0"/>
+                                  <a:latin typeface="Cambria Math"/>
                                 </a:rPr>
                               </m:ctrlPr>
                             </m:sSupPr>
@@ -25032,7 +25473,7 @@
                             <m:dPr>
                               <m:ctrlPr>
                                 <a:rPr lang="en-US" i="1">
-                                  <a:latin typeface="Cambria Math" panose="02040503050406030204" pitchFamily="18" charset="0"/>
+                                  <a:latin typeface="Cambria Math"/>
                                 </a:rPr>
                               </m:ctrlPr>
                             </m:dPr>
@@ -25063,7 +25504,7 @@
                         <m:fPr>
                           <m:ctrlPr>
                             <a:rPr lang="en-US" i="1">
-                              <a:latin typeface="Cambria Math" panose="02040503050406030204" pitchFamily="18" charset="0"/>
+                              <a:latin typeface="Cambria Math"/>
                             </a:rPr>
                           </m:ctrlPr>
                         </m:fPr>
@@ -25078,7 +25519,8 @@
                             <m:sSubPr>
                               <m:ctrlPr>
                                 <a:rPr lang="en-US" i="1">
-                                  <a:latin typeface="Cambria Math" panose="02040503050406030204" pitchFamily="18" charset="0"/>
+                                  <a:latin typeface="Cambria Math"/>
+                                  <a:ea typeface="Cambria Math"/>
                                 </a:rPr>
                               </m:ctrlPr>
                             </m:sSubPr>
@@ -25112,7 +25554,8 @@
                             <m:sSubPr>
                               <m:ctrlPr>
                                 <a:rPr lang="en-US" i="1">
-                                  <a:latin typeface="Cambria Math" panose="02040503050406030204" pitchFamily="18" charset="0"/>
+                                  <a:latin typeface="Cambria Math"/>
+                                  <a:ea typeface="Cambria Math"/>
                                 </a:rPr>
                               </m:ctrlPr>
                             </m:sSubPr>
@@ -25158,7 +25601,7 @@
                       <m:fPr>
                         <m:ctrlPr>
                           <a:rPr lang="en-US" i="1">
-                            <a:latin typeface="Cambria Math" panose="02040503050406030204" pitchFamily="18" charset="0"/>
+                            <a:latin typeface="Cambria Math"/>
                           </a:rPr>
                         </m:ctrlPr>
                       </m:fPr>
@@ -25173,7 +25616,8 @@
                           <m:sSubPr>
                             <m:ctrlPr>
                               <a:rPr lang="en-US" i="1">
-                                <a:latin typeface="Cambria Math" panose="02040503050406030204" pitchFamily="18" charset="0"/>
+                                <a:latin typeface="Cambria Math"/>
+                                <a:ea typeface="Cambria Math"/>
                               </a:rPr>
                             </m:ctrlPr>
                           </m:sSubPr>
@@ -25207,7 +25651,8 @@
                           <m:sSubPr>
                             <m:ctrlPr>
                               <a:rPr lang="en-US" i="1">
-                                <a:latin typeface="Cambria Math" panose="02040503050406030204" pitchFamily="18" charset="0"/>
+                                <a:latin typeface="Cambria Math"/>
+                                <a:ea typeface="Cambria Math"/>
                               </a:rPr>
                             </m:ctrlPr>
                           </m:sSubPr>
@@ -25263,8 +25708,8 @@
                     <m:d>
                       <m:dPr>
                         <m:ctrlPr>
-                          <a:rPr lang="en-US" b="0" i="1" smtClean="0">
-                            <a:latin typeface="Cambria Math" panose="02040503050406030204" pitchFamily="18" charset="0"/>
+                          <a:rPr lang="en-US" i="1">
+                            <a:latin typeface="Cambria Math"/>
                           </a:rPr>
                         </m:ctrlPr>
                       </m:dPr>
@@ -25279,7 +25724,8 @@
                           <m:sSubPr>
                             <m:ctrlPr>
                               <a:rPr lang="en-US" i="1">
-                                <a:latin typeface="Cambria Math" panose="02040503050406030204" pitchFamily="18" charset="0"/>
+                                <a:latin typeface="Cambria Math"/>
+                                <a:ea typeface="Cambria Math"/>
                               </a:rPr>
                             </m:ctrlPr>
                           </m:sSubPr>
@@ -25326,8 +25772,8 @@
                     <m:d>
                       <m:dPr>
                         <m:ctrlPr>
-                          <a:rPr lang="en-US" i="1" smtClean="0">
-                            <a:latin typeface="Cambria Math" panose="02040503050406030204" pitchFamily="18" charset="0"/>
+                          <a:rPr lang="en-US" i="1">
+                            <a:latin typeface="Cambria Math"/>
                           </a:rPr>
                         </m:ctrlPr>
                       </m:dPr>
@@ -25342,7 +25788,8 @@
                           <m:sSubPr>
                             <m:ctrlPr>
                               <a:rPr lang="en-US" i="1">
-                                <a:latin typeface="Cambria Math" panose="02040503050406030204" pitchFamily="18" charset="0"/>
+                                <a:latin typeface="Cambria Math"/>
+                                <a:ea typeface="Cambria Math"/>
                               </a:rPr>
                             </m:ctrlPr>
                           </m:sSubPr>
@@ -25383,7 +25830,7 @@
                       <m:fPr>
                         <m:ctrlPr>
                           <a:rPr lang="en-US" i="1">
-                            <a:latin typeface="Cambria Math" panose="02040503050406030204" pitchFamily="18" charset="0"/>
+                            <a:latin typeface="Cambria Math"/>
                           </a:rPr>
                         </m:ctrlPr>
                       </m:fPr>
@@ -25398,7 +25845,8 @@
                           <m:sSubPr>
                             <m:ctrlPr>
                               <a:rPr lang="en-US" i="1">
-                                <a:latin typeface="Cambria Math" panose="02040503050406030204" pitchFamily="18" charset="0"/>
+                                <a:latin typeface="Cambria Math"/>
+                                <a:ea typeface="Cambria Math"/>
                               </a:rPr>
                             </m:ctrlPr>
                           </m:sSubPr>
@@ -25432,7 +25880,8 @@
                           <m:sSubPr>
                             <m:ctrlPr>
                               <a:rPr lang="en-US" i="1">
-                                <a:latin typeface="Cambria Math" panose="02040503050406030204" pitchFamily="18" charset="0"/>
+                                <a:latin typeface="Cambria Math"/>
+                                <a:ea typeface="Cambria Math"/>
                               </a:rPr>
                             </m:ctrlPr>
                           </m:sSubPr>
@@ -25775,10 +26224,7 @@
                 </a:pPr>
                 <a14:m>
                   <m:oMathPara xmlns:m="http://schemas.openxmlformats.org/officeDocument/2006/math">
-                    <m:oMathParaPr>
-                      <m:jc m:val="centerGroup"/>
-                    </m:oMathParaPr>
-                    <m:oMath xmlns:m="http://schemas.openxmlformats.org/officeDocument/2006/math">
+                    <m:oMath>
                       <m:f>
                         <m:fPr>
                           <m:ctrlPr>
@@ -25792,7 +26238,7 @@
                             <m:sSupPr>
                               <m:ctrlPr>
                                 <a:rPr lang="en-US" i="1">
-                                  <a:latin typeface="Cambria Math" panose="02040503050406030204" pitchFamily="18" charset="0"/>
+                                  <a:latin typeface="Cambria Math"/>
                                 </a:rPr>
                               </m:ctrlPr>
                             </m:sSupPr>
@@ -25817,7 +26263,7 @@
                             <m:dPr>
                               <m:ctrlPr>
                                 <a:rPr lang="en-US" i="1">
-                                  <a:latin typeface="Cambria Math" panose="02040503050406030204" pitchFamily="18" charset="0"/>
+                                  <a:latin typeface="Cambria Math"/>
                                 </a:rPr>
                               </m:ctrlPr>
                             </m:dPr>
@@ -25836,7 +26282,7 @@
                             <m:sSupPr>
                               <m:ctrlPr>
                                 <a:rPr lang="en-US" i="1">
-                                  <a:latin typeface="Cambria Math" panose="02040503050406030204" pitchFamily="18" charset="0"/>
+                                  <a:latin typeface="Cambria Math"/>
                                 </a:rPr>
                               </m:ctrlPr>
                             </m:sSupPr>
@@ -25861,7 +26307,7 @@
                             <m:dPr>
                               <m:ctrlPr>
                                 <a:rPr lang="en-US" i="1">
-                                  <a:latin typeface="Cambria Math" panose="02040503050406030204" pitchFamily="18" charset="0"/>
+                                  <a:latin typeface="Cambria Math"/>
                                 </a:rPr>
                               </m:ctrlPr>
                             </m:dPr>
@@ -25892,7 +26338,7 @@
                         <m:fPr>
                           <m:ctrlPr>
                             <a:rPr lang="en-US" i="1">
-                              <a:latin typeface="Cambria Math" panose="02040503050406030204" pitchFamily="18" charset="0"/>
+                              <a:latin typeface="Cambria Math"/>
                             </a:rPr>
                           </m:ctrlPr>
                         </m:fPr>
@@ -25907,7 +26353,8 @@
                             <m:sSubPr>
                               <m:ctrlPr>
                                 <a:rPr lang="en-US" i="1">
-                                  <a:latin typeface="Cambria Math" panose="02040503050406030204" pitchFamily="18" charset="0"/>
+                                  <a:latin typeface="Cambria Math"/>
+                                  <a:ea typeface="Cambria Math"/>
                                 </a:rPr>
                               </m:ctrlPr>
                             </m:sSubPr>
@@ -25941,7 +26388,8 @@
                             <m:sSubPr>
                               <m:ctrlPr>
                                 <a:rPr lang="en-US" i="1">
-                                  <a:latin typeface="Cambria Math" panose="02040503050406030204" pitchFamily="18" charset="0"/>
+                                  <a:latin typeface="Cambria Math"/>
+                                  <a:ea typeface="Cambria Math"/>
                                 </a:rPr>
                               </m:ctrlPr>
                             </m:sSubPr>
@@ -25982,14 +26430,11 @@
                 </a:pPr>
                 <a14:m>
                   <m:oMathPara xmlns:m="http://schemas.openxmlformats.org/officeDocument/2006/math">
-                    <m:oMathParaPr>
-                      <m:jc m:val="centerGroup"/>
-                    </m:oMathParaPr>
-                    <m:oMath xmlns:m="http://schemas.openxmlformats.org/officeDocument/2006/math">
+                    <m:oMath>
                       <m:d>
                         <m:dPr>
                           <m:ctrlPr>
-                            <a:rPr lang="en-US" i="1" smtClean="0">
+                            <a:rPr lang="en-US" b="0" i="1" smtClean="0">
                               <a:latin typeface="Cambria Math" panose="02040503050406030204" pitchFamily="18" charset="0"/>
                             </a:rPr>
                           </m:ctrlPr>
@@ -26036,6 +26481,7 @@
                               <m:ctrlPr>
                                 <a:rPr lang="en-US" b="0" i="1" smtClean="0">
                                   <a:latin typeface="Cambria Math" panose="02040503050406030204" pitchFamily="18" charset="0"/>
+                                  <a:ea typeface="Cambria Math" panose="02040503050406030204" pitchFamily="18" charset="0"/>
                                 </a:rPr>
                               </m:ctrlPr>
                             </m:fPr>
@@ -26045,6 +26491,7 @@
                                   <m:ctrlPr>
                                     <a:rPr lang="en-US" b="0" i="1" smtClean="0">
                                       <a:latin typeface="Cambria Math" panose="02040503050406030204" pitchFamily="18" charset="0"/>
+                                      <a:ea typeface="Cambria Math" panose="02040503050406030204" pitchFamily="18" charset="0"/>
                                     </a:rPr>
                                   </m:ctrlPr>
                                 </m:sSubPr>
@@ -26077,6 +26524,7 @@
                                   <m:ctrlPr>
                                     <a:rPr lang="en-US" b="0" i="1" smtClean="0">
                                       <a:latin typeface="Cambria Math" panose="02040503050406030204" pitchFamily="18" charset="0"/>
+                                      <a:ea typeface="Cambria Math" panose="02040503050406030204" pitchFamily="18" charset="0"/>
                                     </a:rPr>
                                   </m:ctrlPr>
                                 </m:sSubPr>
@@ -26111,6 +26559,7 @@
                                   <m:ctrlPr>
                                     <a:rPr lang="en-US" b="0" i="1" smtClean="0">
                                       <a:latin typeface="Cambria Math" panose="02040503050406030204" pitchFamily="18" charset="0"/>
+                                      <a:ea typeface="Cambria Math" panose="02040503050406030204" pitchFamily="18" charset="0"/>
                                     </a:rPr>
                                   </m:ctrlPr>
                                 </m:sSubPr>
@@ -26146,7 +26595,7 @@
                         <m:fPr>
                           <m:ctrlPr>
                             <a:rPr lang="en-US" i="1">
-                              <a:latin typeface="Cambria Math" panose="02040503050406030204" pitchFamily="18" charset="0"/>
+                              <a:latin typeface="Cambria Math"/>
                             </a:rPr>
                           </m:ctrlPr>
                         </m:fPr>
@@ -26161,7 +26610,8 @@
                             <m:sSubPr>
                               <m:ctrlPr>
                                 <a:rPr lang="en-US" i="1">
-                                  <a:latin typeface="Cambria Math" panose="02040503050406030204" pitchFamily="18" charset="0"/>
+                                  <a:latin typeface="Cambria Math"/>
+                                  <a:ea typeface="Cambria Math"/>
                                 </a:rPr>
                               </m:ctrlPr>
                             </m:sSubPr>
@@ -26195,7 +26645,8 @@
                             <m:sSubPr>
                               <m:ctrlPr>
                                 <a:rPr lang="en-US" i="1">
-                                  <a:latin typeface="Cambria Math" panose="02040503050406030204" pitchFamily="18" charset="0"/>
+                                  <a:latin typeface="Cambria Math"/>
+                                  <a:ea typeface="Cambria Math"/>
                                 </a:rPr>
                               </m:ctrlPr>
                             </m:sSubPr>
@@ -26236,10 +26687,7 @@
                 </a:pPr>
                 <a14:m>
                   <m:oMathPara xmlns:m="http://schemas.openxmlformats.org/officeDocument/2006/math">
-                    <m:oMathParaPr>
-                      <m:jc m:val="centerGroup"/>
-                    </m:oMathParaPr>
-                    <m:oMath xmlns:m="http://schemas.openxmlformats.org/officeDocument/2006/math">
+                    <m:oMath>
                       <m:f>
                         <m:fPr>
                           <m:ctrlPr>
@@ -26253,7 +26701,7 @@
                             <m:sSupPr>
                               <m:ctrlPr>
                                 <a:rPr lang="en-US" i="1">
-                                  <a:latin typeface="Cambria Math" panose="02040503050406030204" pitchFamily="18" charset="0"/>
+                                  <a:latin typeface="Cambria Math"/>
                                 </a:rPr>
                               </m:ctrlPr>
                             </m:sSupPr>
@@ -26278,7 +26726,7 @@
                             <m:dPr>
                               <m:ctrlPr>
                                 <a:rPr lang="en-US" i="1">
-                                  <a:latin typeface="Cambria Math" panose="02040503050406030204" pitchFamily="18" charset="0"/>
+                                  <a:latin typeface="Cambria Math"/>
                                 </a:rPr>
                               </m:ctrlPr>
                             </m:dPr>
@@ -26297,7 +26745,7 @@
                             <m:sSupPr>
                               <m:ctrlPr>
                                 <a:rPr lang="en-US" i="1">
-                                  <a:latin typeface="Cambria Math" panose="02040503050406030204" pitchFamily="18" charset="0"/>
+                                  <a:latin typeface="Cambria Math"/>
                                 </a:rPr>
                               </m:ctrlPr>
                             </m:sSupPr>
@@ -26322,7 +26770,7 @@
                             <m:dPr>
                               <m:ctrlPr>
                                 <a:rPr lang="en-US" i="1">
-                                  <a:latin typeface="Cambria Math" panose="02040503050406030204" pitchFamily="18" charset="0"/>
+                                  <a:latin typeface="Cambria Math"/>
                                 </a:rPr>
                               </m:ctrlPr>
                             </m:dPr>
@@ -26724,10 +27172,7 @@
                 </a:pPr>
                 <a14:m>
                   <m:oMathPara xmlns:m="http://schemas.openxmlformats.org/officeDocument/2006/math">
-                    <m:oMathParaPr>
-                      <m:jc m:val="centerGroup"/>
-                    </m:oMathParaPr>
-                    <m:oMath xmlns:m="http://schemas.openxmlformats.org/officeDocument/2006/math">
+                    <m:oMath>
                       <m:f>
                         <m:fPr>
                           <m:ctrlPr>
@@ -26741,7 +27186,7 @@
                             <m:sSupPr>
                               <m:ctrlPr>
                                 <a:rPr lang="en-US" i="1">
-                                  <a:latin typeface="Cambria Math" panose="02040503050406030204" pitchFamily="18" charset="0"/>
+                                  <a:latin typeface="Cambria Math"/>
                                 </a:rPr>
                               </m:ctrlPr>
                             </m:sSupPr>
@@ -26766,7 +27211,7 @@
                             <m:dPr>
                               <m:ctrlPr>
                                 <a:rPr lang="en-US" i="1">
-                                  <a:latin typeface="Cambria Math" panose="02040503050406030204" pitchFamily="18" charset="0"/>
+                                  <a:latin typeface="Cambria Math"/>
                                 </a:rPr>
                               </m:ctrlPr>
                             </m:dPr>
@@ -26785,7 +27230,7 @@
                             <m:sSupPr>
                               <m:ctrlPr>
                                 <a:rPr lang="en-US" i="1">
-                                  <a:latin typeface="Cambria Math" panose="02040503050406030204" pitchFamily="18" charset="0"/>
+                                  <a:latin typeface="Cambria Math"/>
                                 </a:rPr>
                               </m:ctrlPr>
                             </m:sSupPr>
@@ -26810,7 +27255,7 @@
                             <m:dPr>
                               <m:ctrlPr>
                                 <a:rPr lang="en-US" i="1">
-                                  <a:latin typeface="Cambria Math" panose="02040503050406030204" pitchFamily="18" charset="0"/>
+                                  <a:latin typeface="Cambria Math"/>
                                 </a:rPr>
                               </m:ctrlPr>
                             </m:dPr>
@@ -27586,7 +28031,11 @@
             </a:r>
             <a:r>
               <a:rPr lang="en-US" dirty="0"/>
-              <a:t>“lump-sum” transfers”</a:t>
+              <a:t>“lump-sum</a:t>
+            </a:r>
+            <a:r>
+              <a:rPr lang="en-US"/>
+              <a:t>” transfers</a:t>
             </a:r>
             <a:endParaRPr lang="is-IS" dirty="0"/>
           </a:p>
@@ -27941,10 +28390,7 @@
                 </a:pPr>
                 <a14:m>
                   <m:oMathPara xmlns:m="http://schemas.openxmlformats.org/officeDocument/2006/math">
-                    <m:oMathParaPr>
-                      <m:jc m:val="centerGroup"/>
-                    </m:oMathParaPr>
-                    <m:oMath xmlns:m="http://schemas.openxmlformats.org/officeDocument/2006/math">
+                    <m:oMath>
                       <m:r>
                         <a:rPr lang="en-US" i="1">
                           <a:latin typeface="Cambria Math"/>
@@ -27955,7 +28401,7 @@
                         <m:dPr>
                           <m:ctrlPr>
                             <a:rPr lang="en-US" i="1">
-                              <a:latin typeface="Cambria Math" panose="02040503050406030204" pitchFamily="18" charset="0"/>
+                              <a:latin typeface="Cambria Math"/>
                             </a:rPr>
                           </m:ctrlPr>
                         </m:dPr>
@@ -27984,7 +28430,7 @@
                         <m:dPr>
                           <m:ctrlPr>
                             <a:rPr lang="en-US" i="1">
-                              <a:latin typeface="Cambria Math" panose="02040503050406030204" pitchFamily="18" charset="0"/>
+                              <a:latin typeface="Cambria Math"/>
                             </a:rPr>
                           </m:ctrlPr>
                         </m:dPr>
@@ -28016,7 +28462,7 @@
                       <m:dPr>
                         <m:ctrlPr>
                           <a:rPr lang="en-US" i="1">
-                            <a:latin typeface="Cambria Math" panose="02040503050406030204" pitchFamily="18" charset="0"/>
+                            <a:latin typeface="Cambria Math"/>
                           </a:rPr>
                         </m:ctrlPr>
                       </m:dPr>
@@ -28050,7 +28496,7 @@
                       <m:dPr>
                         <m:ctrlPr>
                           <a:rPr lang="en-US" i="1">
-                            <a:latin typeface="Cambria Math" panose="02040503050406030204" pitchFamily="18" charset="0"/>
+                            <a:latin typeface="Cambria Math"/>
                           </a:rPr>
                         </m:ctrlPr>
                       </m:dPr>
@@ -28836,10 +29282,7 @@
                 </a:pPr>
                 <a14:m>
                   <m:oMathPara xmlns:m="http://schemas.openxmlformats.org/officeDocument/2006/math">
-                    <m:oMathParaPr>
-                      <m:jc m:val="centerGroup"/>
-                    </m:oMathParaPr>
-                    <m:oMath xmlns:m="http://schemas.openxmlformats.org/officeDocument/2006/math">
+                    <m:oMath>
                       <m:r>
                         <a:rPr lang="en-US" b="0" i="1" smtClean="0">
                           <a:latin typeface="Cambria Math" panose="02040503050406030204" pitchFamily="18" charset="0"/>
@@ -28901,7 +29344,7 @@
                       <m:func>
                         <m:funcPr>
                           <m:ctrlPr>
-                            <a:rPr lang="en-US" b="0" i="1" smtClean="0">
+                            <a:rPr lang="en-US" b="0" i="0" smtClean="0">
                               <a:latin typeface="Cambria Math" panose="02040503050406030204" pitchFamily="18" charset="0"/>
                             </a:rPr>
                           </m:ctrlPr>
@@ -29405,10 +29848,7 @@
                 </a:pPr>
                 <a14:m>
                   <m:oMathPara xmlns:m="http://schemas.openxmlformats.org/officeDocument/2006/math">
-                    <m:oMathParaPr>
-                      <m:jc m:val="centerGroup"/>
-                    </m:oMathParaPr>
-                    <m:oMath xmlns:m="http://schemas.openxmlformats.org/officeDocument/2006/math">
+                    <m:oMath>
                       <m:r>
                         <a:rPr lang="en-US" i="1" smtClean="0">
                           <a:latin typeface="Cambria Math"/>
@@ -29427,7 +29867,7 @@
                         <m:sSupPr>
                           <m:ctrlPr>
                             <a:rPr lang="en-US" b="0" i="1" smtClean="0">
-                              <a:latin typeface="Cambria Math" panose="02040503050406030204" pitchFamily="18" charset="0"/>
+                              <a:latin typeface="Cambria Math"/>
                               <a:ea typeface="Cambria Math"/>
                             </a:rPr>
                           </m:ctrlPr>
@@ -29447,7 +29887,7 @@
                               <m:ctrlPr>
                                 <a:rPr lang="en-US" b="0" i="1" smtClean="0">
                                   <a:latin typeface="Cambria Math" panose="02040503050406030204" pitchFamily="18" charset="0"/>
-                                  <a:ea typeface="Cambria Math"/>
+                                  <a:ea typeface="Cambria Math" panose="02040503050406030204" pitchFamily="18" charset="0"/>
                                 </a:rPr>
                               </m:ctrlPr>
                             </m:sSupPr>
@@ -29527,10 +29967,7 @@
                 </a:pPr>
                 <a14:m>
                   <m:oMathPara xmlns:m="http://schemas.openxmlformats.org/officeDocument/2006/math">
-                    <m:oMathParaPr>
-                      <m:jc m:val="centerGroup"/>
-                    </m:oMathParaPr>
-                    <m:oMath xmlns:m="http://schemas.openxmlformats.org/officeDocument/2006/math">
+                    <m:oMath>
                       <m:r>
                         <a:rPr lang="en-US" b="0" i="1" smtClean="0">
                           <a:latin typeface="Cambria Math"/>
@@ -29547,7 +29984,7 @@
                         <m:dPr>
                           <m:ctrlPr>
                             <a:rPr lang="en-US" b="0" i="1" smtClean="0">
-                              <a:latin typeface="Cambria Math" panose="02040503050406030204" pitchFamily="18" charset="0"/>
+                              <a:latin typeface="Cambria Math"/>
                             </a:rPr>
                           </m:ctrlPr>
                         </m:dPr>
@@ -29570,7 +30007,7 @@
                         <m:fPr>
                           <m:ctrlPr>
                             <a:rPr lang="en-US" b="0" i="1" smtClean="0">
-                              <a:latin typeface="Cambria Math" panose="02040503050406030204" pitchFamily="18" charset="0"/>
+                              <a:latin typeface="Cambria Math"/>
                             </a:rPr>
                           </m:ctrlPr>
                         </m:fPr>
@@ -29608,10 +30045,7 @@
                 </a:pPr>
                 <a14:m>
                   <m:oMathPara xmlns:m="http://schemas.openxmlformats.org/officeDocument/2006/math">
-                    <m:oMathParaPr>
-                      <m:jc m:val="centerGroup"/>
-                    </m:oMathParaPr>
-                    <m:oMath xmlns:m="http://schemas.openxmlformats.org/officeDocument/2006/math">
+                    <m:oMath>
                       <m:r>
                         <a:rPr lang="en-US" i="1">
                           <a:latin typeface="Cambria Math"/>
@@ -29630,7 +30064,7 @@
                         <m:sSupPr>
                           <m:ctrlPr>
                             <a:rPr lang="en-US" i="1">
-                              <a:latin typeface="Cambria Math" panose="02040503050406030204" pitchFamily="18" charset="0"/>
+                              <a:latin typeface="Cambria Math"/>
                               <a:ea typeface="Cambria Math"/>
                             </a:rPr>
                           </m:ctrlPr>
@@ -29650,7 +30084,7 @@
                               <m:ctrlPr>
                                 <a:rPr lang="en-US" i="1" smtClean="0">
                                   <a:latin typeface="Cambria Math" panose="02040503050406030204" pitchFamily="18" charset="0"/>
-                                  <a:ea typeface="Cambria Math"/>
+                                  <a:ea typeface="Cambria Math" panose="02040503050406030204" pitchFamily="18" charset="0"/>
                                 </a:rPr>
                               </m:ctrlPr>
                             </m:sSupPr>
@@ -29685,8 +30119,8 @@
                       <m:d>
                         <m:dPr>
                           <m:ctrlPr>
-                            <a:rPr lang="en-US" i="1" smtClean="0">
-                              <a:latin typeface="Cambria Math" panose="02040503050406030204" pitchFamily="18" charset="0"/>
+                            <a:rPr lang="en-US" b="0" i="1" smtClean="0">
+                              <a:latin typeface="Cambria Math"/>
                               <a:ea typeface="Cambria Math"/>
                             </a:rPr>
                           </m:ctrlPr>
@@ -29712,7 +30146,7 @@
                         <m:fPr>
                           <m:ctrlPr>
                             <a:rPr lang="en-US" i="1">
-                              <a:latin typeface="Cambria Math" panose="02040503050406030204" pitchFamily="18" charset="0"/>
+                              <a:latin typeface="Cambria Math"/>
                             </a:rPr>
                           </m:ctrlPr>
                         </m:fPr>
@@ -30111,10 +30545,7 @@
                 </a:pPr>
                 <a14:m>
                   <m:oMathPara xmlns:m="http://schemas.openxmlformats.org/officeDocument/2006/math">
-                    <m:oMathParaPr>
-                      <m:jc m:val="centerGroup"/>
-                    </m:oMathParaPr>
-                    <m:oMath xmlns:m="http://schemas.openxmlformats.org/officeDocument/2006/math">
+                    <m:oMath>
                       <m:r>
                         <a:rPr lang="en-US" i="1" smtClean="0">
                           <a:latin typeface="Cambria Math"/>
@@ -30133,7 +30564,7 @@
                         <m:sSupPr>
                           <m:ctrlPr>
                             <a:rPr lang="en-US" i="1">
-                              <a:latin typeface="Cambria Math" panose="02040503050406030204" pitchFamily="18" charset="0"/>
+                              <a:latin typeface="Cambria Math"/>
                               <a:ea typeface="Cambria Math"/>
                             </a:rPr>
                           </m:ctrlPr>
@@ -30153,7 +30584,7 @@
                               <m:ctrlPr>
                                 <a:rPr lang="en-US" i="1" smtClean="0">
                                   <a:latin typeface="Cambria Math" panose="02040503050406030204" pitchFamily="18" charset="0"/>
-                                  <a:ea typeface="Cambria Math"/>
+                                  <a:ea typeface="Cambria Math" panose="02040503050406030204" pitchFamily="18" charset="0"/>
                                 </a:rPr>
                               </m:ctrlPr>
                             </m:sSupPr>
@@ -30189,7 +30620,7 @@
                         <m:dPr>
                           <m:ctrlPr>
                             <a:rPr lang="en-US" i="1">
-                              <a:latin typeface="Cambria Math" panose="02040503050406030204" pitchFamily="18" charset="0"/>
+                              <a:latin typeface="Cambria Math"/>
                               <a:ea typeface="Cambria Math"/>
                             </a:rPr>
                           </m:ctrlPr>
@@ -30215,7 +30646,7 @@
                         <m:fPr>
                           <m:ctrlPr>
                             <a:rPr lang="en-US" i="1">
-                              <a:latin typeface="Cambria Math" panose="02040503050406030204" pitchFamily="18" charset="0"/>
+                              <a:latin typeface="Cambria Math"/>
                             </a:rPr>
                           </m:ctrlPr>
                         </m:fPr>
@@ -30363,7 +30794,7 @@
                       <m:dPr>
                         <m:ctrlPr>
                           <a:rPr lang="en-US" i="1">
-                            <a:latin typeface="Cambria Math" panose="02040503050406030204" pitchFamily="18" charset="0"/>
+                            <a:latin typeface="Cambria Math"/>
                           </a:rPr>
                         </m:ctrlPr>
                       </m:dPr>
@@ -30386,7 +30817,7 @@
                       <m:fPr>
                         <m:ctrlPr>
                           <a:rPr lang="en-US" i="1">
-                            <a:latin typeface="Cambria Math" panose="02040503050406030204" pitchFamily="18" charset="0"/>
+                            <a:latin typeface="Cambria Math"/>
                           </a:rPr>
                         </m:ctrlPr>
                       </m:fPr>
@@ -30472,10 +30903,7 @@
                 </a:pPr>
                 <a14:m>
                   <m:oMathPara xmlns:m="http://schemas.openxmlformats.org/officeDocument/2006/math">
-                    <m:oMathParaPr>
-                      <m:jc m:val="centerGroup"/>
-                    </m:oMathParaPr>
-                    <m:oMath xmlns:m="http://schemas.openxmlformats.org/officeDocument/2006/math">
+                    <m:oMath>
                       <m:r>
                         <a:rPr lang="en-US" i="1">
                           <a:latin typeface="Cambria Math"/>
@@ -30494,7 +30922,7 @@
                         <m:sSupPr>
                           <m:ctrlPr>
                             <a:rPr lang="en-US" i="1">
-                              <a:latin typeface="Cambria Math" panose="02040503050406030204" pitchFamily="18" charset="0"/>
+                              <a:latin typeface="Cambria Math"/>
                               <a:ea typeface="Cambria Math"/>
                             </a:rPr>
                           </m:ctrlPr>
@@ -30514,7 +30942,7 @@
                               <m:ctrlPr>
                                 <a:rPr lang="en-US" i="1" smtClean="0">
                                   <a:latin typeface="Cambria Math" panose="02040503050406030204" pitchFamily="18" charset="0"/>
-                                  <a:ea typeface="Cambria Math"/>
+                                  <a:ea typeface="Cambria Math" panose="02040503050406030204" pitchFamily="18" charset="0"/>
                                 </a:rPr>
                               </m:ctrlPr>
                             </m:sSupPr>
@@ -30550,7 +30978,7 @@
                         <m:fPr>
                           <m:ctrlPr>
                             <a:rPr lang="en-US" i="1">
-                              <a:latin typeface="Cambria Math" panose="02040503050406030204" pitchFamily="18" charset="0"/>
+                              <a:latin typeface="Cambria Math"/>
                               <a:ea typeface="Cambria Math"/>
                             </a:rPr>
                           </m:ctrlPr>
@@ -30875,15 +31303,12 @@
                 </a:pPr>
                 <a14:m>
                   <m:oMathPara xmlns:m="http://schemas.openxmlformats.org/officeDocument/2006/math">
-                    <m:oMathParaPr>
-                      <m:jc m:val="centerGroup"/>
-                    </m:oMathParaPr>
-                    <m:oMath xmlns:m="http://schemas.openxmlformats.org/officeDocument/2006/math">
+                    <m:oMath>
                       <m:sSup>
                         <m:sSupPr>
                           <m:ctrlPr>
                             <a:rPr lang="en-US" i="1">
-                              <a:latin typeface="Cambria Math" panose="02040503050406030204" pitchFamily="18" charset="0"/>
+                              <a:latin typeface="Cambria Math"/>
                               <a:ea typeface="Cambria Math"/>
                             </a:rPr>
                           </m:ctrlPr>
@@ -30917,7 +31342,7 @@
                               <m:ctrlPr>
                                 <a:rPr lang="en-US" b="0" i="1" smtClean="0">
                                   <a:latin typeface="Cambria Math" panose="02040503050406030204" pitchFamily="18" charset="0"/>
-                                  <a:ea typeface="Cambria Math"/>
+                                  <a:ea typeface="Cambria Math" panose="02040503050406030204" pitchFamily="18" charset="0"/>
                                 </a:rPr>
                               </m:ctrlPr>
                             </m:sSupPr>
@@ -31018,14 +31443,11 @@
                 </a:pPr>
                 <a14:m>
                   <m:oMathPara xmlns:m="http://schemas.openxmlformats.org/officeDocument/2006/math">
-                    <m:oMathParaPr>
-                      <m:jc m:val="centerGroup"/>
-                    </m:oMathParaPr>
-                    <m:oMath xmlns:m="http://schemas.openxmlformats.org/officeDocument/2006/math">
+                    <m:oMath>
                       <m:func>
                         <m:funcPr>
                           <m:ctrlPr>
-                            <a:rPr lang="en-US" i="1" smtClean="0">
+                            <a:rPr lang="en-US" b="0" i="0" smtClean="0">
                               <a:latin typeface="Cambria Math" panose="02040503050406030204" pitchFamily="18" charset="0"/>
                               <a:ea typeface="Cambria Math"/>
                             </a:rPr>
@@ -31063,8 +31485,8 @@
                       <m:f>
                         <m:fPr>
                           <m:ctrlPr>
-                            <a:rPr lang="en-US" i="1" smtClean="0">
-                              <a:latin typeface="Cambria Math" panose="02040503050406030204" pitchFamily="18" charset="0"/>
+                            <a:rPr lang="en-US" i="1">
+                              <a:latin typeface="Cambria Math"/>
                               <a:ea typeface="Cambria Math"/>
                             </a:rPr>
                           </m:ctrlPr>
@@ -31098,7 +31520,7 @@
                       <m:func>
                         <m:funcPr>
                           <m:ctrlPr>
-                            <a:rPr lang="en-US" i="1" smtClean="0">
+                            <a:rPr lang="en-US" b="0" i="0" smtClean="0">
                               <a:latin typeface="Cambria Math" panose="02040503050406030204" pitchFamily="18" charset="0"/>
                               <a:ea typeface="Cambria Math"/>
                             </a:rPr>
@@ -31154,7 +31576,7 @@
                         <m:fPr>
                           <m:ctrlPr>
                             <a:rPr lang="en-US" i="1">
-                              <a:latin typeface="Cambria Math" panose="02040503050406030204" pitchFamily="18" charset="0"/>
+                              <a:latin typeface="Cambria Math"/>
                               <a:ea typeface="Cambria Math"/>
                             </a:rPr>
                           </m:ctrlPr>
@@ -31188,7 +31610,7 @@
                       <m:func>
                         <m:funcPr>
                           <m:ctrlPr>
-                            <a:rPr lang="en-US" b="0" i="1" smtClean="0">
+                            <a:rPr lang="en-US" b="0" i="0" smtClean="0">
                               <a:latin typeface="Cambria Math" panose="02040503050406030204" pitchFamily="18" charset="0"/>
                               <a:ea typeface="Cambria Math"/>
                             </a:rPr>
@@ -31233,14 +31655,11 @@
                 </a:pPr>
                 <a14:m>
                   <m:oMathPara xmlns:m="http://schemas.openxmlformats.org/officeDocument/2006/math">
-                    <m:oMathParaPr>
-                      <m:jc m:val="centerGroup"/>
-                    </m:oMathParaPr>
-                    <m:oMath xmlns:m="http://schemas.openxmlformats.org/officeDocument/2006/math">
+                    <m:oMath>
                       <m:func>
                         <m:funcPr>
                           <m:ctrlPr>
-                            <a:rPr lang="en-US" i="1">
+                            <a:rPr lang="en-US" b="0" i="0" smtClean="0">
                               <a:latin typeface="Cambria Math" panose="02040503050406030204" pitchFamily="18" charset="0"/>
                               <a:ea typeface="Cambria Math"/>
                             </a:rPr>
@@ -31262,7 +31681,7 @@
                           <m:sSub>
                             <m:sSubPr>
                               <m:ctrlPr>
-                                <a:rPr lang="en-US" i="1">
+                                <a:rPr lang="is-IS" i="1">
                                   <a:latin typeface="Cambria Math" panose="02040503050406030204" pitchFamily="18" charset="0"/>
                                   <a:ea typeface="Cambria Math"/>
                                 </a:rPr>
@@ -31299,7 +31718,7 @@
                       <m:func>
                         <m:funcPr>
                           <m:ctrlPr>
-                            <a:rPr lang="en-US" i="1">
+                            <a:rPr lang="en-US" b="0" i="0" smtClean="0">
                               <a:latin typeface="Cambria Math" panose="02040503050406030204" pitchFamily="18" charset="0"/>
                               <a:ea typeface="Cambria Math"/>
                             </a:rPr>
@@ -31321,7 +31740,7 @@
                           <m:sSub>
                             <m:sSubPr>
                               <m:ctrlPr>
-                                <a:rPr lang="en-US" i="1">
+                                <a:rPr lang="is-IS" i="1">
                                   <a:latin typeface="Cambria Math" panose="02040503050406030204" pitchFamily="18" charset="0"/>
                                   <a:ea typeface="Cambria Math"/>
                                 </a:rPr>
@@ -31359,7 +31778,7 @@
                         <m:fPr>
                           <m:ctrlPr>
                             <a:rPr lang="en-US" i="1">
-                              <a:latin typeface="Cambria Math" panose="02040503050406030204" pitchFamily="18" charset="0"/>
+                              <a:latin typeface="Cambria Math"/>
                               <a:ea typeface="Cambria Math"/>
                             </a:rPr>
                           </m:ctrlPr>
@@ -31393,7 +31812,7 @@
                       <m:d>
                         <m:dPr>
                           <m:ctrlPr>
-                            <a:rPr lang="en-US" i="1">
+                            <a:rPr lang="en-US" b="0" i="1" smtClean="0">
                               <a:latin typeface="Cambria Math" panose="02040503050406030204" pitchFamily="18" charset="0"/>
                               <a:ea typeface="Cambria Math"/>
                             </a:rPr>
@@ -31403,7 +31822,7 @@
                           <m:func>
                             <m:funcPr>
                               <m:ctrlPr>
-                                <a:rPr lang="en-US" i="1">
+                                <a:rPr lang="en-US" b="0" i="0" smtClean="0">
                                   <a:latin typeface="Cambria Math" panose="02040503050406030204" pitchFamily="18" charset="0"/>
                                   <a:ea typeface="Cambria Math"/>
                                 </a:rPr>
@@ -31442,6 +31861,7 @@
                                       <m:ctrlPr>
                                         <a:rPr lang="en-US" i="1">
                                           <a:latin typeface="Cambria Math" panose="02040503050406030204" pitchFamily="18" charset="0"/>
+                                          <a:ea typeface="Cambria Math" panose="02040503050406030204" pitchFamily="18" charset="0"/>
                                         </a:rPr>
                                       </m:ctrlPr>
                                     </m:sSubPr>
@@ -31478,7 +31898,7 @@
                           <m:func>
                             <m:funcPr>
                               <m:ctrlPr>
-                                <a:rPr lang="en-US" i="1">
+                                <a:rPr lang="en-US" b="0" i="0" smtClean="0">
                                   <a:latin typeface="Cambria Math" panose="02040503050406030204" pitchFamily="18" charset="0"/>
                                   <a:ea typeface="Cambria Math"/>
                                 </a:rPr>
@@ -31517,6 +31937,7 @@
                                       <m:ctrlPr>
                                         <a:rPr lang="en-US" i="1">
                                           <a:latin typeface="Cambria Math" panose="02040503050406030204" pitchFamily="18" charset="0"/>
+                                          <a:ea typeface="Cambria Math" panose="02040503050406030204" pitchFamily="18" charset="0"/>
                                         </a:rPr>
                                       </m:ctrlPr>
                                     </m:sSubPr>
@@ -31563,9 +31984,9 @@
                     <m:sSup>
                       <m:sSupPr>
                         <m:ctrlPr>
-                          <a:rPr lang="en-US" sz="2400" i="1">
+                          <a:rPr lang="en-US" sz="2400" i="1" smtClean="0">
                             <a:latin typeface="Cambria Math" panose="02040503050406030204" pitchFamily="18" charset="0"/>
-                            <a:ea typeface="Cambria Math"/>
+                            <a:ea typeface="Cambria Math" panose="02040503050406030204" pitchFamily="18" charset="0"/>
                           </a:rPr>
                         </m:ctrlPr>
                       </m:sSupPr>
@@ -31573,9 +31994,9 @@
                         <m:d>
                           <m:dPr>
                             <m:ctrlPr>
-                              <a:rPr lang="en-US" sz="2400" i="1">
+                              <a:rPr lang="en-US" sz="2400" i="1" smtClean="0">
                                 <a:latin typeface="Cambria Math" panose="02040503050406030204" pitchFamily="18" charset="0"/>
-                                <a:ea typeface="Cambria Math"/>
+                                <a:ea typeface="Cambria Math" panose="02040503050406030204" pitchFamily="18" charset="0"/>
                               </a:rPr>
                             </m:ctrlPr>
                           </m:dPr>
@@ -31585,7 +32006,7 @@
                                 <m:ctrlPr>
                                   <a:rPr lang="en-US" sz="2400" i="1" smtClean="0">
                                     <a:latin typeface="Cambria Math" panose="02040503050406030204" pitchFamily="18" charset="0"/>
-                                    <a:ea typeface="Cambria Math"/>
+                                    <a:ea typeface="Cambria Math" panose="02040503050406030204" pitchFamily="18" charset="0"/>
                                   </a:rPr>
                                 </m:ctrlPr>
                               </m:sSupPr>
@@ -31640,7 +32061,7 @@
                       <m:fPr>
                         <m:ctrlPr>
                           <a:rPr lang="en-US" sz="2400" i="1">
-                            <a:latin typeface="Cambria Math" panose="02040503050406030204" pitchFamily="18" charset="0"/>
+                            <a:latin typeface="Cambria Math"/>
                             <a:ea typeface="Cambria Math"/>
                           </a:rPr>
                         </m:ctrlPr>
@@ -32052,14 +32473,11 @@
                 </a:pPr>
                 <a14:m>
                   <m:oMathPara xmlns:m="http://schemas.openxmlformats.org/officeDocument/2006/math">
-                    <m:oMathParaPr>
-                      <m:jc m:val="centerGroup"/>
-                    </m:oMathParaPr>
-                    <m:oMath xmlns:m="http://schemas.openxmlformats.org/officeDocument/2006/math">
+                    <m:oMath>
                       <m:func>
                         <m:funcPr>
                           <m:ctrlPr>
-                            <a:rPr lang="en-US" i="1">
+                            <a:rPr lang="en-US">
                               <a:latin typeface="Cambria Math" panose="02040503050406030204" pitchFamily="18" charset="0"/>
                               <a:ea typeface="Cambria Math"/>
                             </a:rPr>
@@ -32081,7 +32499,7 @@
                           <m:sSub>
                             <m:sSubPr>
                               <m:ctrlPr>
-                                <a:rPr lang="en-US" i="1">
+                                <a:rPr lang="is-IS" i="1">
                                   <a:latin typeface="Cambria Math" panose="02040503050406030204" pitchFamily="18" charset="0"/>
                                   <a:ea typeface="Cambria Math"/>
                                 </a:rPr>
@@ -32118,7 +32536,7 @@
                       <m:func>
                         <m:funcPr>
                           <m:ctrlPr>
-                            <a:rPr lang="en-US" i="1">
+                            <a:rPr lang="en-US">
                               <a:latin typeface="Cambria Math" panose="02040503050406030204" pitchFamily="18" charset="0"/>
                               <a:ea typeface="Cambria Math"/>
                             </a:rPr>
@@ -32140,7 +32558,7 @@
                           <m:sSub>
                             <m:sSubPr>
                               <m:ctrlPr>
-                                <a:rPr lang="en-US" i="1">
+                                <a:rPr lang="is-IS" i="1">
                                   <a:latin typeface="Cambria Math" panose="02040503050406030204" pitchFamily="18" charset="0"/>
                                   <a:ea typeface="Cambria Math"/>
                                 </a:rPr>
@@ -32178,7 +32596,7 @@
                         <m:fPr>
                           <m:ctrlPr>
                             <a:rPr lang="en-US" i="1">
-                              <a:latin typeface="Cambria Math" panose="02040503050406030204" pitchFamily="18" charset="0"/>
+                              <a:latin typeface="Cambria Math"/>
                               <a:ea typeface="Cambria Math"/>
                             </a:rPr>
                           </m:ctrlPr>
@@ -32222,7 +32640,7 @@
                           <m:func>
                             <m:funcPr>
                               <m:ctrlPr>
-                                <a:rPr lang="en-US" i="1">
+                                <a:rPr lang="en-US">
                                   <a:latin typeface="Cambria Math" panose="02040503050406030204" pitchFamily="18" charset="0"/>
                                   <a:ea typeface="Cambria Math"/>
                                 </a:rPr>
@@ -32261,6 +32679,7 @@
                                       <m:ctrlPr>
                                         <a:rPr lang="en-US" i="1">
                                           <a:latin typeface="Cambria Math" panose="02040503050406030204" pitchFamily="18" charset="0"/>
+                                          <a:ea typeface="Cambria Math" panose="02040503050406030204" pitchFamily="18" charset="0"/>
                                         </a:rPr>
                                       </m:ctrlPr>
                                     </m:sSubPr>
@@ -32297,7 +32716,7 @@
                           <m:func>
                             <m:funcPr>
                               <m:ctrlPr>
-                                <a:rPr lang="en-US" i="1">
+                                <a:rPr lang="en-US">
                                   <a:latin typeface="Cambria Math" panose="02040503050406030204" pitchFamily="18" charset="0"/>
                                   <a:ea typeface="Cambria Math"/>
                                 </a:rPr>
@@ -32336,6 +32755,7 @@
                                       <m:ctrlPr>
                                         <a:rPr lang="en-US" i="1">
                                           <a:latin typeface="Cambria Math" panose="02040503050406030204" pitchFamily="18" charset="0"/>
+                                          <a:ea typeface="Cambria Math" panose="02040503050406030204" pitchFamily="18" charset="0"/>
                                         </a:rPr>
                                       </m:ctrlPr>
                                     </m:sSubPr>
@@ -33661,10 +34081,7 @@
                 </a:pPr>
                 <a14:m>
                   <m:oMathPara xmlns:m="http://schemas.openxmlformats.org/officeDocument/2006/math">
-                    <m:oMathParaPr>
-                      <m:jc m:val="centerGroup"/>
-                    </m:oMathParaPr>
-                    <m:oMath xmlns:m="http://schemas.openxmlformats.org/officeDocument/2006/math">
+                    <m:oMath>
                       <m:r>
                         <a:rPr lang="en-US" i="1">
                           <a:latin typeface="Cambria Math"/>
@@ -33675,7 +34092,7 @@
                         <m:dPr>
                           <m:ctrlPr>
                             <a:rPr lang="en-US" i="1">
-                              <a:latin typeface="Cambria Math" panose="02040503050406030204" pitchFamily="18" charset="0"/>
+                              <a:latin typeface="Cambria Math"/>
                             </a:rPr>
                           </m:ctrlPr>
                         </m:dPr>
@@ -33712,6 +34129,8 @@
                           <m:groupChr>
                             <m:groupChrPr>
                               <m:chr m:val="⏟"/>
+                              <m:pos m:val="bot"/>
+                              <m:vertJc m:val="top"/>
                               <m:ctrlPr>
                                 <a:rPr lang="en-US" i="1">
                                   <a:latin typeface="Cambria Math" panose="02040503050406030204" pitchFamily="18" charset="0"/>
@@ -33723,7 +34142,7 @@
                                 <m:dPr>
                                   <m:ctrlPr>
                                     <a:rPr lang="en-US" i="1">
-                                      <a:latin typeface="Cambria Math" panose="02040503050406030204" pitchFamily="18" charset="0"/>
+                                      <a:latin typeface="Cambria Math"/>
                                     </a:rPr>
                                   </m:ctrlPr>
                                 </m:dPr>
@@ -33805,7 +34224,7 @@
                       <m:dPr>
                         <m:ctrlPr>
                           <a:rPr lang="en-US" b="0" i="1" smtClean="0">
-                            <a:latin typeface="Cambria Math" panose="02040503050406030204" pitchFamily="18" charset="0"/>
+                            <a:latin typeface="Cambria Math"/>
                           </a:rPr>
                         </m:ctrlPr>
                       </m:dPr>
@@ -36835,7 +37254,13 @@
       </p:grpSpPr>
       <p:sp>
         <p:nvSpPr>
-          <p:cNvPr id="2" name="Title 1"/>
+          <p:cNvPr id="2" name="Title 1">
+            <a:extLst>
+              <a:ext uri="{FF2B5EF4-FFF2-40B4-BE49-F238E27FC236}">
+                <a16:creationId xmlns:a16="http://schemas.microsoft.com/office/drawing/2014/main" id="{6426B73A-BD07-927B-27B7-6BEB09758262}"/>
+              </a:ext>
+            </a:extLst>
+          </p:cNvPr>
           <p:cNvSpPr>
             <a:spLocks noGrp="1"/>
           </p:cNvSpPr>
@@ -36849,8 +37274,12 @@
           <a:lstStyle/>
           <a:p>
             <a:r>
+              <a:rPr lang="en-US" dirty="0" err="1"/>
+              <a:t>iClicker</a:t>
+            </a:r>
+            <a:r>
               <a:rPr lang="en-US" dirty="0"/>
-              <a:t>Household Utility Function</a:t>
+              <a:t> Poll</a:t>
             </a:r>
           </a:p>
         </p:txBody>
@@ -36859,7 +37288,13 @@
         <mc:Choice Requires="a14">
           <p:sp>
             <p:nvSpPr>
-              <p:cNvPr id="3" name="Content Placeholder 2"/>
+              <p:cNvPr id="3" name="Content Placeholder 2">
+                <a:extLst>
+                  <a:ext uri="{FF2B5EF4-FFF2-40B4-BE49-F238E27FC236}">
+                    <a16:creationId xmlns:a16="http://schemas.microsoft.com/office/drawing/2014/main" id="{E001B30F-8A8E-A4D1-987E-2FF23CA79BEB}"/>
+                  </a:ext>
+                </a:extLst>
+              </p:cNvPr>
               <p:cNvSpPr>
                 <a:spLocks noGrp="1"/>
               </p:cNvSpPr>
@@ -36867,16 +37302,9 @@
                 <p:ph idx="1"/>
               </p:nvPr>
             </p:nvSpPr>
-            <p:spPr>
-              <a:xfrm>
-                <a:off x="609600" y="1447800"/>
-                <a:ext cx="10972800" cy="5105400"/>
-              </a:xfrm>
-            </p:spPr>
+            <p:spPr/>
             <p:txBody>
-              <a:bodyPr>
-                <a:normAutofit/>
-              </a:bodyPr>
+              <a:bodyPr/>
               <a:lstStyle/>
               <a:p>
                 <a:r>
@@ -36886,7 +37314,7 @@
                 <a14:m>
                   <m:oMath xmlns:m="http://schemas.openxmlformats.org/officeDocument/2006/math">
                     <m:r>
-                      <a:rPr lang="en-US" b="0" i="1" smtClean="0">
+                      <a:rPr lang="en-US" i="1">
                         <a:latin typeface="Cambria Math"/>
                       </a:rPr>
                       <m:t>𝑈</m:t>
@@ -36894,28 +37322,30 @@
                     <m:d>
                       <m:dPr>
                         <m:ctrlPr>
-                          <a:rPr lang="en-US" b="0" i="1" smtClean="0">
-                            <a:latin typeface="Cambria Math" panose="02040503050406030204" pitchFamily="18" charset="0"/>
+                          <a:rPr lang="en-US" i="1">
+                            <a:latin typeface="Cambria Math"/>
                           </a:rPr>
                         </m:ctrlPr>
                       </m:dPr>
                       <m:e>
                         <m:r>
-                          <a:rPr lang="en-US" b="0" i="1" smtClean="0">
+                          <a:rPr lang="en-US" i="1">
                             <a:latin typeface="Cambria Math"/>
                           </a:rPr>
                           <m:t>𝐶</m:t>
                         </m:r>
                       </m:e>
                     </m:d>
+                  </m:oMath>
+                </a14:m>
+                <a:r>
+                  <a:rPr lang="en-US" dirty="0"/>
+                  <a:t> and </a:t>
+                </a:r>
+                <a14:m>
+                  <m:oMath xmlns:m="http://schemas.openxmlformats.org/officeDocument/2006/math">
                     <m:r>
-                      <a:rPr lang="en-US" b="0" i="1" smtClean="0">
-                        <a:latin typeface="Cambria Math"/>
-                      </a:rPr>
-                      <m:t>−</m:t>
-                    </m:r>
-                    <m:r>
-                      <a:rPr lang="en-US" b="0" i="1" smtClean="0">
+                      <a:rPr lang="en-US" i="1">
                         <a:latin typeface="Cambria Math"/>
                       </a:rPr>
                       <m:t>𝑉</m:t>
@@ -36923,14 +37353,14 @@
                     <m:d>
                       <m:dPr>
                         <m:ctrlPr>
-                          <a:rPr lang="en-US" b="0" i="1" smtClean="0">
-                            <a:latin typeface="Cambria Math" panose="02040503050406030204" pitchFamily="18" charset="0"/>
+                          <a:rPr lang="en-US" i="1">
+                            <a:latin typeface="Cambria Math"/>
                           </a:rPr>
                         </m:ctrlPr>
                       </m:dPr>
                       <m:e>
                         <m:r>
-                          <a:rPr lang="en-US" b="0" i="1" smtClean="0">
+                          <a:rPr lang="en-US" i="1">
                             <a:latin typeface="Cambria Math"/>
                           </a:rPr>
                           <m:t>𝐻</m:t>
@@ -36945,193 +37375,239 @@
                 </a:r>
               </a:p>
               <a:p>
+                <a:pPr marL="514350" indent="-514350">
+                  <a:buFont typeface="+mj-lt"/>
+                  <a:buAutoNum type="alphaLcParenR"/>
+                </a:pPr>
                 <a:r>
                   <a:rPr lang="en-US" dirty="0"/>
-                  <a:t>Household likes consumption:</a:t>
+                  <a:t>Both increasing and convex</a:t>
                 </a:r>
               </a:p>
               <a:p>
-                <a:pPr marL="0" indent="0">
-                  <a:buNone/>
+                <a:pPr marL="514350" indent="-514350">
+                  <a:buFont typeface="+mj-lt"/>
+                  <a:buAutoNum type="alphaLcParenR"/>
                 </a:pPr>
-                <a14:m>
-                  <m:oMathPara xmlns:m="http://schemas.openxmlformats.org/officeDocument/2006/math">
-                    <m:oMathParaPr>
-                      <m:jc m:val="centerGroup"/>
-                    </m:oMathParaPr>
-                    <m:oMath xmlns:m="http://schemas.openxmlformats.org/officeDocument/2006/math">
-                      <m:f>
-                        <m:fPr>
-                          <m:ctrlPr>
-                            <a:rPr lang="en-US" i="1" smtClean="0">
-                              <a:latin typeface="Cambria Math" panose="02040503050406030204" pitchFamily="18" charset="0"/>
-                            </a:rPr>
-                          </m:ctrlPr>
-                        </m:fPr>
-                        <m:num>
-                          <m:r>
-                            <a:rPr lang="en-US" b="0" i="1" smtClean="0">
-                              <a:latin typeface="Cambria Math" panose="02040503050406030204" pitchFamily="18" charset="0"/>
-                            </a:rPr>
-                            <m:t>𝑑𝑈</m:t>
-                          </m:r>
-                          <m:d>
-                            <m:dPr>
-                              <m:ctrlPr>
-                                <a:rPr lang="en-US" b="0" i="1" smtClean="0">
-                                  <a:latin typeface="Cambria Math" panose="02040503050406030204" pitchFamily="18" charset="0"/>
-                                </a:rPr>
-                              </m:ctrlPr>
-                            </m:dPr>
-                            <m:e>
-                              <m:r>
-                                <a:rPr lang="en-US" b="0" i="1" smtClean="0">
-                                  <a:latin typeface="Cambria Math" panose="02040503050406030204" pitchFamily="18" charset="0"/>
-                                </a:rPr>
-                                <m:t>𝐶</m:t>
-                              </m:r>
-                            </m:e>
-                          </m:d>
-                        </m:num>
-                        <m:den>
-                          <m:r>
-                            <a:rPr lang="en-US" b="0" i="1" smtClean="0">
-                              <a:latin typeface="Cambria Math" panose="02040503050406030204" pitchFamily="18" charset="0"/>
-                            </a:rPr>
-                            <m:t>𝑑𝐶</m:t>
-                          </m:r>
-                        </m:den>
-                      </m:f>
-                      <m:r>
-                        <a:rPr lang="en-US" b="0" i="1" smtClean="0">
-                          <a:latin typeface="Cambria Math" panose="02040503050406030204" pitchFamily="18" charset="0"/>
-                        </a:rPr>
-                        <m:t>=</m:t>
-                      </m:r>
-                      <m:sSup>
-                        <m:sSupPr>
-                          <m:ctrlPr>
-                            <a:rPr lang="en-US" b="0" i="1" smtClean="0">
-                              <a:latin typeface="Cambria Math" panose="02040503050406030204" pitchFamily="18" charset="0"/>
-                            </a:rPr>
-                          </m:ctrlPr>
-                        </m:sSupPr>
-                        <m:e>
-                          <m:r>
-                            <a:rPr lang="en-US" b="0" i="1" smtClean="0">
-                              <a:latin typeface="Cambria Math" panose="02040503050406030204" pitchFamily="18" charset="0"/>
-                            </a:rPr>
-                            <m:t>𝑈</m:t>
-                          </m:r>
-                        </m:e>
-                        <m:sup>
-                          <m:r>
-                            <a:rPr lang="en-US" b="0" i="1" smtClean="0">
-                              <a:latin typeface="Cambria Math" panose="02040503050406030204" pitchFamily="18" charset="0"/>
-                            </a:rPr>
-                            <m:t>′</m:t>
-                          </m:r>
-                        </m:sup>
-                      </m:sSup>
-                      <m:d>
-                        <m:dPr>
-                          <m:ctrlPr>
-                            <a:rPr lang="en-US" b="0" i="1" smtClean="0">
-                              <a:latin typeface="Cambria Math" panose="02040503050406030204" pitchFamily="18" charset="0"/>
-                            </a:rPr>
-                          </m:ctrlPr>
-                        </m:dPr>
-                        <m:e>
-                          <m:r>
-                            <a:rPr lang="en-US" b="0" i="1" smtClean="0">
-                              <a:latin typeface="Cambria Math" panose="02040503050406030204" pitchFamily="18" charset="0"/>
-                            </a:rPr>
-                            <m:t>𝐶</m:t>
-                          </m:r>
-                        </m:e>
-                      </m:d>
-                      <m:r>
-                        <a:rPr lang="en-US" b="0" i="1" smtClean="0">
-                          <a:latin typeface="Cambria Math" panose="02040503050406030204" pitchFamily="18" charset="0"/>
-                        </a:rPr>
-                        <m:t>&gt;0</m:t>
-                      </m:r>
-                    </m:oMath>
-                  </m:oMathPara>
-                </a14:m>
-                <a:endParaRPr lang="en-US" dirty="0"/>
+                <a:r>
+                  <a:rPr lang="en-US" dirty="0"/>
+                  <a:t>Both increasing and concave</a:t>
+                </a:r>
               </a:p>
               <a:p>
+                <a:pPr marL="514350" indent="-514350">
+                  <a:buFont typeface="+mj-lt"/>
+                  <a:buAutoNum type="alphaLcParenR"/>
+                </a:pPr>
                 <a:r>
                   <a:rPr lang="en-US" dirty="0"/>
-                  <a:t>But at a diminishing rate: </a:t>
+                  <a:t> </a:t>
                 </a:r>
                 <a14:m>
                   <m:oMath xmlns:m="http://schemas.openxmlformats.org/officeDocument/2006/math">
-                    <m:sSup>
-                      <m:sSupPr>
-                        <m:ctrlPr>
-                          <a:rPr lang="en-US" b="0" i="1" smtClean="0">
-                            <a:latin typeface="Cambria Math" panose="02040503050406030204" pitchFamily="18" charset="0"/>
-                          </a:rPr>
-                        </m:ctrlPr>
-                      </m:sSupPr>
-                      <m:e>
-                        <m:r>
-                          <a:rPr lang="en-US" b="0" i="1" smtClean="0">
-                            <a:latin typeface="Cambria Math" panose="02040503050406030204" pitchFamily="18" charset="0"/>
-                          </a:rPr>
-                          <m:t>𝑈</m:t>
-                        </m:r>
-                      </m:e>
-                      <m:sup>
-                        <m:r>
-                          <a:rPr lang="en-US" b="0" i="1" smtClean="0">
-                            <a:latin typeface="Cambria Math" panose="02040503050406030204" pitchFamily="18" charset="0"/>
-                          </a:rPr>
-                          <m:t>′′</m:t>
-                        </m:r>
-                      </m:sup>
-                    </m:sSup>
+                    <m:r>
+                      <a:rPr lang="en-US" i="1">
+                        <a:latin typeface="Cambria Math"/>
+                      </a:rPr>
+                      <m:t>𝑈</m:t>
+                    </m:r>
                     <m:d>
                       <m:dPr>
                         <m:ctrlPr>
-                          <a:rPr lang="en-US" b="0" i="1" smtClean="0">
-                            <a:latin typeface="Cambria Math" panose="02040503050406030204" pitchFamily="18" charset="0"/>
+                          <a:rPr lang="en-US" i="1">
+                            <a:latin typeface="Cambria Math"/>
                           </a:rPr>
                         </m:ctrlPr>
                       </m:dPr>
                       <m:e>
                         <m:r>
-                          <a:rPr lang="en-US" b="0" i="1" smtClean="0">
-                            <a:latin typeface="Cambria Math" panose="02040503050406030204" pitchFamily="18" charset="0"/>
+                          <a:rPr lang="en-US" i="1">
+                            <a:latin typeface="Cambria Math"/>
                           </a:rPr>
                           <m:t>𝐶</m:t>
                         </m:r>
                       </m:e>
                     </m:d>
-                    <m:r>
-                      <a:rPr lang="en-US" b="0" i="1" smtClean="0">
-                        <a:latin typeface="Cambria Math" panose="02040503050406030204" pitchFamily="18" charset="0"/>
-                      </a:rPr>
-                      <m:t>&lt;0</m:t>
-                    </m:r>
                   </m:oMath>
                 </a14:m>
-                <a:endParaRPr lang="en-US" dirty="0"/>
-              </a:p>
-              <a:p>
-                <a:pPr lvl="1"/>
                 <a:r>
                   <a:rPr lang="en-US" dirty="0"/>
-                  <a:t>Extra coconut very valuable when you have few coconuts</a:t>
+                  <a:t> increasing and concave, </a:t>
+                </a:r>
+                <a14:m>
+                  <m:oMath xmlns:m="http://schemas.openxmlformats.org/officeDocument/2006/math">
+                    <m:r>
+                      <a:rPr lang="en-US" i="1">
+                        <a:latin typeface="Cambria Math"/>
+                      </a:rPr>
+                      <m:t>𝑉</m:t>
+                    </m:r>
+                    <m:d>
+                      <m:dPr>
+                        <m:ctrlPr>
+                          <a:rPr lang="en-US" i="1">
+                            <a:latin typeface="Cambria Math"/>
+                          </a:rPr>
+                        </m:ctrlPr>
+                      </m:dPr>
+                      <m:e>
+                        <m:r>
+                          <a:rPr lang="en-US" i="1">
+                            <a:latin typeface="Cambria Math"/>
+                          </a:rPr>
+                          <m:t>𝐻</m:t>
+                        </m:r>
+                      </m:e>
+                    </m:d>
+                  </m:oMath>
+                </a14:m>
+                <a:r>
+                  <a:rPr lang="en-US" dirty="0"/>
+                  <a:t> decreasing and convex</a:t>
                 </a:r>
               </a:p>
               <a:p>
-                <a:pPr lvl="1"/>
+                <a:pPr marL="514350" indent="-514350">
+                  <a:buFont typeface="+mj-lt"/>
+                  <a:buAutoNum type="alphaLcParenR"/>
+                </a:pPr>
                 <a:r>
                   <a:rPr lang="en-US" dirty="0"/>
-                  <a:t>Extra coconut not as valuable when you already have many</a:t>
+                  <a:t> </a:t>
+                </a:r>
+                <a14:m>
+                  <m:oMath xmlns:m="http://schemas.openxmlformats.org/officeDocument/2006/math">
+                    <m:r>
+                      <a:rPr lang="en-US" i="1">
+                        <a:latin typeface="Cambria Math"/>
+                      </a:rPr>
+                      <m:t>𝑈</m:t>
+                    </m:r>
+                    <m:d>
+                      <m:dPr>
+                        <m:ctrlPr>
+                          <a:rPr lang="en-US" i="1">
+                            <a:latin typeface="Cambria Math"/>
+                          </a:rPr>
+                        </m:ctrlPr>
+                      </m:dPr>
+                      <m:e>
+                        <m:r>
+                          <a:rPr lang="en-US" i="1">
+                            <a:latin typeface="Cambria Math"/>
+                          </a:rPr>
+                          <m:t>𝐶</m:t>
+                        </m:r>
+                      </m:e>
+                    </m:d>
+                  </m:oMath>
+                </a14:m>
+                <a:r>
+                  <a:rPr lang="en-US" dirty="0"/>
+                  <a:t> increasing and concave, </a:t>
+                </a:r>
+                <a14:m>
+                  <m:oMath xmlns:m="http://schemas.openxmlformats.org/officeDocument/2006/math">
+                    <m:r>
+                      <a:rPr lang="en-US" i="1">
+                        <a:latin typeface="Cambria Math"/>
+                      </a:rPr>
+                      <m:t>𝑉</m:t>
+                    </m:r>
+                    <m:d>
+                      <m:dPr>
+                        <m:ctrlPr>
+                          <a:rPr lang="en-US" i="1">
+                            <a:latin typeface="Cambria Math"/>
+                          </a:rPr>
+                        </m:ctrlPr>
+                      </m:dPr>
+                      <m:e>
+                        <m:r>
+                          <a:rPr lang="en-US" i="1">
+                            <a:latin typeface="Cambria Math"/>
+                          </a:rPr>
+                          <m:t>𝐻</m:t>
+                        </m:r>
+                      </m:e>
+                    </m:d>
+                  </m:oMath>
+                </a14:m>
+                <a:r>
+                  <a:rPr lang="en-US" dirty="0"/>
+                  <a:t> increasing and convex</a:t>
+                </a:r>
+              </a:p>
+              <a:p>
+                <a:pPr marL="514350" indent="-514350">
+                  <a:buFont typeface="+mj-lt"/>
+                  <a:buAutoNum type="alphaLcParenR"/>
+                </a:pPr>
+                <a:r>
+                  <a:rPr lang="en-US" dirty="0"/>
+                  <a:t> </a:t>
+                </a:r>
+                <a14:m>
+                  <m:oMath xmlns:m="http://schemas.openxmlformats.org/officeDocument/2006/math">
+                    <m:r>
+                      <a:rPr lang="en-US" i="1">
+                        <a:latin typeface="Cambria Math"/>
+                      </a:rPr>
+                      <m:t>𝑈</m:t>
+                    </m:r>
+                    <m:d>
+                      <m:dPr>
+                        <m:ctrlPr>
+                          <a:rPr lang="en-US" i="1">
+                            <a:latin typeface="Cambria Math"/>
+                          </a:rPr>
+                        </m:ctrlPr>
+                      </m:dPr>
+                      <m:e>
+                        <m:r>
+                          <a:rPr lang="en-US" i="1">
+                            <a:latin typeface="Cambria Math"/>
+                          </a:rPr>
+                          <m:t>𝐶</m:t>
+                        </m:r>
+                      </m:e>
+                    </m:d>
+                  </m:oMath>
+                </a14:m>
+                <a:r>
+                  <a:rPr lang="en-US" dirty="0"/>
+                  <a:t> decreasing and concave, </a:t>
+                </a:r>
+                <a14:m>
+                  <m:oMath xmlns:m="http://schemas.openxmlformats.org/officeDocument/2006/math">
+                    <m:r>
+                      <a:rPr lang="en-US" i="1">
+                        <a:latin typeface="Cambria Math"/>
+                      </a:rPr>
+                      <m:t>𝑉</m:t>
+                    </m:r>
+                    <m:d>
+                      <m:dPr>
+                        <m:ctrlPr>
+                          <a:rPr lang="en-US" i="1">
+                            <a:latin typeface="Cambria Math"/>
+                          </a:rPr>
+                        </m:ctrlPr>
+                      </m:dPr>
+                      <m:e>
+                        <m:r>
+                          <a:rPr lang="en-US" i="1">
+                            <a:latin typeface="Cambria Math"/>
+                          </a:rPr>
+                          <m:t>𝐻</m:t>
+                        </m:r>
+                      </m:e>
+                    </m:d>
+                  </m:oMath>
+                </a14:m>
+                <a:r>
+                  <a:rPr lang="en-US" dirty="0"/>
+                  <a:t> increasing and concave</a:t>
                 </a:r>
               </a:p>
             </p:txBody>
@@ -37140,7 +37616,13 @@
         <mc:Fallback xmlns="">
           <p:sp>
             <p:nvSpPr>
-              <p:cNvPr id="3" name="Content Placeholder 2"/>
+              <p:cNvPr id="3" name="Content Placeholder 2">
+                <a:extLst>
+                  <a:ext uri="{FF2B5EF4-FFF2-40B4-BE49-F238E27FC236}">
+                    <a16:creationId xmlns:a16="http://schemas.microsoft.com/office/drawing/2014/main" id="{E001B30F-8A8E-A4D1-987E-2FF23CA79BEB}"/>
+                  </a:ext>
+                </a:extLst>
+              </p:cNvPr>
               <p:cNvSpPr>
                 <a:spLocks noGrp="1" noRot="1" noChangeAspect="1" noMove="1" noResize="1" noEditPoints="1" noAdjustHandles="1" noChangeArrowheads="1" noChangeShapeType="1" noTextEdit="1"/>
               </p:cNvSpPr>
@@ -37149,14 +37631,10 @@
               </p:nvPr>
             </p:nvSpPr>
             <p:spPr>
-              <a:xfrm>
-                <a:off x="609600" y="1447800"/>
-                <a:ext cx="10972800" cy="5105400"/>
-              </a:xfrm>
               <a:blipFill>
-                <a:blip r:embed="rId3"/>
+                <a:blip r:embed="rId2"/>
                 <a:stretch>
-                  <a:fillRect l="-1278" t="-1434"/>
+                  <a:fillRect l="-1444" t="-1617"/>
                 </a:stretch>
               </a:blipFill>
             </p:spPr>
@@ -37177,7 +37655,13 @@
       </mc:AlternateContent>
       <p:sp>
         <p:nvSpPr>
-          <p:cNvPr id="4" name="Slide Number Placeholder 3"/>
+          <p:cNvPr id="4" name="Slide Number Placeholder 3">
+            <a:extLst>
+              <a:ext uri="{FF2B5EF4-FFF2-40B4-BE49-F238E27FC236}">
+                <a16:creationId xmlns:a16="http://schemas.microsoft.com/office/drawing/2014/main" id="{6407E392-15C5-F598-5E1D-60155AD4DF3F}"/>
+              </a:ext>
+            </a:extLst>
+          </p:cNvPr>
           <p:cNvSpPr>
             <a:spLocks noGrp="1"/>
           </p:cNvSpPr>
@@ -37202,234 +37686,13 @@
     </p:spTree>
     <p:extLst>
       <p:ext uri="{BB962C8B-B14F-4D97-AF65-F5344CB8AC3E}">
-        <p14:creationId xmlns:p14="http://schemas.microsoft.com/office/powerpoint/2010/main" val="707755828"/>
+        <p14:creationId xmlns:p14="http://schemas.microsoft.com/office/powerpoint/2010/main" val="3839466043"/>
       </p:ext>
     </p:extLst>
   </p:cSld>
   <p:clrMapOvr>
     <a:masterClrMapping/>
   </p:clrMapOvr>
-  <p:timing>
-    <p:tnLst>
-      <p:par>
-        <p:cTn id="1" dur="indefinite" restart="never" nodeType="tmRoot">
-          <p:childTnLst>
-            <p:seq concurrent="1" nextAc="seek">
-              <p:cTn id="2" dur="indefinite" nodeType="mainSeq">
-                <p:childTnLst>
-                  <p:par>
-                    <p:cTn id="3" fill="hold">
-                      <p:stCondLst>
-                        <p:cond delay="indefinite"/>
-                      </p:stCondLst>
-                      <p:childTnLst>
-                        <p:par>
-                          <p:cTn id="4" fill="hold">
-                            <p:stCondLst>
-                              <p:cond delay="0"/>
-                            </p:stCondLst>
-                            <p:childTnLst>
-                              <p:par>
-                                <p:cTn id="5" presetID="1" presetClass="entr" presetSubtype="0" fill="hold" nodeType="clickEffect">
-                                  <p:stCondLst>
-                                    <p:cond delay="0"/>
-                                  </p:stCondLst>
-                                  <p:childTnLst>
-                                    <p:set>
-                                      <p:cBhvr>
-                                        <p:cTn id="6" dur="1" fill="hold">
-                                          <p:stCondLst>
-                                            <p:cond delay="0"/>
-                                          </p:stCondLst>
-                                        </p:cTn>
-                                        <p:tgtEl>
-                                          <p:spTgt spid="3">
-                                            <p:txEl>
-                                              <p:pRg st="1" end="1"/>
-                                            </p:txEl>
-                                          </p:spTgt>
-                                        </p:tgtEl>
-                                        <p:attrNameLst>
-                                          <p:attrName>style.visibility</p:attrName>
-                                        </p:attrNameLst>
-                                      </p:cBhvr>
-                                      <p:to>
-                                        <p:strVal val="visible"/>
-                                      </p:to>
-                                    </p:set>
-                                  </p:childTnLst>
-                                </p:cTn>
-                              </p:par>
-                              <p:par>
-                                <p:cTn id="7" presetID="1" presetClass="entr" presetSubtype="0" fill="hold" nodeType="withEffect">
-                                  <p:stCondLst>
-                                    <p:cond delay="0"/>
-                                  </p:stCondLst>
-                                  <p:childTnLst>
-                                    <p:set>
-                                      <p:cBhvr>
-                                        <p:cTn id="8" dur="1" fill="hold">
-                                          <p:stCondLst>
-                                            <p:cond delay="0"/>
-                                          </p:stCondLst>
-                                        </p:cTn>
-                                        <p:tgtEl>
-                                          <p:spTgt spid="3">
-                                            <p:txEl>
-                                              <p:pRg st="2" end="2"/>
-                                            </p:txEl>
-                                          </p:spTgt>
-                                        </p:tgtEl>
-                                        <p:attrNameLst>
-                                          <p:attrName>style.visibility</p:attrName>
-                                        </p:attrNameLst>
-                                      </p:cBhvr>
-                                      <p:to>
-                                        <p:strVal val="visible"/>
-                                      </p:to>
-                                    </p:set>
-                                  </p:childTnLst>
-                                </p:cTn>
-                              </p:par>
-                            </p:childTnLst>
-                          </p:cTn>
-                        </p:par>
-                      </p:childTnLst>
-                    </p:cTn>
-                  </p:par>
-                  <p:par>
-                    <p:cTn id="9" fill="hold">
-                      <p:stCondLst>
-                        <p:cond delay="indefinite"/>
-                      </p:stCondLst>
-                      <p:childTnLst>
-                        <p:par>
-                          <p:cTn id="10" fill="hold">
-                            <p:stCondLst>
-                              <p:cond delay="0"/>
-                            </p:stCondLst>
-                            <p:childTnLst>
-                              <p:par>
-                                <p:cTn id="11" presetID="1" presetClass="entr" presetSubtype="0" fill="hold" nodeType="clickEffect">
-                                  <p:stCondLst>
-                                    <p:cond delay="0"/>
-                                  </p:stCondLst>
-                                  <p:childTnLst>
-                                    <p:set>
-                                      <p:cBhvr>
-                                        <p:cTn id="12" dur="1" fill="hold">
-                                          <p:stCondLst>
-                                            <p:cond delay="0"/>
-                                          </p:stCondLst>
-                                        </p:cTn>
-                                        <p:tgtEl>
-                                          <p:spTgt spid="3">
-                                            <p:txEl>
-                                              <p:pRg st="3" end="3"/>
-                                            </p:txEl>
-                                          </p:spTgt>
-                                        </p:tgtEl>
-                                        <p:attrNameLst>
-                                          <p:attrName>style.visibility</p:attrName>
-                                        </p:attrNameLst>
-                                      </p:cBhvr>
-                                      <p:to>
-                                        <p:strVal val="visible"/>
-                                      </p:to>
-                                    </p:set>
-                                  </p:childTnLst>
-                                </p:cTn>
-                              </p:par>
-                              <p:par>
-                                <p:cTn id="13" presetID="1" presetClass="entr" presetSubtype="0" fill="hold" nodeType="withEffect">
-                                  <p:stCondLst>
-                                    <p:cond delay="0"/>
-                                  </p:stCondLst>
-                                  <p:childTnLst>
-                                    <p:set>
-                                      <p:cBhvr>
-                                        <p:cTn id="14" dur="1" fill="hold">
-                                          <p:stCondLst>
-                                            <p:cond delay="0"/>
-                                          </p:stCondLst>
-                                        </p:cTn>
-                                        <p:tgtEl>
-                                          <p:spTgt spid="3">
-                                            <p:txEl>
-                                              <p:pRg st="4" end="4"/>
-                                            </p:txEl>
-                                          </p:spTgt>
-                                        </p:tgtEl>
-                                        <p:attrNameLst>
-                                          <p:attrName>style.visibility</p:attrName>
-                                        </p:attrNameLst>
-                                      </p:cBhvr>
-                                      <p:to>
-                                        <p:strVal val="visible"/>
-                                      </p:to>
-                                    </p:set>
-                                  </p:childTnLst>
-                                </p:cTn>
-                              </p:par>
-                              <p:par>
-                                <p:cTn id="15" presetID="1" presetClass="entr" presetSubtype="0" fill="hold" nodeType="withEffect">
-                                  <p:stCondLst>
-                                    <p:cond delay="0"/>
-                                  </p:stCondLst>
-                                  <p:childTnLst>
-                                    <p:set>
-                                      <p:cBhvr>
-                                        <p:cTn id="16" dur="1" fill="hold">
-                                          <p:stCondLst>
-                                            <p:cond delay="0"/>
-                                          </p:stCondLst>
-                                        </p:cTn>
-                                        <p:tgtEl>
-                                          <p:spTgt spid="3">
-                                            <p:txEl>
-                                              <p:pRg st="5" end="5"/>
-                                            </p:txEl>
-                                          </p:spTgt>
-                                        </p:tgtEl>
-                                        <p:attrNameLst>
-                                          <p:attrName>style.visibility</p:attrName>
-                                        </p:attrNameLst>
-                                      </p:cBhvr>
-                                      <p:to>
-                                        <p:strVal val="visible"/>
-                                      </p:to>
-                                    </p:set>
-                                  </p:childTnLst>
-                                </p:cTn>
-                              </p:par>
-                            </p:childTnLst>
-                          </p:cTn>
-                        </p:par>
-                      </p:childTnLst>
-                    </p:cTn>
-                  </p:par>
-                </p:childTnLst>
-              </p:cTn>
-              <p:prevCondLst>
-                <p:cond evt="onPrev" delay="0">
-                  <p:tgtEl>
-                    <p:sldTgt/>
-                  </p:tgtEl>
-                </p:cond>
-              </p:prevCondLst>
-              <p:nextCondLst>
-                <p:cond evt="onNext" delay="0">
-                  <p:tgtEl>
-                    <p:sldTgt/>
-                  </p:tgtEl>
-                </p:cond>
-              </p:nextCondLst>
-            </p:seq>
-          </p:childTnLst>
-        </p:cTn>
-      </p:par>
-    </p:tnLst>
-  </p:timing>
 </p:sld>
 </file>
 
@@ -38202,10 +38465,7 @@
                 </a:pPr>
                 <a14:m>
                   <m:oMathPara xmlns:m="http://schemas.openxmlformats.org/officeDocument/2006/math">
-                    <m:oMathParaPr>
-                      <m:jc m:val="centerGroup"/>
-                    </m:oMathParaPr>
-                    <m:oMath xmlns:m="http://schemas.openxmlformats.org/officeDocument/2006/math">
+                    <m:oMath>
                       <m:d>
                         <m:dPr>
                           <m:ctrlPr>
@@ -38330,10 +38590,7 @@
                 </a:pPr>
                 <a14:m>
                   <m:oMathPara xmlns:m="http://schemas.openxmlformats.org/officeDocument/2006/math">
-                    <m:oMathParaPr>
-                      <m:jc m:val="centerGroup"/>
-                    </m:oMathParaPr>
-                    <m:oMath xmlns:m="http://schemas.openxmlformats.org/officeDocument/2006/math">
+                    <m:oMath>
                       <m:r>
                         <a:rPr lang="en-US" b="0" i="1" smtClean="0">
                           <a:latin typeface="Cambria Math" panose="02040503050406030204" pitchFamily="18" charset="0"/>
@@ -41325,13 +41582,7 @@
       </p:grpSpPr>
       <p:sp>
         <p:nvSpPr>
-          <p:cNvPr id="2" name="Title 1">
-            <a:extLst>
-              <a:ext uri="{FF2B5EF4-FFF2-40B4-BE49-F238E27FC236}">
-                <a16:creationId xmlns:a16="http://schemas.microsoft.com/office/drawing/2014/main" id="{1E777505-E4AC-8D4C-8598-0E898FCA3CD7}"/>
-              </a:ext>
-            </a:extLst>
-          </p:cNvPr>
+          <p:cNvPr id="2" name="Title 1"/>
           <p:cNvSpPr>
             <a:spLocks noGrp="1"/>
           </p:cNvSpPr>
@@ -41355,13 +41606,7 @@
         <mc:Choice Requires="a14">
           <p:sp>
             <p:nvSpPr>
-              <p:cNvPr id="3" name="Content Placeholder 2">
-                <a:extLst>
-                  <a:ext uri="{FF2B5EF4-FFF2-40B4-BE49-F238E27FC236}">
-                    <a16:creationId xmlns:a16="http://schemas.microsoft.com/office/drawing/2014/main" id="{F82B446E-2F4E-99D4-44D3-B5E36A8F7DAF}"/>
-                  </a:ext>
-                </a:extLst>
-              </p:cNvPr>
+              <p:cNvPr id="3" name="Content Placeholder 2"/>
               <p:cNvSpPr>
                 <a:spLocks noGrp="1"/>
               </p:cNvSpPr>
@@ -41371,8 +41616,8 @@
             </p:nvSpPr>
             <p:spPr>
               <a:xfrm>
-                <a:off x="457200" y="1600201"/>
-                <a:ext cx="11353800" cy="4983161"/>
+                <a:off x="609600" y="1447800"/>
+                <a:ext cx="10972800" cy="5105400"/>
               </a:xfrm>
             </p:spPr>
             <p:txBody>
@@ -41383,57 +41628,73 @@
               <a:p>
                 <a:r>
                   <a:rPr lang="en-US" dirty="0"/>
-                  <a:t>What about </a:t>
+                  <a:t>What properties should </a:t>
                 </a:r>
                 <a14:m>
                   <m:oMath xmlns:m="http://schemas.openxmlformats.org/officeDocument/2006/math">
                     <m:r>
-                      <a:rPr lang="en-US" i="1">
-                        <a:latin typeface="Cambria Math" panose="02040503050406030204" pitchFamily="18" charset="0"/>
+                      <a:rPr lang="en-US" b="0" i="1" smtClean="0">
+                        <a:latin typeface="Cambria Math"/>
+                      </a:rPr>
+                      <m:t>𝑈</m:t>
+                    </m:r>
+                    <m:d>
+                      <m:dPr>
+                        <m:ctrlPr>
+                          <a:rPr lang="en-US" b="0" i="1" smtClean="0">
+                            <a:latin typeface="Cambria Math"/>
+                          </a:rPr>
+                        </m:ctrlPr>
+                      </m:dPr>
+                      <m:e>
+                        <m:r>
+                          <a:rPr lang="en-US" b="0" i="1" smtClean="0">
+                            <a:latin typeface="Cambria Math"/>
+                          </a:rPr>
+                          <m:t>𝐶</m:t>
+                        </m:r>
+                      </m:e>
+                    </m:d>
+                    <m:r>
+                      <a:rPr lang="en-US" b="0" i="1" smtClean="0">
+                        <a:latin typeface="Cambria Math"/>
+                      </a:rPr>
+                      <m:t>−</m:t>
+                    </m:r>
+                    <m:r>
+                      <a:rPr lang="en-US" b="0" i="1" smtClean="0">
+                        <a:latin typeface="Cambria Math"/>
                       </a:rPr>
                       <m:t>𝑉</m:t>
                     </m:r>
-                    <m:r>
-                      <a:rPr lang="en-US" i="1">
-                        <a:latin typeface="Cambria Math" panose="02040503050406030204" pitchFamily="18" charset="0"/>
-                      </a:rPr>
-                      <m:t>(</m:t>
-                    </m:r>
-                    <m:r>
-                      <a:rPr lang="en-US" i="1">
-                        <a:latin typeface="Cambria Math" panose="02040503050406030204" pitchFamily="18" charset="0"/>
-                      </a:rPr>
-                      <m:t>𝐻</m:t>
-                    </m:r>
-                    <m:r>
-                      <a:rPr lang="en-US" i="1">
-                        <a:latin typeface="Cambria Math" panose="02040503050406030204" pitchFamily="18" charset="0"/>
-                      </a:rPr>
-                      <m:t>)</m:t>
-                    </m:r>
+                    <m:d>
+                      <m:dPr>
+                        <m:ctrlPr>
+                          <a:rPr lang="en-US" b="0" i="1" smtClean="0">
+                            <a:latin typeface="Cambria Math"/>
+                          </a:rPr>
+                        </m:ctrlPr>
+                      </m:dPr>
+                      <m:e>
+                        <m:r>
+                          <a:rPr lang="en-US" b="0" i="1" smtClean="0">
+                            <a:latin typeface="Cambria Math"/>
+                          </a:rPr>
+                          <m:t>𝐻</m:t>
+                        </m:r>
+                      </m:e>
+                    </m:d>
                   </m:oMath>
                 </a14:m>
                 <a:r>
                   <a:rPr lang="en-US" dirty="0"/>
-                  <a:t>? This is </a:t>
-                </a:r>
-                <a:r>
-                  <a:rPr lang="en-US" dirty="0">
-                    <a:solidFill>
-                      <a:srgbClr val="C00000"/>
-                    </a:solidFill>
-                  </a:rPr>
-                  <a:t>dis</a:t>
-                </a:r>
-                <a:r>
-                  <a:rPr lang="en-US" dirty="0"/>
-                  <a:t>utility of working</a:t>
+                  <a:t> have?</a:t>
                 </a:r>
               </a:p>
               <a:p>
                 <a:r>
                   <a:rPr lang="en-US" dirty="0"/>
-                  <a:t>How about assuming household dislikes working (enjoys leisure):</a:t>
+                  <a:t>Household likes consumption:</a:t>
                 </a:r>
               </a:p>
               <a:p>
@@ -41442,55 +41703,51 @@
                 </a:pPr>
                 <a14:m>
                   <m:oMathPara xmlns:m="http://schemas.openxmlformats.org/officeDocument/2006/math">
-                    <m:oMathParaPr>
-                      <m:jc m:val="centerGroup"/>
-                    </m:oMathParaPr>
-                    <m:oMath xmlns:m="http://schemas.openxmlformats.org/officeDocument/2006/math">
+                    <m:oMath>
                       <m:f>
                         <m:fPr>
                           <m:ctrlPr>
-                            <a:rPr lang="en-US" i="1">
+                            <a:rPr lang="en-US" b="0" i="1" smtClean="0">
                               <a:latin typeface="Cambria Math" panose="02040503050406030204" pitchFamily="18" charset="0"/>
                             </a:rPr>
                           </m:ctrlPr>
                         </m:fPr>
                         <m:num>
                           <m:r>
-                            <a:rPr lang="en-US" i="1">
+                            <a:rPr lang="en-US" b="0" i="1" smtClean="0">
                               <a:latin typeface="Cambria Math" panose="02040503050406030204" pitchFamily="18" charset="0"/>
                             </a:rPr>
-                            <m:t>𝑑𝑉</m:t>
+                            <m:t>𝑑𝑈</m:t>
                           </m:r>
-                          <m:r>
-                            <a:rPr lang="en-US" i="1">
-                              <a:latin typeface="Cambria Math" panose="02040503050406030204" pitchFamily="18" charset="0"/>
-                            </a:rPr>
-                            <m:t>(</m:t>
-                          </m:r>
-                          <m:r>
-                            <a:rPr lang="en-US" i="1">
-                              <a:latin typeface="Cambria Math" panose="02040503050406030204" pitchFamily="18" charset="0"/>
-                            </a:rPr>
-                            <m:t>𝐻</m:t>
-                          </m:r>
-                          <m:r>
-                            <a:rPr lang="en-US" i="1">
-                              <a:latin typeface="Cambria Math" panose="02040503050406030204" pitchFamily="18" charset="0"/>
-                            </a:rPr>
-                            <m:t>)</m:t>
-                          </m:r>
+                          <m:d>
+                            <m:dPr>
+                              <m:ctrlPr>
+                                <a:rPr lang="en-US" b="0" i="1" smtClean="0">
+                                  <a:latin typeface="Cambria Math" panose="02040503050406030204" pitchFamily="18" charset="0"/>
+                                </a:rPr>
+                              </m:ctrlPr>
+                            </m:dPr>
+                            <m:e>
+                              <m:r>
+                                <a:rPr lang="en-US" b="0" i="1" smtClean="0">
+                                  <a:latin typeface="Cambria Math" panose="02040503050406030204" pitchFamily="18" charset="0"/>
+                                </a:rPr>
+                                <m:t>𝐶</m:t>
+                              </m:r>
+                            </m:e>
+                          </m:d>
                         </m:num>
                         <m:den>
                           <m:r>
-                            <a:rPr lang="en-US" i="1">
+                            <a:rPr lang="en-US" b="0" i="1" smtClean="0">
                               <a:latin typeface="Cambria Math" panose="02040503050406030204" pitchFamily="18" charset="0"/>
                             </a:rPr>
-                            <m:t>𝑑𝐻</m:t>
+                            <m:t>𝑑𝐶</m:t>
                           </m:r>
                         </m:den>
                       </m:f>
                       <m:r>
-                        <a:rPr lang="en-US" i="1">
+                        <a:rPr lang="en-US" b="0" i="1" smtClean="0">
                           <a:latin typeface="Cambria Math" panose="02040503050406030204" pitchFamily="18" charset="0"/>
                         </a:rPr>
                         <m:t>=</m:t>
@@ -41498,22 +41755,22 @@
                       <m:sSup>
                         <m:sSupPr>
                           <m:ctrlPr>
-                            <a:rPr lang="en-US" i="1">
+                            <a:rPr lang="en-US" b="0" i="1" smtClean="0">
                               <a:latin typeface="Cambria Math" panose="02040503050406030204" pitchFamily="18" charset="0"/>
                             </a:rPr>
                           </m:ctrlPr>
                         </m:sSupPr>
                         <m:e>
                           <m:r>
-                            <a:rPr lang="en-US" i="1">
+                            <a:rPr lang="en-US" b="0" i="1" smtClean="0">
                               <a:latin typeface="Cambria Math" panose="02040503050406030204" pitchFamily="18" charset="0"/>
                             </a:rPr>
-                            <m:t>𝑉</m:t>
+                            <m:t>𝑈</m:t>
                           </m:r>
                         </m:e>
                         <m:sup>
                           <m:r>
-                            <a:rPr lang="en-US" i="1">
+                            <a:rPr lang="en-US" b="0" i="1" smtClean="0">
                               <a:latin typeface="Cambria Math" panose="02040503050406030204" pitchFamily="18" charset="0"/>
                             </a:rPr>
                             <m:t>′</m:t>
@@ -41523,22 +41780,22 @@
                       <m:d>
                         <m:dPr>
                           <m:ctrlPr>
-                            <a:rPr lang="en-US" i="1">
+                            <a:rPr lang="en-US" b="0" i="1" smtClean="0">
                               <a:latin typeface="Cambria Math" panose="02040503050406030204" pitchFamily="18" charset="0"/>
                             </a:rPr>
                           </m:ctrlPr>
                         </m:dPr>
                         <m:e>
                           <m:r>
-                            <a:rPr lang="en-US" i="1">
+                            <a:rPr lang="en-US" b="0" i="1" smtClean="0">
                               <a:latin typeface="Cambria Math" panose="02040503050406030204" pitchFamily="18" charset="0"/>
                             </a:rPr>
-                            <m:t>𝐻</m:t>
+                            <m:t>𝐶</m:t>
                           </m:r>
                         </m:e>
                       </m:d>
                       <m:r>
-                        <a:rPr lang="en-US" i="1">
+                        <a:rPr lang="en-US" b="0" i="1" smtClean="0">
                           <a:latin typeface="Cambria Math" panose="02040503050406030204" pitchFamily="18" charset="0"/>
                         </a:rPr>
                         <m:t>&gt;0</m:t>
@@ -41549,105 +41806,77 @@
                 <a:endParaRPr lang="en-US" dirty="0"/>
               </a:p>
               <a:p>
+                <a:r>
+                  <a:rPr lang="en-US" dirty="0"/>
+                  <a:t>But at a diminishing rate: </a:t>
+                </a:r>
+                <a14:m>
+                  <m:oMath xmlns:m="http://schemas.openxmlformats.org/officeDocument/2006/math">
+                    <m:sSup>
+                      <m:sSupPr>
+                        <m:ctrlPr>
+                          <a:rPr lang="en-US" b="0" i="1" smtClean="0">
+                            <a:latin typeface="Cambria Math" panose="02040503050406030204" pitchFamily="18" charset="0"/>
+                          </a:rPr>
+                        </m:ctrlPr>
+                      </m:sSupPr>
+                      <m:e>
+                        <m:r>
+                          <a:rPr lang="en-US" b="0" i="1" smtClean="0">
+                            <a:latin typeface="Cambria Math" panose="02040503050406030204" pitchFamily="18" charset="0"/>
+                          </a:rPr>
+                          <m:t>𝑈</m:t>
+                        </m:r>
+                      </m:e>
+                      <m:sup>
+                        <m:r>
+                          <a:rPr lang="en-US" b="0" i="1" smtClean="0">
+                            <a:latin typeface="Cambria Math" panose="02040503050406030204" pitchFamily="18" charset="0"/>
+                          </a:rPr>
+                          <m:t>′′</m:t>
+                        </m:r>
+                      </m:sup>
+                    </m:sSup>
+                    <m:d>
+                      <m:dPr>
+                        <m:ctrlPr>
+                          <a:rPr lang="en-US" b="0" i="1" smtClean="0">
+                            <a:latin typeface="Cambria Math" panose="02040503050406030204" pitchFamily="18" charset="0"/>
+                          </a:rPr>
+                        </m:ctrlPr>
+                      </m:dPr>
+                      <m:e>
+                        <m:r>
+                          <a:rPr lang="en-US" b="0" i="1" smtClean="0">
+                            <a:latin typeface="Cambria Math" panose="02040503050406030204" pitchFamily="18" charset="0"/>
+                          </a:rPr>
+                          <m:t>𝐶</m:t>
+                        </m:r>
+                      </m:e>
+                    </m:d>
+                    <m:r>
+                      <a:rPr lang="en-US" b="0" i="1" smtClean="0">
+                        <a:latin typeface="Cambria Math" panose="02040503050406030204" pitchFamily="18" charset="0"/>
+                      </a:rPr>
+                      <m:t>&lt;0</m:t>
+                    </m:r>
+                  </m:oMath>
+                </a14:m>
+                <a:endParaRPr lang="en-US" dirty="0"/>
+              </a:p>
+              <a:p>
                 <a:pPr lvl="1"/>
                 <a:r>
                   <a:rPr lang="en-US" dirty="0"/>
-                  <a:t>But is that natural? People are miserable when unemployed. </a:t>
-                </a:r>
-                <a:br>
-                  <a:rPr lang="en-US" dirty="0"/>
-                </a:br>
-                <a:r>
-                  <a:rPr lang="en-US" dirty="0"/>
-                  <a:t>Work provides people with meaning</a:t>
+                  <a:t>Extra coconut very valuable when you have few coconuts</a:t>
                 </a:r>
               </a:p>
               <a:p>
                 <a:pPr lvl="1"/>
                 <a:r>
                   <a:rPr lang="en-US" dirty="0"/>
-                  <a:t>Even if people like their jobs, work yields disutility </a:t>
+                  <a:t>Extra coconut not as valuable when you already have many</a:t>
                 </a:r>
-                <a:r>
-                  <a:rPr lang="en-US" dirty="0">
-                    <a:solidFill>
-                      <a:srgbClr val="C00000"/>
-                    </a:solidFill>
-                  </a:rPr>
-                  <a:t>on the margin</a:t>
-                </a:r>
-              </a:p>
-              <a:p>
-                <a:r>
-                  <a:rPr lang="en-US" dirty="0"/>
-                  <a:t>Household’s marginal disutility of working is increasing: </a:t>
-                </a:r>
-              </a:p>
-              <a:p>
-                <a:pPr marL="0" indent="0">
-                  <a:buNone/>
-                </a:pPr>
-                <a14:m>
-                  <m:oMathPara xmlns:m="http://schemas.openxmlformats.org/officeDocument/2006/math">
-                    <m:oMathParaPr>
-                      <m:jc m:val="centerGroup"/>
-                    </m:oMathParaPr>
-                    <m:oMath xmlns:m="http://schemas.openxmlformats.org/officeDocument/2006/math">
-                      <m:sSup>
-                        <m:sSupPr>
-                          <m:ctrlPr>
-                            <a:rPr lang="en-US" i="1">
-                              <a:latin typeface="Cambria Math" panose="02040503050406030204" pitchFamily="18" charset="0"/>
-                            </a:rPr>
-                          </m:ctrlPr>
-                        </m:sSupPr>
-                        <m:e>
-                          <m:r>
-                            <a:rPr lang="en-US" i="1">
-                              <a:latin typeface="Cambria Math" panose="02040503050406030204" pitchFamily="18" charset="0"/>
-                            </a:rPr>
-                            <m:t>𝑉</m:t>
-                          </m:r>
-                        </m:e>
-                        <m:sup>
-                          <m:r>
-                            <a:rPr lang="en-US" i="1">
-                              <a:latin typeface="Cambria Math" panose="02040503050406030204" pitchFamily="18" charset="0"/>
-                            </a:rPr>
-                            <m:t>′′</m:t>
-                          </m:r>
-                        </m:sup>
-                      </m:sSup>
-                      <m:d>
-                        <m:dPr>
-                          <m:ctrlPr>
-                            <a:rPr lang="en-US" i="1">
-                              <a:latin typeface="Cambria Math" panose="02040503050406030204" pitchFamily="18" charset="0"/>
-                            </a:rPr>
-                          </m:ctrlPr>
-                        </m:dPr>
-                        <m:e>
-                          <m:r>
-                            <a:rPr lang="en-US" i="1">
-                              <a:latin typeface="Cambria Math" panose="02040503050406030204" pitchFamily="18" charset="0"/>
-                            </a:rPr>
-                            <m:t>𝐻</m:t>
-                          </m:r>
-                        </m:e>
-                      </m:d>
-                      <m:r>
-                        <a:rPr lang="en-US" i="1">
-                          <a:latin typeface="Cambria Math" panose="02040503050406030204" pitchFamily="18" charset="0"/>
-                        </a:rPr>
-                        <m:t>&gt;0</m:t>
-                      </m:r>
-                    </m:oMath>
-                  </m:oMathPara>
-                </a14:m>
-                <a:endParaRPr lang="en-US" dirty="0"/>
-              </a:p>
-              <a:p>
-                <a:endParaRPr lang="en-US" dirty="0"/>
               </a:p>
             </p:txBody>
           </p:sp>
@@ -41655,13 +41884,7 @@
         <mc:Fallback xmlns="">
           <p:sp>
             <p:nvSpPr>
-              <p:cNvPr id="3" name="Content Placeholder 2">
-                <a:extLst>
-                  <a:ext uri="{FF2B5EF4-FFF2-40B4-BE49-F238E27FC236}">
-                    <a16:creationId xmlns:a16="http://schemas.microsoft.com/office/drawing/2014/main" id="{F82B446E-2F4E-99D4-44D3-B5E36A8F7DAF}"/>
-                  </a:ext>
-                </a:extLst>
-              </p:cNvPr>
+              <p:cNvPr id="3" name="Content Placeholder 2"/>
               <p:cNvSpPr>
                 <a:spLocks noGrp="1" noRot="1" noChangeAspect="1" noMove="1" noResize="1" noEditPoints="1" noAdjustHandles="1" noChangeArrowheads="1" noChangeShapeType="1" noTextEdit="1"/>
               </p:cNvSpPr>
@@ -41671,13 +41894,13 @@
             </p:nvSpPr>
             <p:spPr>
               <a:xfrm>
-                <a:off x="457200" y="1600201"/>
-                <a:ext cx="11353800" cy="4983161"/>
+                <a:off x="609600" y="1447800"/>
+                <a:ext cx="10972800" cy="5105400"/>
               </a:xfrm>
               <a:blipFill>
-                <a:blip r:embed="rId2"/>
+                <a:blip r:embed="rId3"/>
                 <a:stretch>
-                  <a:fillRect l="-1235" t="-1469" r="-107"/>
+                  <a:fillRect l="-1278" t="-1434"/>
                 </a:stretch>
               </a:blipFill>
             </p:spPr>
@@ -41698,13 +41921,7 @@
       </mc:AlternateContent>
       <p:sp>
         <p:nvSpPr>
-          <p:cNvPr id="4" name="Slide Number Placeholder 3">
-            <a:extLst>
-              <a:ext uri="{FF2B5EF4-FFF2-40B4-BE49-F238E27FC236}">
-                <a16:creationId xmlns:a16="http://schemas.microsoft.com/office/drawing/2014/main" id="{353614C7-738B-6760-8060-B5B2D9B3EDF3}"/>
-              </a:ext>
-            </a:extLst>
-          </p:cNvPr>
+          <p:cNvPr id="4" name="Slide Number Placeholder 3"/>
           <p:cNvSpPr>
             <a:spLocks noGrp="1"/>
           </p:cNvSpPr>
@@ -41729,7 +41946,7 @@
     </p:spTree>
     <p:extLst>
       <p:ext uri="{BB962C8B-B14F-4D97-AF65-F5344CB8AC3E}">
-        <p14:creationId xmlns:p14="http://schemas.microsoft.com/office/powerpoint/2010/main" val="2647997141"/>
+        <p14:creationId xmlns:p14="http://schemas.microsoft.com/office/powerpoint/2010/main" val="707755828"/>
       </p:ext>
     </p:extLst>
   </p:cSld>
@@ -41867,33 +42084,15 @@
                                   </p:childTnLst>
                                 </p:cTn>
                               </p:par>
-                            </p:childTnLst>
-                          </p:cTn>
-                        </p:par>
-                      </p:childTnLst>
-                    </p:cTn>
-                  </p:par>
-                  <p:par>
-                    <p:cTn id="13" fill="hold">
-                      <p:stCondLst>
-                        <p:cond delay="indefinite"/>
-                      </p:stCondLst>
-                      <p:childTnLst>
-                        <p:par>
-                          <p:cTn id="14" fill="hold">
-                            <p:stCondLst>
-                              <p:cond delay="0"/>
-                            </p:stCondLst>
-                            <p:childTnLst>
                               <p:par>
-                                <p:cTn id="15" presetID="1" presetClass="entr" presetSubtype="0" fill="hold" nodeType="clickEffect">
+                                <p:cTn id="13" presetID="1" presetClass="entr" presetSubtype="0" fill="hold" nodeType="withEffect">
                                   <p:stCondLst>
                                     <p:cond delay="0"/>
                                   </p:stCondLst>
                                   <p:childTnLst>
                                     <p:set>
                                       <p:cBhvr>
-                                        <p:cTn id="16" dur="1" fill="hold">
+                                        <p:cTn id="14" dur="1" fill="hold">
                                           <p:stCondLst>
                                             <p:cond delay="0"/>
                                           </p:stCondLst>
@@ -41916,33 +42115,15 @@
                                   </p:childTnLst>
                                 </p:cTn>
                               </p:par>
-                            </p:childTnLst>
-                          </p:cTn>
-                        </p:par>
-                      </p:childTnLst>
-                    </p:cTn>
-                  </p:par>
-                  <p:par>
-                    <p:cTn id="17" fill="hold">
-                      <p:stCondLst>
-                        <p:cond delay="indefinite"/>
-                      </p:stCondLst>
-                      <p:childTnLst>
-                        <p:par>
-                          <p:cTn id="18" fill="hold">
-                            <p:stCondLst>
-                              <p:cond delay="0"/>
-                            </p:stCondLst>
-                            <p:childTnLst>
                               <p:par>
-                                <p:cTn id="19" presetID="1" presetClass="entr" presetSubtype="0" fill="hold" nodeType="clickEffect">
+                                <p:cTn id="15" presetID="1" presetClass="entr" presetSubtype="0" fill="hold" nodeType="withEffect">
                                   <p:stCondLst>
                                     <p:cond delay="0"/>
                                   </p:stCondLst>
                                   <p:childTnLst>
                                     <p:set>
                                       <p:cBhvr>
-                                        <p:cTn id="20" dur="1" fill="hold">
+                                        <p:cTn id="16" dur="1" fill="hold">
                                           <p:stCondLst>
                                             <p:cond delay="0"/>
                                           </p:stCondLst>
@@ -41951,37 +42132,6 @@
                                           <p:spTgt spid="3">
                                             <p:txEl>
                                               <p:pRg st="5" end="5"/>
-                                            </p:txEl>
-                                          </p:spTgt>
-                                        </p:tgtEl>
-                                        <p:attrNameLst>
-                                          <p:attrName>style.visibility</p:attrName>
-                                        </p:attrNameLst>
-                                      </p:cBhvr>
-                                      <p:to>
-                                        <p:strVal val="visible"/>
-                                      </p:to>
-                                    </p:set>
-                                  </p:childTnLst>
-                                </p:cTn>
-                              </p:par>
-                              <p:par>
-                                <p:cTn id="21" presetID="1" presetClass="entr" presetSubtype="0" fill="hold" nodeType="withEffect">
-                                  <p:stCondLst>
-                                    <p:cond delay="0"/>
-                                  </p:stCondLst>
-                                  <p:childTnLst>
-                                    <p:set>
-                                      <p:cBhvr>
-                                        <p:cTn id="22" dur="1" fill="hold">
-                                          <p:stCondLst>
-                                            <p:cond delay="0"/>
-                                          </p:stCondLst>
-                                        </p:cTn>
-                                        <p:tgtEl>
-                                          <p:spTgt spid="3">
-                                            <p:txEl>
-                                              <p:pRg st="6" end="6"/>
                                             </p:txEl>
                                           </p:spTgt>
                                         </p:tgtEl>
@@ -43506,7 +43656,13 @@
       </p:grpSpPr>
       <p:sp>
         <p:nvSpPr>
-          <p:cNvPr id="2" name="Title 1"/>
+          <p:cNvPr id="2" name="Title 1">
+            <a:extLst>
+              <a:ext uri="{FF2B5EF4-FFF2-40B4-BE49-F238E27FC236}">
+                <a16:creationId xmlns:a16="http://schemas.microsoft.com/office/drawing/2014/main" id="{1E777505-E4AC-8D4C-8598-0E898FCA3CD7}"/>
+              </a:ext>
+            </a:extLst>
+          </p:cNvPr>
           <p:cNvSpPr>
             <a:spLocks noGrp="1"/>
           </p:cNvSpPr>
@@ -43521,7 +43677,7 @@
           <a:p>
             <a:r>
               <a:rPr lang="en-US" dirty="0"/>
-              <a:t>Household Budget Constraint</a:t>
+              <a:t>Household Utility Function</a:t>
             </a:r>
           </a:p>
         </p:txBody>
@@ -43530,7 +43686,13 @@
         <mc:Choice Requires="a14">
           <p:sp>
             <p:nvSpPr>
-              <p:cNvPr id="3" name="Content Placeholder 2"/>
+              <p:cNvPr id="3" name="Content Placeholder 2">
+                <a:extLst>
+                  <a:ext uri="{FF2B5EF4-FFF2-40B4-BE49-F238E27FC236}">
+                    <a16:creationId xmlns:a16="http://schemas.microsoft.com/office/drawing/2014/main" id="{F82B446E-2F4E-99D4-44D3-B5E36A8F7DAF}"/>
+                  </a:ext>
+                </a:extLst>
+              </p:cNvPr>
               <p:cNvSpPr>
                 <a:spLocks noGrp="1"/>
               </p:cNvSpPr>
@@ -43540,8 +43702,8 @@
             </p:nvSpPr>
             <p:spPr>
               <a:xfrm>
-                <a:off x="609600" y="1600201"/>
-                <a:ext cx="10972800" cy="5121275"/>
+                <a:off x="457200" y="1600201"/>
+                <a:ext cx="11353800" cy="4983161"/>
               </a:xfrm>
             </p:spPr>
             <p:txBody>
@@ -43552,21 +43714,57 @@
               <a:p>
                 <a:r>
                   <a:rPr lang="en-US" dirty="0"/>
-                  <a:t>Households maximize utility subject to a </a:t>
+                  <a:t>What about </a:t>
+                </a:r>
+                <a14:m>
+                  <m:oMath xmlns:m="http://schemas.openxmlformats.org/officeDocument/2006/math">
+                    <m:r>
+                      <a:rPr lang="en-US" i="1">
+                        <a:latin typeface="Cambria Math" panose="02040503050406030204" pitchFamily="18" charset="0"/>
+                      </a:rPr>
+                      <m:t>𝑉</m:t>
+                    </m:r>
+                    <m:r>
+                      <a:rPr lang="en-US" i="1">
+                        <a:latin typeface="Cambria Math" panose="02040503050406030204" pitchFamily="18" charset="0"/>
+                      </a:rPr>
+                      <m:t>(</m:t>
+                    </m:r>
+                    <m:r>
+                      <a:rPr lang="en-US" i="1">
+                        <a:latin typeface="Cambria Math" panose="02040503050406030204" pitchFamily="18" charset="0"/>
+                      </a:rPr>
+                      <m:t>𝐻</m:t>
+                    </m:r>
+                    <m:r>
+                      <a:rPr lang="en-US" i="1">
+                        <a:latin typeface="Cambria Math" panose="02040503050406030204" pitchFamily="18" charset="0"/>
+                      </a:rPr>
+                      <m:t>)</m:t>
+                    </m:r>
+                  </m:oMath>
+                </a14:m>
+                <a:r>
+                  <a:rPr lang="en-US" dirty="0"/>
+                  <a:t>? This is </a:t>
                 </a:r>
                 <a:r>
                   <a:rPr lang="en-US" dirty="0">
                     <a:solidFill>
-                      <a:schemeClr val="accent2"/>
+                      <a:srgbClr val="C00000"/>
                     </a:solidFill>
                   </a:rPr>
-                  <a:t>budget constraint</a:t>
+                  <a:t>dis</a:t>
+                </a:r>
+                <a:r>
+                  <a:rPr lang="en-US" dirty="0"/>
+                  <a:t>utility of working</a:t>
                 </a:r>
               </a:p>
               <a:p>
                 <a:r>
                   <a:rPr lang="en-US" dirty="0"/>
-                  <a:t>Budget constraint:</a:t>
+                  <a:t>How about assuming household dislikes working (enjoys leisure):</a:t>
                 </a:r>
               </a:p>
               <a:p>
@@ -43575,39 +43773,103 @@
                 </a:pPr>
                 <a14:m>
                   <m:oMathPara xmlns:m="http://schemas.openxmlformats.org/officeDocument/2006/math">
-                    <m:oMathParaPr>
-                      <m:jc m:val="centerGroup"/>
-                    </m:oMathParaPr>
-                    <m:oMath xmlns:m="http://schemas.openxmlformats.org/officeDocument/2006/math">
-                      <m:r>
-                        <a:rPr lang="en-US" i="1">
-                          <a:latin typeface="Cambria Math" panose="02040503050406030204" pitchFamily="18" charset="0"/>
-                        </a:rPr>
-                        <m:t>𝐶</m:t>
-                      </m:r>
+                    <m:oMath>
+                      <m:f>
+                        <m:fPr>
+                          <m:ctrlPr>
+                            <a:rPr lang="en-US" i="1">
+                              <a:latin typeface="Cambria Math" panose="02040503050406030204" pitchFamily="18" charset="0"/>
+                            </a:rPr>
+                          </m:ctrlPr>
+                        </m:fPr>
+                        <m:num>
+                          <m:r>
+                            <a:rPr lang="en-US" i="1">
+                              <a:latin typeface="Cambria Math" panose="02040503050406030204" pitchFamily="18" charset="0"/>
+                            </a:rPr>
+                            <m:t>𝑑𝑉</m:t>
+                          </m:r>
+                          <m:r>
+                            <a:rPr lang="en-US" i="1">
+                              <a:latin typeface="Cambria Math" panose="02040503050406030204" pitchFamily="18" charset="0"/>
+                            </a:rPr>
+                            <m:t>(</m:t>
+                          </m:r>
+                          <m:r>
+                            <a:rPr lang="en-US" i="1">
+                              <a:latin typeface="Cambria Math" panose="02040503050406030204" pitchFamily="18" charset="0"/>
+                            </a:rPr>
+                            <m:t>𝐻</m:t>
+                          </m:r>
+                          <m:r>
+                            <a:rPr lang="en-US" i="1">
+                              <a:latin typeface="Cambria Math" panose="02040503050406030204" pitchFamily="18" charset="0"/>
+                            </a:rPr>
+                            <m:t>)</m:t>
+                          </m:r>
+                        </m:num>
+                        <m:den>
+                          <m:r>
+                            <a:rPr lang="en-US" i="1">
+                              <a:latin typeface="Cambria Math" panose="02040503050406030204" pitchFamily="18" charset="0"/>
+                            </a:rPr>
+                            <m:t>𝑑𝐻</m:t>
+                          </m:r>
+                        </m:den>
+                      </m:f>
                       <m:r>
                         <a:rPr lang="en-US" i="1">
                           <a:latin typeface="Cambria Math" panose="02040503050406030204" pitchFamily="18" charset="0"/>
                         </a:rPr>
                         <m:t>=</m:t>
                       </m:r>
+                      <m:sSup>
+                        <m:sSupPr>
+                          <m:ctrlPr>
+                            <a:rPr lang="en-US" i="1">
+                              <a:latin typeface="Cambria Math" panose="02040503050406030204" pitchFamily="18" charset="0"/>
+                            </a:rPr>
+                          </m:ctrlPr>
+                        </m:sSupPr>
+                        <m:e>
+                          <m:r>
+                            <a:rPr lang="en-US" i="1">
+                              <a:latin typeface="Cambria Math" panose="02040503050406030204" pitchFamily="18" charset="0"/>
+                            </a:rPr>
+                            <m:t>𝑉</m:t>
+                          </m:r>
+                        </m:e>
+                        <m:sup>
+                          <m:r>
+                            <a:rPr lang="en-US" i="1">
+                              <a:latin typeface="Cambria Math" panose="02040503050406030204" pitchFamily="18" charset="0"/>
+                            </a:rPr>
+                            <m:t>′</m:t>
+                          </m:r>
+                        </m:sup>
+                      </m:sSup>
+                      <m:d>
+                        <m:dPr>
+                          <m:ctrlPr>
+                            <a:rPr lang="en-US" i="1">
+                              <a:latin typeface="Cambria Math" panose="02040503050406030204" pitchFamily="18" charset="0"/>
+                            </a:rPr>
+                          </m:ctrlPr>
+                        </m:dPr>
+                        <m:e>
+                          <m:r>
+                            <a:rPr lang="en-US" i="1">
+                              <a:latin typeface="Cambria Math" panose="02040503050406030204" pitchFamily="18" charset="0"/>
+                            </a:rPr>
+                            <m:t>𝐻</m:t>
+                          </m:r>
+                        </m:e>
+                      </m:d>
                       <m:r>
                         <a:rPr lang="en-US" i="1">
                           <a:latin typeface="Cambria Math" panose="02040503050406030204" pitchFamily="18" charset="0"/>
                         </a:rPr>
-                        <m:t>𝑤𝐻</m:t>
-                      </m:r>
-                      <m:r>
-                        <a:rPr lang="en-US" i="1">
-                          <a:latin typeface="Cambria Math" panose="02040503050406030204" pitchFamily="18" charset="0"/>
-                        </a:rPr>
-                        <m:t>+</m:t>
-                      </m:r>
-                      <m:r>
-                        <a:rPr lang="en-US" i="1">
-                          <a:latin typeface="Cambria Math" panose="02040503050406030204" pitchFamily="18" charset="0"/>
-                        </a:rPr>
-                        <m:t>𝑇</m:t>
+                        <m:t>&gt;0</m:t>
                       </m:r>
                     </m:oMath>
                   </m:oMathPara>
@@ -43615,76 +43877,102 @@
                 <a:endParaRPr lang="en-US" dirty="0"/>
               </a:p>
               <a:p>
+                <a:pPr lvl="1"/>
                 <a:r>
                   <a:rPr lang="en-US" dirty="0"/>
-                  <a:t>Left-hand side: Sources of spending</a:t>
+                  <a:t>But is that natural? People are miserable when unemployed. </a:t>
+                </a:r>
+                <a:br>
+                  <a:rPr lang="en-US" dirty="0"/>
+                </a:br>
+                <a:r>
+                  <a:rPr lang="en-US" dirty="0"/>
+                  <a:t>Work provides people with meaning</a:t>
                 </a:r>
               </a:p>
               <a:p>
                 <a:pPr lvl="1"/>
                 <a:r>
                   <a:rPr lang="en-US" dirty="0"/>
-                  <a:t>Consumption: </a:t>
+                  <a:t>Even if people like their jobs, work yields disutility </a:t>
                 </a:r>
+                <a:r>
+                  <a:rPr lang="en-US" dirty="0">
+                    <a:solidFill>
+                      <a:srgbClr val="C00000"/>
+                    </a:solidFill>
+                  </a:rPr>
+                  <a:t>on the margin</a:t>
+                </a:r>
+              </a:p>
+              <a:p>
+                <a:r>
+                  <a:rPr lang="en-US" dirty="0"/>
+                  <a:t>Household’s marginal disutility of working is increasing: </a:t>
+                </a:r>
+              </a:p>
+              <a:p>
+                <a:pPr marL="0" indent="0">
+                  <a:buNone/>
+                </a:pPr>
                 <a14:m>
-                  <m:oMath xmlns:m="http://schemas.openxmlformats.org/officeDocument/2006/math">
-                    <m:r>
-                      <a:rPr lang="en-US" b="0" i="1" smtClean="0">
-                        <a:latin typeface="Cambria Math" panose="02040503050406030204" pitchFamily="18" charset="0"/>
-                      </a:rPr>
-                      <m:t>𝐶</m:t>
-                    </m:r>
-                  </m:oMath>
+                  <m:oMathPara xmlns:m="http://schemas.openxmlformats.org/officeDocument/2006/math">
+                    <m:oMath>
+                      <m:sSup>
+                        <m:sSupPr>
+                          <m:ctrlPr>
+                            <a:rPr lang="en-US" i="1">
+                              <a:latin typeface="Cambria Math" panose="02040503050406030204" pitchFamily="18" charset="0"/>
+                            </a:rPr>
+                          </m:ctrlPr>
+                        </m:sSupPr>
+                        <m:e>
+                          <m:r>
+                            <a:rPr lang="en-US" i="1">
+                              <a:latin typeface="Cambria Math" panose="02040503050406030204" pitchFamily="18" charset="0"/>
+                            </a:rPr>
+                            <m:t>𝑉</m:t>
+                          </m:r>
+                        </m:e>
+                        <m:sup>
+                          <m:r>
+                            <a:rPr lang="en-US" i="1">
+                              <a:latin typeface="Cambria Math" panose="02040503050406030204" pitchFamily="18" charset="0"/>
+                            </a:rPr>
+                            <m:t>′′</m:t>
+                          </m:r>
+                        </m:sup>
+                      </m:sSup>
+                      <m:d>
+                        <m:dPr>
+                          <m:ctrlPr>
+                            <a:rPr lang="en-US" i="1">
+                              <a:latin typeface="Cambria Math" panose="02040503050406030204" pitchFamily="18" charset="0"/>
+                            </a:rPr>
+                          </m:ctrlPr>
+                        </m:dPr>
+                        <m:e>
+                          <m:r>
+                            <a:rPr lang="en-US" i="1">
+                              <a:latin typeface="Cambria Math" panose="02040503050406030204" pitchFamily="18" charset="0"/>
+                            </a:rPr>
+                            <m:t>𝐻</m:t>
+                          </m:r>
+                        </m:e>
+                      </m:d>
+                      <m:r>
+                        <a:rPr lang="en-US" i="1">
+                          <a:latin typeface="Cambria Math" panose="02040503050406030204" pitchFamily="18" charset="0"/>
+                        </a:rPr>
+                        <m:t>&gt;0</m:t>
+                      </m:r>
+                    </m:oMath>
+                  </m:oMathPara>
                 </a14:m>
                 <a:endParaRPr lang="en-US" dirty="0"/>
               </a:p>
               <a:p>
-                <a:r>
-                  <a:rPr lang="en-US" dirty="0"/>
-                  <a:t>Right-hand side: Sources of income</a:t>
-                </a:r>
-              </a:p>
-              <a:p>
-                <a:pPr lvl="1"/>
-                <a:r>
-                  <a:rPr lang="en-US" dirty="0"/>
-                  <a:t>Labor income: </a:t>
-                </a:r>
-                <a14:m>
-                  <m:oMath xmlns:m="http://schemas.openxmlformats.org/officeDocument/2006/math">
-                    <m:r>
-                      <a:rPr lang="en-US" i="1">
-                        <a:latin typeface="Cambria Math" panose="02040503050406030204" pitchFamily="18" charset="0"/>
-                      </a:rPr>
-                      <m:t>𝑤𝐻</m:t>
-                    </m:r>
-                  </m:oMath>
-                </a14:m>
-                <a:r>
-                  <a:rPr lang="en-US" dirty="0"/>
-                  <a:t> </a:t>
-                </a:r>
-              </a:p>
-              <a:p>
-                <a:pPr lvl="1"/>
-                <a:r>
-                  <a:rPr lang="en-US" dirty="0"/>
-                  <a:t>Other income: </a:t>
-                </a:r>
-                <a14:m>
-                  <m:oMath xmlns:m="http://schemas.openxmlformats.org/officeDocument/2006/math">
-                    <m:r>
-                      <a:rPr lang="en-US" b="0" i="1" smtClean="0">
-                        <a:latin typeface="Cambria Math" panose="02040503050406030204" pitchFamily="18" charset="0"/>
-                      </a:rPr>
-                      <m:t>𝑇</m:t>
-                    </m:r>
-                  </m:oMath>
-                </a14:m>
-                <a:r>
-                  <a:rPr lang="en-US" dirty="0"/>
-                  <a:t> (gov. transfers, lottery winnings, etc.)</a:t>
-                </a:r>
+                <a:endParaRPr lang="en-US" dirty="0"/>
               </a:p>
             </p:txBody>
           </p:sp>
@@ -43692,7 +43980,13 @@
         <mc:Fallback xmlns="">
           <p:sp>
             <p:nvSpPr>
-              <p:cNvPr id="3" name="Content Placeholder 2"/>
+              <p:cNvPr id="3" name="Content Placeholder 2">
+                <a:extLst>
+                  <a:ext uri="{FF2B5EF4-FFF2-40B4-BE49-F238E27FC236}">
+                    <a16:creationId xmlns:a16="http://schemas.microsoft.com/office/drawing/2014/main" id="{F82B446E-2F4E-99D4-44D3-B5E36A8F7DAF}"/>
+                  </a:ext>
+                </a:extLst>
+              </p:cNvPr>
               <p:cNvSpPr>
                 <a:spLocks noGrp="1" noRot="1" noChangeAspect="1" noMove="1" noResize="1" noEditPoints="1" noAdjustHandles="1" noChangeArrowheads="1" noChangeShapeType="1" noTextEdit="1"/>
               </p:cNvSpPr>
@@ -43702,13 +43996,13 @@
             </p:nvSpPr>
             <p:spPr>
               <a:xfrm>
-                <a:off x="609600" y="1600201"/>
-                <a:ext cx="10972800" cy="5121275"/>
+                <a:off x="457200" y="1600201"/>
+                <a:ext cx="11353800" cy="4983161"/>
               </a:xfrm>
               <a:blipFill>
                 <a:blip r:embed="rId2"/>
                 <a:stretch>
-                  <a:fillRect l="-1278" t="-1548"/>
+                  <a:fillRect l="-1235" t="-1469" r="-107"/>
                 </a:stretch>
               </a:blipFill>
             </p:spPr>
@@ -43729,7 +44023,13 @@
       </mc:AlternateContent>
       <p:sp>
         <p:nvSpPr>
-          <p:cNvPr id="4" name="Slide Number Placeholder 3"/>
+          <p:cNvPr id="4" name="Slide Number Placeholder 3">
+            <a:extLst>
+              <a:ext uri="{FF2B5EF4-FFF2-40B4-BE49-F238E27FC236}">
+                <a16:creationId xmlns:a16="http://schemas.microsoft.com/office/drawing/2014/main" id="{353614C7-738B-6760-8060-B5B2D9B3EDF3}"/>
+              </a:ext>
+            </a:extLst>
+          </p:cNvPr>
           <p:cNvSpPr>
             <a:spLocks noGrp="1"/>
           </p:cNvSpPr>
@@ -43754,7 +44054,7 @@
     </p:spTree>
     <p:extLst>
       <p:ext uri="{BB962C8B-B14F-4D97-AF65-F5344CB8AC3E}">
-        <p14:creationId xmlns:p14="http://schemas.microsoft.com/office/powerpoint/2010/main" val="3439374275"/>
+        <p14:creationId xmlns:p14="http://schemas.microsoft.com/office/powerpoint/2010/main" val="2647997141"/>
       </p:ext>
     </p:extLst>
   </p:cSld>
@@ -43797,7 +44097,7 @@
                                         <p:tgtEl>
                                           <p:spTgt spid="3">
                                             <p:txEl>
-                                              <p:pRg st="3" end="3"/>
+                                              <p:pRg st="1" end="1"/>
                                             </p:txEl>
                                           </p:spTgt>
                                         </p:tgtEl>
@@ -43828,7 +44128,7 @@
                                         <p:tgtEl>
                                           <p:spTgt spid="3">
                                             <p:txEl>
-                                              <p:pRg st="4" end="4"/>
+                                              <p:pRg st="2" end="2"/>
                                             </p:txEl>
                                           </p:spTgt>
                                         </p:tgtEl>
@@ -43877,6 +44177,104 @@
                                         <p:tgtEl>
                                           <p:spTgt spid="3">
                                             <p:txEl>
+                                              <p:pRg st="3" end="3"/>
+                                            </p:txEl>
+                                          </p:spTgt>
+                                        </p:tgtEl>
+                                        <p:attrNameLst>
+                                          <p:attrName>style.visibility</p:attrName>
+                                        </p:attrNameLst>
+                                      </p:cBhvr>
+                                      <p:to>
+                                        <p:strVal val="visible"/>
+                                      </p:to>
+                                    </p:set>
+                                  </p:childTnLst>
+                                </p:cTn>
+                              </p:par>
+                            </p:childTnLst>
+                          </p:cTn>
+                        </p:par>
+                      </p:childTnLst>
+                    </p:cTn>
+                  </p:par>
+                  <p:par>
+                    <p:cTn id="13" fill="hold">
+                      <p:stCondLst>
+                        <p:cond delay="indefinite"/>
+                      </p:stCondLst>
+                      <p:childTnLst>
+                        <p:par>
+                          <p:cTn id="14" fill="hold">
+                            <p:stCondLst>
+                              <p:cond delay="0"/>
+                            </p:stCondLst>
+                            <p:childTnLst>
+                              <p:par>
+                                <p:cTn id="15" presetID="1" presetClass="entr" presetSubtype="0" fill="hold" nodeType="clickEffect">
+                                  <p:stCondLst>
+                                    <p:cond delay="0"/>
+                                  </p:stCondLst>
+                                  <p:childTnLst>
+                                    <p:set>
+                                      <p:cBhvr>
+                                        <p:cTn id="16" dur="1" fill="hold">
+                                          <p:stCondLst>
+                                            <p:cond delay="0"/>
+                                          </p:stCondLst>
+                                        </p:cTn>
+                                        <p:tgtEl>
+                                          <p:spTgt spid="3">
+                                            <p:txEl>
+                                              <p:pRg st="4" end="4"/>
+                                            </p:txEl>
+                                          </p:spTgt>
+                                        </p:tgtEl>
+                                        <p:attrNameLst>
+                                          <p:attrName>style.visibility</p:attrName>
+                                        </p:attrNameLst>
+                                      </p:cBhvr>
+                                      <p:to>
+                                        <p:strVal val="visible"/>
+                                      </p:to>
+                                    </p:set>
+                                  </p:childTnLst>
+                                </p:cTn>
+                              </p:par>
+                            </p:childTnLst>
+                          </p:cTn>
+                        </p:par>
+                      </p:childTnLst>
+                    </p:cTn>
+                  </p:par>
+                  <p:par>
+                    <p:cTn id="17" fill="hold">
+                      <p:stCondLst>
+                        <p:cond delay="indefinite"/>
+                      </p:stCondLst>
+                      <p:childTnLst>
+                        <p:par>
+                          <p:cTn id="18" fill="hold">
+                            <p:stCondLst>
+                              <p:cond delay="0"/>
+                            </p:stCondLst>
+                            <p:childTnLst>
+                              <p:par>
+                                <p:cTn id="19" presetID="1" presetClass="entr" presetSubtype="0" fill="hold" nodeType="clickEffect">
+                                  <p:stCondLst>
+                                    <p:cond delay="0"/>
+                                  </p:stCondLst>
+                                  <p:childTnLst>
+                                    <p:set>
+                                      <p:cBhvr>
+                                        <p:cTn id="20" dur="1" fill="hold">
+                                          <p:stCondLst>
+                                            <p:cond delay="0"/>
+                                          </p:stCondLst>
+                                        </p:cTn>
+                                        <p:tgtEl>
+                                          <p:spTgt spid="3">
+                                            <p:txEl>
                                               <p:pRg st="5" end="5"/>
                                             </p:txEl>
                                           </p:spTgt>
@@ -43893,14 +44291,14 @@
                                 </p:cTn>
                               </p:par>
                               <p:par>
-                                <p:cTn id="13" presetID="1" presetClass="entr" presetSubtype="0" fill="hold" nodeType="withEffect">
+                                <p:cTn id="21" presetID="1" presetClass="entr" presetSubtype="0" fill="hold" nodeType="withEffect">
                                   <p:stCondLst>
                                     <p:cond delay="0"/>
                                   </p:stCondLst>
                                   <p:childTnLst>
                                     <p:set>
                                       <p:cBhvr>
-                                        <p:cTn id="14" dur="1" fill="hold">
+                                        <p:cTn id="22" dur="1" fill="hold">
                                           <p:stCondLst>
                                             <p:cond delay="0"/>
                                           </p:stCondLst>
@@ -43909,37 +44307,6 @@
                                           <p:spTgt spid="3">
                                             <p:txEl>
                                               <p:pRg st="6" end="6"/>
-                                            </p:txEl>
-                                          </p:spTgt>
-                                        </p:tgtEl>
-                                        <p:attrNameLst>
-                                          <p:attrName>style.visibility</p:attrName>
-                                        </p:attrNameLst>
-                                      </p:cBhvr>
-                                      <p:to>
-                                        <p:strVal val="visible"/>
-                                      </p:to>
-                                    </p:set>
-                                  </p:childTnLst>
-                                </p:cTn>
-                              </p:par>
-                              <p:par>
-                                <p:cTn id="15" presetID="1" presetClass="entr" presetSubtype="0" fill="hold" nodeType="withEffect">
-                                  <p:stCondLst>
-                                    <p:cond delay="0"/>
-                                  </p:stCondLst>
-                                  <p:childTnLst>
-                                    <p:set>
-                                      <p:cBhvr>
-                                        <p:cTn id="16" dur="1" fill="hold">
-                                          <p:stCondLst>
-                                            <p:cond delay="0"/>
-                                          </p:stCondLst>
-                                        </p:cTn>
-                                        <p:tgtEl>
-                                          <p:spTgt spid="3">
-                                            <p:txEl>
-                                              <p:pRg st="7" end="7"/>
                                             </p:txEl>
                                           </p:spTgt>
                                         </p:tgtEl>
